--- a/modules/11-automation-devops/assets/automation-devops.pptx
+++ b/modules/11-automation-devops/assets/automation-devops.pptx
@@ -119,6 +119,1846 @@
     </a:lvl9pPr>
   </p:defaultTextStyle>
 </p:presentation>
+</file>
+
+<file path=ppt/notesMasters/notesMaster1.xml><?xml version="1.0" encoding="utf-8"?>
+<p:notesMaster xmlns:a="http://schemas.openxmlformats.org/drawingml/2006/main" xmlns:p="http://schemas.openxmlformats.org/presentationml/2006/main" xmlns:r="http://schemas.openxmlformats.org/officeDocument/2006/relationships">
+  <p:cSld>
+    <p:bg>
+      <p:bgRef idx="1001">
+        <a:schemeClr val="bg1"/>
+      </p:bgRef>
+    </p:bg>
+    <p:spTree>
+      <p:nvGrpSpPr>
+        <p:cNvPr id="1" name=""/>
+        <p:cNvGrpSpPr/>
+        <p:nvPr/>
+      </p:nvGrpSpPr>
+      <p:grpSpPr>
+        <a:xfrm>
+          <a:off x="0" y="0"/>
+          <a:ext cx="0" cy="0"/>
+          <a:chOff x="0" y="0"/>
+          <a:chExt cx="0" cy="0"/>
+        </a:xfrm>
+      </p:grpSpPr>
+      <p:sp>
+        <p:nvSpPr>
+          <p:cNvPr id="2" name="Header Placeholder 1"/>
+          <p:cNvSpPr>
+            <a:spLocks noGrp="1"/>
+          </p:cNvSpPr>
+          <p:nvPr>
+            <p:ph type="hdr" sz="quarter"/>
+          </p:nvPr>
+        </p:nvSpPr>
+        <p:spPr>
+          <a:xfrm>
+            <a:off x="0" y="0"/>
+            <a:ext cx="2971800" cy="457200"/>
+          </a:xfrm>
+          <a:prstGeom prst="rect">
+            <a:avLst/>
+          </a:prstGeom>
+        </p:spPr>
+        <p:txBody>
+          <a:bodyPr vert="horz" lIns="91440" tIns="45720" rIns="91440" bIns="45720" rtlCol="0"/>
+          <a:lstStyle>
+            <a:lvl1pPr algn="l">
+              <a:defRPr sz="1200"/>
+            </a:lvl1pPr>
+          </a:lstStyle>
+          <a:p>
+            <a:endParaRPr lang="en-US"/>
+          </a:p>
+        </p:txBody>
+      </p:sp>
+      <p:sp>
+        <p:nvSpPr>
+          <p:cNvPr id="3" name="Date Placeholder 2"/>
+          <p:cNvSpPr>
+            <a:spLocks noGrp="1"/>
+          </p:cNvSpPr>
+          <p:nvPr>
+            <p:ph type="dt" idx="1"/>
+          </p:nvPr>
+        </p:nvSpPr>
+        <p:spPr>
+          <a:xfrm>
+            <a:off x="3884613" y="0"/>
+            <a:ext cx="2971800" cy="457200"/>
+          </a:xfrm>
+          <a:prstGeom prst="rect">
+            <a:avLst/>
+          </a:prstGeom>
+        </p:spPr>
+        <p:txBody>
+          <a:bodyPr vert="horz" lIns="91440" tIns="45720" rIns="91440" bIns="45720" rtlCol="0"/>
+          <a:lstStyle>
+            <a:lvl1pPr algn="r">
+              <a:defRPr sz="1200"/>
+            </a:lvl1pPr>
+          </a:lstStyle>
+          <a:p>
+            <a:fld id="{0F89C1C7-3DCD-1040-A9CF-14679D8B5DDD}" type="datetimeFigureOut">
+              <a:rPr lang="en-US" smtClean="0"/>
+              <a:t>10/17/16</a:t>
+            </a:fld>
+            <a:endParaRPr lang="en-US"/>
+          </a:p>
+        </p:txBody>
+      </p:sp>
+      <p:sp>
+        <p:nvSpPr>
+          <p:cNvPr id="4" name="Slide Image Placeholder 3"/>
+          <p:cNvSpPr>
+            <a:spLocks noGrp="1" noRot="1" noChangeAspect="1"/>
+          </p:cNvSpPr>
+          <p:nvPr>
+            <p:ph type="sldImg" idx="2"/>
+          </p:nvPr>
+        </p:nvSpPr>
+        <p:spPr>
+          <a:xfrm>
+            <a:off x="1143000" y="685800"/>
+            <a:ext cx="4572000" cy="3429000"/>
+          </a:xfrm>
+          <a:prstGeom prst="rect">
+            <a:avLst/>
+          </a:prstGeom>
+          <a:noFill/>
+          <a:ln w="12700">
+            <a:solidFill>
+              <a:prstClr val="black"/>
+            </a:solidFill>
+          </a:ln>
+        </p:spPr>
+        <p:txBody>
+          <a:bodyPr vert="horz" lIns="91440" tIns="45720" rIns="91440" bIns="45720" rtlCol="0" anchor="ctr"/>
+          <a:lstStyle/>
+          <a:p>
+            <a:endParaRPr lang="en-US"/>
+          </a:p>
+        </p:txBody>
+      </p:sp>
+      <p:sp>
+        <p:nvSpPr>
+          <p:cNvPr id="5" name="Notes Placeholder 4"/>
+          <p:cNvSpPr>
+            <a:spLocks noGrp="1"/>
+          </p:cNvSpPr>
+          <p:nvPr>
+            <p:ph type="body" sz="quarter" idx="3"/>
+          </p:nvPr>
+        </p:nvSpPr>
+        <p:spPr>
+          <a:xfrm>
+            <a:off x="685800" y="4343400"/>
+            <a:ext cx="5486400" cy="4114800"/>
+          </a:xfrm>
+          <a:prstGeom prst="rect">
+            <a:avLst/>
+          </a:prstGeom>
+        </p:spPr>
+        <p:txBody>
+          <a:bodyPr vert="horz" lIns="91440" tIns="45720" rIns="91440" bIns="45720" rtlCol="0"/>
+          <a:lstStyle/>
+          <a:p>
+            <a:pPr lvl="0"/>
+            <a:r>
+              <a:rPr lang="en-US" smtClean="0"/>
+              <a:t>Click to edit Master text styles</a:t>
+            </a:r>
+          </a:p>
+          <a:p>
+            <a:pPr lvl="1"/>
+            <a:r>
+              <a:rPr lang="en-US" smtClean="0"/>
+              <a:t>Second level</a:t>
+            </a:r>
+          </a:p>
+          <a:p>
+            <a:pPr lvl="2"/>
+            <a:r>
+              <a:rPr lang="en-US" smtClean="0"/>
+              <a:t>Third level</a:t>
+            </a:r>
+          </a:p>
+          <a:p>
+            <a:pPr lvl="3"/>
+            <a:r>
+              <a:rPr lang="en-US" smtClean="0"/>
+              <a:t>Fourth level</a:t>
+            </a:r>
+          </a:p>
+          <a:p>
+            <a:pPr lvl="4"/>
+            <a:r>
+              <a:rPr lang="en-US" smtClean="0"/>
+              <a:t>Fifth level</a:t>
+            </a:r>
+            <a:endParaRPr lang="en-US"/>
+          </a:p>
+        </p:txBody>
+      </p:sp>
+      <p:sp>
+        <p:nvSpPr>
+          <p:cNvPr id="6" name="Footer Placeholder 5"/>
+          <p:cNvSpPr>
+            <a:spLocks noGrp="1"/>
+          </p:cNvSpPr>
+          <p:nvPr>
+            <p:ph type="ftr" sz="quarter" idx="4"/>
+          </p:nvPr>
+        </p:nvSpPr>
+        <p:spPr>
+          <a:xfrm>
+            <a:off x="0" y="8685213"/>
+            <a:ext cx="2971800" cy="457200"/>
+          </a:xfrm>
+          <a:prstGeom prst="rect">
+            <a:avLst/>
+          </a:prstGeom>
+        </p:spPr>
+        <p:txBody>
+          <a:bodyPr vert="horz" lIns="91440" tIns="45720" rIns="91440" bIns="45720" rtlCol="0" anchor="b"/>
+          <a:lstStyle>
+            <a:lvl1pPr algn="l">
+              <a:defRPr sz="1200"/>
+            </a:lvl1pPr>
+          </a:lstStyle>
+          <a:p>
+            <a:endParaRPr lang="en-US"/>
+          </a:p>
+        </p:txBody>
+      </p:sp>
+      <p:sp>
+        <p:nvSpPr>
+          <p:cNvPr id="7" name="Slide Number Placeholder 6"/>
+          <p:cNvSpPr>
+            <a:spLocks noGrp="1"/>
+          </p:cNvSpPr>
+          <p:nvPr>
+            <p:ph type="sldNum" sz="quarter" idx="5"/>
+          </p:nvPr>
+        </p:nvSpPr>
+        <p:spPr>
+          <a:xfrm>
+            <a:off x="3884613" y="8685213"/>
+            <a:ext cx="2971800" cy="457200"/>
+          </a:xfrm>
+          <a:prstGeom prst="rect">
+            <a:avLst/>
+          </a:prstGeom>
+        </p:spPr>
+        <p:txBody>
+          <a:bodyPr vert="horz" lIns="91440" tIns="45720" rIns="91440" bIns="45720" rtlCol="0" anchor="b"/>
+          <a:lstStyle>
+            <a:lvl1pPr algn="r">
+              <a:defRPr sz="1200"/>
+            </a:lvl1pPr>
+          </a:lstStyle>
+          <a:p>
+            <a:fld id="{BB5E49A5-4136-284D-997B-48E1D791AD67}" type="slidenum">
+              <a:rPr lang="en-US" smtClean="0"/>
+              <a:t>‹#›</a:t>
+            </a:fld>
+            <a:endParaRPr lang="en-US"/>
+          </a:p>
+        </p:txBody>
+      </p:sp>
+    </p:spTree>
+    <p:extLst>
+      <p:ext uri="{BB962C8B-B14F-4D97-AF65-F5344CB8AC3E}">
+        <p14:creationId xmlns:p14="http://schemas.microsoft.com/office/powerpoint/2010/main" val="2623252185"/>
+      </p:ext>
+    </p:extLst>
+  </p:cSld>
+  <p:clrMap bg1="lt1" tx1="dk1" bg2="lt2" tx2="dk2" accent1="accent1" accent2="accent2" accent3="accent3" accent4="accent4" accent5="accent5" accent6="accent6" hlink="hlink" folHlink="folHlink"/>
+  <p:notesStyle>
+    <a:lvl1pPr marL="0" algn="l" defTabSz="457200" rtl="0" eaLnBrk="1" latinLnBrk="0" hangingPunct="1">
+      <a:defRPr sz="1200" kern="1200">
+        <a:solidFill>
+          <a:schemeClr val="tx1"/>
+        </a:solidFill>
+        <a:latin typeface="+mn-lt"/>
+        <a:ea typeface="+mn-ea"/>
+        <a:cs typeface="+mn-cs"/>
+      </a:defRPr>
+    </a:lvl1pPr>
+    <a:lvl2pPr marL="457200" algn="l" defTabSz="457200" rtl="0" eaLnBrk="1" latinLnBrk="0" hangingPunct="1">
+      <a:defRPr sz="1200" kern="1200">
+        <a:solidFill>
+          <a:schemeClr val="tx1"/>
+        </a:solidFill>
+        <a:latin typeface="+mn-lt"/>
+        <a:ea typeface="+mn-ea"/>
+        <a:cs typeface="+mn-cs"/>
+      </a:defRPr>
+    </a:lvl2pPr>
+    <a:lvl3pPr marL="914400" algn="l" defTabSz="457200" rtl="0" eaLnBrk="1" latinLnBrk="0" hangingPunct="1">
+      <a:defRPr sz="1200" kern="1200">
+        <a:solidFill>
+          <a:schemeClr val="tx1"/>
+        </a:solidFill>
+        <a:latin typeface="+mn-lt"/>
+        <a:ea typeface="+mn-ea"/>
+        <a:cs typeface="+mn-cs"/>
+      </a:defRPr>
+    </a:lvl3pPr>
+    <a:lvl4pPr marL="1371600" algn="l" defTabSz="457200" rtl="0" eaLnBrk="1" latinLnBrk="0" hangingPunct="1">
+      <a:defRPr sz="1200" kern="1200">
+        <a:solidFill>
+          <a:schemeClr val="tx1"/>
+        </a:solidFill>
+        <a:latin typeface="+mn-lt"/>
+        <a:ea typeface="+mn-ea"/>
+        <a:cs typeface="+mn-cs"/>
+      </a:defRPr>
+    </a:lvl4pPr>
+    <a:lvl5pPr marL="1828800" algn="l" defTabSz="457200" rtl="0" eaLnBrk="1" latinLnBrk="0" hangingPunct="1">
+      <a:defRPr sz="1200" kern="1200">
+        <a:solidFill>
+          <a:schemeClr val="tx1"/>
+        </a:solidFill>
+        <a:latin typeface="+mn-lt"/>
+        <a:ea typeface="+mn-ea"/>
+        <a:cs typeface="+mn-cs"/>
+      </a:defRPr>
+    </a:lvl5pPr>
+    <a:lvl6pPr marL="2286000" algn="l" defTabSz="457200" rtl="0" eaLnBrk="1" latinLnBrk="0" hangingPunct="1">
+      <a:defRPr sz="1200" kern="1200">
+        <a:solidFill>
+          <a:schemeClr val="tx1"/>
+        </a:solidFill>
+        <a:latin typeface="+mn-lt"/>
+        <a:ea typeface="+mn-ea"/>
+        <a:cs typeface="+mn-cs"/>
+      </a:defRPr>
+    </a:lvl6pPr>
+    <a:lvl7pPr marL="2743200" algn="l" defTabSz="457200" rtl="0" eaLnBrk="1" latinLnBrk="0" hangingPunct="1">
+      <a:defRPr sz="1200" kern="1200">
+        <a:solidFill>
+          <a:schemeClr val="tx1"/>
+        </a:solidFill>
+        <a:latin typeface="+mn-lt"/>
+        <a:ea typeface="+mn-ea"/>
+        <a:cs typeface="+mn-cs"/>
+      </a:defRPr>
+    </a:lvl7pPr>
+    <a:lvl8pPr marL="3200400" algn="l" defTabSz="457200" rtl="0" eaLnBrk="1" latinLnBrk="0" hangingPunct="1">
+      <a:defRPr sz="1200" kern="1200">
+        <a:solidFill>
+          <a:schemeClr val="tx1"/>
+        </a:solidFill>
+        <a:latin typeface="+mn-lt"/>
+        <a:ea typeface="+mn-ea"/>
+        <a:cs typeface="+mn-cs"/>
+      </a:defRPr>
+    </a:lvl8pPr>
+    <a:lvl9pPr marL="3657600" algn="l" defTabSz="457200" rtl="0" eaLnBrk="1" latinLnBrk="0" hangingPunct="1">
+      <a:defRPr sz="1200" kern="1200">
+        <a:solidFill>
+          <a:schemeClr val="tx1"/>
+        </a:solidFill>
+        <a:latin typeface="+mn-lt"/>
+        <a:ea typeface="+mn-ea"/>
+        <a:cs typeface="+mn-cs"/>
+      </a:defRPr>
+    </a:lvl9pPr>
+  </p:notesStyle>
+</p:notesMaster>
+</file>
+
+<file path=ppt/notesSlides/notesSlide1.xml><?xml version="1.0" encoding="utf-8"?>
+<p:notes xmlns:a="http://schemas.openxmlformats.org/drawingml/2006/main" xmlns:p="http://schemas.openxmlformats.org/presentationml/2006/main" xmlns:r="http://schemas.openxmlformats.org/officeDocument/2006/relationships">
+  <p:cSld>
+    <p:spTree>
+      <p:nvGrpSpPr>
+        <p:cNvPr id="1" name=""/>
+        <p:cNvGrpSpPr/>
+        <p:nvPr/>
+      </p:nvGrpSpPr>
+      <p:grpSpPr>
+        <a:xfrm>
+          <a:off x="0" y="0"/>
+          <a:ext cx="0" cy="0"/>
+          <a:chOff x="0" y="0"/>
+          <a:chExt cx="0" cy="0"/>
+        </a:xfrm>
+      </p:grpSpPr>
+      <p:sp>
+        <p:nvSpPr>
+          <p:cNvPr id="2" name="Slide Image Placeholder 1"/>
+          <p:cNvSpPr>
+            <a:spLocks noGrp="1"/>
+          </p:cNvSpPr>
+          <p:nvPr>
+            <p:ph type="sldImg" idx="2"/>
+          </p:nvPr>
+        </p:nvSpPr>
+        <p:spPr/>
+      </p:sp>
+      <p:sp>
+        <p:nvSpPr>
+          <p:cNvPr id="3" name="Notes Placeholder 2"/>
+          <p:cNvSpPr>
+            <a:spLocks noGrp="1"/>
+          </p:cNvSpPr>
+          <p:nvPr>
+            <p:ph type="body" idx="3" sz="quarter"/>
+          </p:nvPr>
+        </p:nvSpPr>
+        <p:spPr/>
+        <p:txBody>
+          <a:bodyPr/>
+          <a:lstStyle/>
+          <a:p>
+            <a:r>
+              <a:t>Opening talk track: Welcome students to this module and explain that the goal is not to memorize features. The goal is to understand when a pattern helps authors build more trustworthy, maintainable, user-friendly Power BI solutions.</a:t>
+            </a:r>
+          </a:p>
+          <a:p>
+            <a:r>
+              <a:t>Module framing: Frame this module as lifecycle discipline. PBIP and source control make Power BI changes reviewable and repeatable.</a:t>
+            </a:r>
+          </a:p>
+          <a:p>
+            <a:r>
+              <a:t>Set expectations: presentation will introduce the theme, then the lab will let learners build or evaluate the pattern hands-on. Encourage questions about tradeoffs, not just button clicks.</a:t>
+            </a:r>
+          </a:p>
+          <a:p>
+            <a:r>
+              <a:t>Further learning: Power BI Projects: https://learn.microsoft.com/power-bi/developer/projects/projects-overview | TMDL overview: https://learn.microsoft.com/analysis-services/tmdl/tmdl-overview | Power BI REST APIs: https://learn.microsoft.com/rest/api/power-bi/</a:t>
+            </a:r>
+          </a:p>
+        </p:txBody>
+      </p:sp>
+      <p:sp>
+        <p:nvSpPr>
+          <p:cNvPr id="4" name="Slide Number Placeholder 3"/>
+          <p:cNvSpPr>
+            <a:spLocks noGrp="1"/>
+          </p:cNvSpPr>
+          <p:nvPr>
+            <p:ph type="sldNum" idx="5" sz="quarter"/>
+          </p:nvPr>
+        </p:nvSpPr>
+        <p:spPr/>
+      </p:sp>
+    </p:spTree>
+  </p:cSld>
+  <p:clrMapOvr>
+    <a:masterClrMapping/>
+  </p:clrMapOvr>
+</p:notes>
+</file>
+
+<file path=ppt/notesSlides/notesSlide10.xml><?xml version="1.0" encoding="utf-8"?>
+<p:notes xmlns:a="http://schemas.openxmlformats.org/drawingml/2006/main" xmlns:p="http://schemas.openxmlformats.org/presentationml/2006/main" xmlns:r="http://schemas.openxmlformats.org/officeDocument/2006/relationships">
+  <p:cSld>
+    <p:spTree>
+      <p:nvGrpSpPr>
+        <p:cNvPr id="1" name=""/>
+        <p:cNvGrpSpPr/>
+        <p:nvPr/>
+      </p:nvGrpSpPr>
+      <p:grpSpPr>
+        <a:xfrm>
+          <a:off x="0" y="0"/>
+          <a:ext cx="0" cy="0"/>
+          <a:chOff x="0" y="0"/>
+          <a:chExt cx="0" cy="0"/>
+        </a:xfrm>
+      </p:grpSpPr>
+      <p:sp>
+        <p:nvSpPr>
+          <p:cNvPr id="2" name="Slide Image Placeholder 1"/>
+          <p:cNvSpPr>
+            <a:spLocks noGrp="1"/>
+          </p:cNvSpPr>
+          <p:nvPr>
+            <p:ph type="sldImg" idx="2"/>
+          </p:nvPr>
+        </p:nvSpPr>
+        <p:spPr/>
+      </p:sp>
+      <p:sp>
+        <p:nvSpPr>
+          <p:cNvPr id="3" name="Notes Placeholder 2"/>
+          <p:cNvSpPr>
+            <a:spLocks noGrp="1"/>
+          </p:cNvSpPr>
+          <p:nvPr>
+            <p:ph type="body" idx="3" sz="quarter"/>
+          </p:nvPr>
+        </p:nvSpPr>
+        <p:spPr/>
+        <p:txBody>
+          <a:bodyPr/>
+          <a:lstStyle/>
+          <a:p>
+            <a:r>
+              <a:t>Core message: 8. Fabric workspace Git integration.</a:t>
+            </a:r>
+          </a:p>
+          <a:p>
+            <a:r>
+              <a:t>Talking points to expand: Talking points, learner value, and lab connection Talking points • Workspace-connected git • Branching Why it helps • Sync behavior • Commercial/Gov caveats Lab connection Coverage: Partial. Use the lab README to demonstrate or discuss this topic. Review terms: behavior, branching, caveats, connected. 10</a:t>
+            </a:r>
+          </a:p>
+          <a:p>
+            <a:r>
+              <a:t>Why it matters: Frame this module as lifecycle discipline. PBIP and source control make Power BI changes reviewable and repeatable.</a:t>
+            </a:r>
+          </a:p>
+          <a:p>
+            <a:r>
+              <a:t>How it helps users: connect the technical pattern to clearer decisions, fewer confusing report interactions, better trust in results, or easier support.</a:t>
+            </a:r>
+          </a:p>
+          <a:p>
+            <a:r>
+              <a:t>How it builds on prior lessons: reference the previous layer in the workshop, such as prepared data, a clean model, tested measures, or report UX conventions.</a:t>
+            </a:r>
+          </a:p>
+          <a:p>
+            <a:r>
+              <a:t>Lab connection: Show where this concept appears in the module lab. If the lab path is conceptual or Verify for Gov, explain what learners should document instead of building hands-on.</a:t>
+            </a:r>
+          </a:p>
+          <a:p>
+            <a:r>
+              <a:t>Instructor prompt: Ask one learner to describe the risk of skipping this pattern or using it without validation.</a:t>
+            </a:r>
+          </a:p>
+          <a:p>
+            <a:r>
+              <a:t>Further learning: Power BI Projects: https://learn.microsoft.com/power-bi/developer/projects/projects-overview | TMDL overview: https://learn.microsoft.com/analysis-services/tmdl/tmdl-overview | Power BI REST APIs: https://learn.microsoft.com/rest/api/power-bi/</a:t>
+            </a:r>
+          </a:p>
+        </p:txBody>
+      </p:sp>
+      <p:sp>
+        <p:nvSpPr>
+          <p:cNvPr id="4" name="Slide Number Placeholder 3"/>
+          <p:cNvSpPr>
+            <a:spLocks noGrp="1"/>
+          </p:cNvSpPr>
+          <p:nvPr>
+            <p:ph type="sldNum" idx="5" sz="quarter"/>
+          </p:nvPr>
+        </p:nvSpPr>
+        <p:spPr/>
+      </p:sp>
+    </p:spTree>
+  </p:cSld>
+  <p:clrMapOvr>
+    <a:masterClrMapping/>
+  </p:clrMapOvr>
+</p:notes>
+</file>
+
+<file path=ppt/notesSlides/notesSlide11.xml><?xml version="1.0" encoding="utf-8"?>
+<p:notes xmlns:a="http://schemas.openxmlformats.org/drawingml/2006/main" xmlns:p="http://schemas.openxmlformats.org/presentationml/2006/main" xmlns:r="http://schemas.openxmlformats.org/officeDocument/2006/relationships">
+  <p:cSld>
+    <p:spTree>
+      <p:nvGrpSpPr>
+        <p:cNvPr id="1" name=""/>
+        <p:cNvGrpSpPr/>
+        <p:nvPr/>
+      </p:nvGrpSpPr>
+      <p:grpSpPr>
+        <a:xfrm>
+          <a:off x="0" y="0"/>
+          <a:ext cx="0" cy="0"/>
+          <a:chOff x="0" y="0"/>
+          <a:chExt cx="0" cy="0"/>
+        </a:xfrm>
+      </p:grpSpPr>
+      <p:sp>
+        <p:nvSpPr>
+          <p:cNvPr id="2" name="Slide Image Placeholder 1"/>
+          <p:cNvSpPr>
+            <a:spLocks noGrp="1"/>
+          </p:cNvSpPr>
+          <p:nvPr>
+            <p:ph type="sldImg" idx="2"/>
+          </p:nvPr>
+        </p:nvSpPr>
+        <p:spPr/>
+      </p:sp>
+      <p:sp>
+        <p:nvSpPr>
+          <p:cNvPr id="3" name="Notes Placeholder 2"/>
+          <p:cNvSpPr>
+            <a:spLocks noGrp="1"/>
+          </p:cNvSpPr>
+          <p:nvPr>
+            <p:ph type="body" idx="3" sz="quarter"/>
+          </p:nvPr>
+        </p:nvSpPr>
+        <p:spPr/>
+        <p:txBody>
+          <a:bodyPr/>
+          <a:lstStyle/>
+          <a:p>
+            <a:r>
+              <a:t>Core message: 9. Azure DevOps conceptual pipeline.</a:t>
+            </a:r>
+          </a:p>
+          <a:p>
+            <a:r>
+              <a:t>Talking points to expand: Talking points, learner value, and lab connection Talking points • Validate • Package • Deploy Why it helps • Configure • Smoke test Lab connection Coverage: Covered. Use the lab README to demonstrate or discuss this topic. Review terms: configure, package, smoke. 11</a:t>
+            </a:r>
+          </a:p>
+          <a:p>
+            <a:r>
+              <a:t>Why it matters: Frame this module as lifecycle discipline. PBIP and source control make Power BI changes reviewable and repeatable.</a:t>
+            </a:r>
+          </a:p>
+          <a:p>
+            <a:r>
+              <a:t>How it helps users: connect the technical pattern to clearer decisions, fewer confusing report interactions, better trust in results, or easier support.</a:t>
+            </a:r>
+          </a:p>
+          <a:p>
+            <a:r>
+              <a:t>How it builds on prior lessons: reference the previous layer in the workshop, such as prepared data, a clean model, tested measures, or report UX conventions.</a:t>
+            </a:r>
+          </a:p>
+          <a:p>
+            <a:r>
+              <a:t>Lab connection: Show where this concept appears in the module lab. If the lab path is conceptual or Verify for Gov, explain what learners should document instead of building hands-on.</a:t>
+            </a:r>
+          </a:p>
+          <a:p>
+            <a:r>
+              <a:t>Instructor prompt: Ask one learner to describe the risk of skipping this pattern or using it without validation.</a:t>
+            </a:r>
+          </a:p>
+          <a:p>
+            <a:r>
+              <a:t>Further learning: Power BI Projects: https://learn.microsoft.com/power-bi/developer/projects/projects-overview | TMDL overview: https://learn.microsoft.com/analysis-services/tmdl/tmdl-overview | Power BI REST APIs: https://learn.microsoft.com/rest/api/power-bi/</a:t>
+            </a:r>
+          </a:p>
+        </p:txBody>
+      </p:sp>
+      <p:sp>
+        <p:nvSpPr>
+          <p:cNvPr id="4" name="Slide Number Placeholder 3"/>
+          <p:cNvSpPr>
+            <a:spLocks noGrp="1"/>
+          </p:cNvSpPr>
+          <p:nvPr>
+            <p:ph type="sldNum" idx="5" sz="quarter"/>
+          </p:nvPr>
+        </p:nvSpPr>
+        <p:spPr/>
+      </p:sp>
+    </p:spTree>
+  </p:cSld>
+  <p:clrMapOvr>
+    <a:masterClrMapping/>
+  </p:clrMapOvr>
+</p:notes>
+</file>
+
+<file path=ppt/notesSlides/notesSlide12.xml><?xml version="1.0" encoding="utf-8"?>
+<p:notes xmlns:a="http://schemas.openxmlformats.org/drawingml/2006/main" xmlns:p="http://schemas.openxmlformats.org/presentationml/2006/main" xmlns:r="http://schemas.openxmlformats.org/officeDocument/2006/relationships">
+  <p:cSld>
+    <p:spTree>
+      <p:nvGrpSpPr>
+        <p:cNvPr id="1" name=""/>
+        <p:cNvGrpSpPr/>
+        <p:nvPr/>
+      </p:nvGrpSpPr>
+      <p:grpSpPr>
+        <a:xfrm>
+          <a:off x="0" y="0"/>
+          <a:ext cx="0" cy="0"/>
+          <a:chOff x="0" y="0"/>
+          <a:chExt cx="0" cy="0"/>
+        </a:xfrm>
+      </p:grpSpPr>
+      <p:sp>
+        <p:nvSpPr>
+          <p:cNvPr id="2" name="Slide Image Placeholder 1"/>
+          <p:cNvSpPr>
+            <a:spLocks noGrp="1"/>
+          </p:cNvSpPr>
+          <p:nvPr>
+            <p:ph type="sldImg" idx="2"/>
+          </p:nvPr>
+        </p:nvSpPr>
+        <p:spPr/>
+      </p:sp>
+      <p:sp>
+        <p:nvSpPr>
+          <p:cNvPr id="3" name="Notes Placeholder 2"/>
+          <p:cNvSpPr>
+            <a:spLocks noGrp="1"/>
+          </p:cNvSpPr>
+          <p:nvPr>
+            <p:ph type="body" idx="3" sz="quarter"/>
+          </p:nvPr>
+        </p:nvSpPr>
+        <p:spPr/>
+        <p:txBody>
+          <a:bodyPr/>
+          <a:lstStyle/>
+          <a:p>
+            <a:r>
+              <a:t>Core message: 10. GitHub Actions conceptual pipeline.</a:t>
+            </a:r>
+          </a:p>
+          <a:p>
+            <a:r>
+              <a:t>Talking points to expand: Talking points, learner value, and lab connection Talking points • Trigger • Validate • Authenticate Why it helps • Deploy • Record evidence Lab connection Coverage: Covered. Use the lab README to demonstrate or discuss this topic. Review terms: authenticate. 12</a:t>
+            </a:r>
+          </a:p>
+          <a:p>
+            <a:r>
+              <a:t>Why it matters: Frame this module as lifecycle discipline. PBIP and source control make Power BI changes reviewable and repeatable.</a:t>
+            </a:r>
+          </a:p>
+          <a:p>
+            <a:r>
+              <a:t>How it helps users: connect the technical pattern to clearer decisions, fewer confusing report interactions, better trust in results, or easier support.</a:t>
+            </a:r>
+          </a:p>
+          <a:p>
+            <a:r>
+              <a:t>How it builds on prior lessons: reference the previous layer in the workshop, such as prepared data, a clean model, tested measures, or report UX conventions.</a:t>
+            </a:r>
+          </a:p>
+          <a:p>
+            <a:r>
+              <a:t>Lab connection: Show where this concept appears in the module lab. If the lab path is conceptual or Verify for Gov, explain what learners should document instead of building hands-on.</a:t>
+            </a:r>
+          </a:p>
+          <a:p>
+            <a:r>
+              <a:t>Instructor prompt: Ask one learner to describe the risk of skipping this pattern or using it without validation.</a:t>
+            </a:r>
+          </a:p>
+          <a:p>
+            <a:r>
+              <a:t>Further learning: Power BI Projects: https://learn.microsoft.com/power-bi/developer/projects/projects-overview | TMDL overview: https://learn.microsoft.com/analysis-services/tmdl/tmdl-overview | Power BI REST APIs: https://learn.microsoft.com/rest/api/power-bi/</a:t>
+            </a:r>
+          </a:p>
+        </p:txBody>
+      </p:sp>
+      <p:sp>
+        <p:nvSpPr>
+          <p:cNvPr id="4" name="Slide Number Placeholder 3"/>
+          <p:cNvSpPr>
+            <a:spLocks noGrp="1"/>
+          </p:cNvSpPr>
+          <p:nvPr>
+            <p:ph type="sldNum" idx="5" sz="quarter"/>
+          </p:nvPr>
+        </p:nvSpPr>
+        <p:spPr/>
+      </p:sp>
+    </p:spTree>
+  </p:cSld>
+  <p:clrMapOvr>
+    <a:masterClrMapping/>
+  </p:clrMapOvr>
+</p:notes>
+</file>
+
+<file path=ppt/notesSlides/notesSlide13.xml><?xml version="1.0" encoding="utf-8"?>
+<p:notes xmlns:a="http://schemas.openxmlformats.org/drawingml/2006/main" xmlns:p="http://schemas.openxmlformats.org/presentationml/2006/main" xmlns:r="http://schemas.openxmlformats.org/officeDocument/2006/relationships">
+  <p:cSld>
+    <p:spTree>
+      <p:nvGrpSpPr>
+        <p:cNvPr id="1" name=""/>
+        <p:cNvGrpSpPr/>
+        <p:nvPr/>
+      </p:nvGrpSpPr>
+      <p:grpSpPr>
+        <a:xfrm>
+          <a:off x="0" y="0"/>
+          <a:ext cx="0" cy="0"/>
+          <a:chOff x="0" y="0"/>
+          <a:chExt cx="0" cy="0"/>
+        </a:xfrm>
+      </p:grpSpPr>
+      <p:sp>
+        <p:nvSpPr>
+          <p:cNvPr id="2" name="Slide Image Placeholder 1"/>
+          <p:cNvSpPr>
+            <a:spLocks noGrp="1"/>
+          </p:cNvSpPr>
+          <p:nvPr>
+            <p:ph type="sldImg" idx="2"/>
+          </p:nvPr>
+        </p:nvSpPr>
+        <p:spPr/>
+      </p:sp>
+      <p:sp>
+        <p:nvSpPr>
+          <p:cNvPr id="3" name="Notes Placeholder 2"/>
+          <p:cNvSpPr>
+            <a:spLocks noGrp="1"/>
+          </p:cNvSpPr>
+          <p:nvPr>
+            <p:ph type="body" idx="3" sz="quarter"/>
+          </p:nvPr>
+        </p:nvSpPr>
+        <p:spPr/>
+        <p:txBody>
+          <a:bodyPr/>
+          <a:lstStyle/>
+          <a:p>
+            <a:r>
+              <a:t>Core message: 11. Azure Government considerations.</a:t>
+            </a:r>
+          </a:p>
+          <a:p>
+            <a:r>
+              <a:t>Talking points to expand: Talking points, learner value, and lab connection Talking points • Endpoints • Identity • Network Why it helps • Customer policy • Feature availability Lab connection Coverage: Partial. Use the lab README to demonstrate or discuss this topic. Review terms: availability, considerations, endpoints, identity, network. 13</a:t>
+            </a:r>
+          </a:p>
+          <a:p>
+            <a:r>
+              <a:t>Why it matters: Frame this module as lifecycle discipline. PBIP and source control make Power BI changes reviewable and repeatable.</a:t>
+            </a:r>
+          </a:p>
+          <a:p>
+            <a:r>
+              <a:t>How it helps users: connect the technical pattern to clearer decisions, fewer confusing report interactions, better trust in results, or easier support.</a:t>
+            </a:r>
+          </a:p>
+          <a:p>
+            <a:r>
+              <a:t>How it builds on prior lessons: reference the previous layer in the workshop, such as prepared data, a clean model, tested measures, or report UX conventions.</a:t>
+            </a:r>
+          </a:p>
+          <a:p>
+            <a:r>
+              <a:t>Lab connection: Show where this concept appears in the module lab. If the lab path is conceptual or Verify for Gov, explain what learners should document instead of building hands-on.</a:t>
+            </a:r>
+          </a:p>
+          <a:p>
+            <a:r>
+              <a:t>Instructor prompt: Ask one learner to describe the risk of skipping this pattern or using it without validation.</a:t>
+            </a:r>
+          </a:p>
+          <a:p>
+            <a:r>
+              <a:t>Further learning: Power BI Projects: https://learn.microsoft.com/power-bi/developer/projects/projects-overview | TMDL overview: https://learn.microsoft.com/analysis-services/tmdl/tmdl-overview | Power BI REST APIs: https://learn.microsoft.com/rest/api/power-bi/</a:t>
+            </a:r>
+          </a:p>
+        </p:txBody>
+      </p:sp>
+      <p:sp>
+        <p:nvSpPr>
+          <p:cNvPr id="4" name="Slide Number Placeholder 3"/>
+          <p:cNvSpPr>
+            <a:spLocks noGrp="1"/>
+          </p:cNvSpPr>
+          <p:nvPr>
+            <p:ph type="sldNum" idx="5" sz="quarter"/>
+          </p:nvPr>
+        </p:nvSpPr>
+        <p:spPr/>
+      </p:sp>
+    </p:spTree>
+  </p:cSld>
+  <p:clrMapOvr>
+    <a:masterClrMapping/>
+  </p:clrMapOvr>
+</p:notes>
+</file>
+
+<file path=ppt/notesSlides/notesSlide14.xml><?xml version="1.0" encoding="utf-8"?>
+<p:notes xmlns:a="http://schemas.openxmlformats.org/drawingml/2006/main" xmlns:p="http://schemas.openxmlformats.org/presentationml/2006/main" xmlns:r="http://schemas.openxmlformats.org/officeDocument/2006/relationships">
+  <p:cSld>
+    <p:spTree>
+      <p:nvGrpSpPr>
+        <p:cNvPr id="1" name=""/>
+        <p:cNvGrpSpPr/>
+        <p:nvPr/>
+      </p:nvGrpSpPr>
+      <p:grpSpPr>
+        <a:xfrm>
+          <a:off x="0" y="0"/>
+          <a:ext cx="0" cy="0"/>
+          <a:chOff x="0" y="0"/>
+          <a:chExt cx="0" cy="0"/>
+        </a:xfrm>
+      </p:grpSpPr>
+      <p:sp>
+        <p:nvSpPr>
+          <p:cNvPr id="2" name="Slide Image Placeholder 1"/>
+          <p:cNvSpPr>
+            <a:spLocks noGrp="1"/>
+          </p:cNvSpPr>
+          <p:nvPr>
+            <p:ph type="sldImg" idx="2"/>
+          </p:nvPr>
+        </p:nvSpPr>
+        <p:spPr/>
+      </p:sp>
+      <p:sp>
+        <p:nvSpPr>
+          <p:cNvPr id="3" name="Notes Placeholder 2"/>
+          <p:cNvSpPr>
+            <a:spLocks noGrp="1"/>
+          </p:cNvSpPr>
+          <p:nvPr>
+            <p:ph type="body" idx="3" sz="quarter"/>
+          </p:nvPr>
+        </p:nvSpPr>
+        <p:spPr/>
+        <p:txBody>
+          <a:bodyPr/>
+          <a:lstStyle/>
+          <a:p>
+            <a:r>
+              <a:t>Core message: 12. Deployment checklist.</a:t>
+            </a:r>
+          </a:p>
+          <a:p>
+            <a:r>
+              <a:t>Talking points to expand: Talking points, learner value, and lab connection Talking points • Source • Security • Refresh Why it helps • Validation • Rollback Lab connection Coverage: Covered. Use the lab README to demonstrate or discuss this topic. Review terms: refresh, rollback. 14</a:t>
+            </a:r>
+          </a:p>
+          <a:p>
+            <a:r>
+              <a:t>Why it matters: Frame this module as lifecycle discipline. PBIP and source control make Power BI changes reviewable and repeatable.</a:t>
+            </a:r>
+          </a:p>
+          <a:p>
+            <a:r>
+              <a:t>How it helps users: connect the technical pattern to clearer decisions, fewer confusing report interactions, better trust in results, or easier support.</a:t>
+            </a:r>
+          </a:p>
+          <a:p>
+            <a:r>
+              <a:t>How it builds on prior lessons: reference the previous layer in the workshop, such as prepared data, a clean model, tested measures, or report UX conventions.</a:t>
+            </a:r>
+          </a:p>
+          <a:p>
+            <a:r>
+              <a:t>Lab connection: Show where this concept appears in the module lab. If the lab path is conceptual or Verify for Gov, explain what learners should document instead of building hands-on.</a:t>
+            </a:r>
+          </a:p>
+          <a:p>
+            <a:r>
+              <a:t>Instructor prompt: Ask one learner to describe the risk of skipping this pattern or using it without validation.</a:t>
+            </a:r>
+          </a:p>
+          <a:p>
+            <a:r>
+              <a:t>Further learning: Power BI Projects: https://learn.microsoft.com/power-bi/developer/projects/projects-overview | TMDL overview: https://learn.microsoft.com/analysis-services/tmdl/tmdl-overview | Power BI REST APIs: https://learn.microsoft.com/rest/api/power-bi/</a:t>
+            </a:r>
+          </a:p>
+        </p:txBody>
+      </p:sp>
+      <p:sp>
+        <p:nvSpPr>
+          <p:cNvPr id="4" name="Slide Number Placeholder 3"/>
+          <p:cNvSpPr>
+            <a:spLocks noGrp="1"/>
+          </p:cNvSpPr>
+          <p:nvPr>
+            <p:ph type="sldNum" idx="5" sz="quarter"/>
+          </p:nvPr>
+        </p:nvSpPr>
+        <p:spPr/>
+      </p:sp>
+    </p:spTree>
+  </p:cSld>
+  <p:clrMapOvr>
+    <a:masterClrMapping/>
+  </p:clrMapOvr>
+</p:notes>
+</file>
+
+<file path=ppt/notesSlides/notesSlide15.xml><?xml version="1.0" encoding="utf-8"?>
+<p:notes xmlns:a="http://schemas.openxmlformats.org/drawingml/2006/main" xmlns:p="http://schemas.openxmlformats.org/presentationml/2006/main" xmlns:r="http://schemas.openxmlformats.org/officeDocument/2006/relationships">
+  <p:cSld>
+    <p:spTree>
+      <p:nvGrpSpPr>
+        <p:cNvPr id="1" name=""/>
+        <p:cNvGrpSpPr/>
+        <p:nvPr/>
+      </p:nvGrpSpPr>
+      <p:grpSpPr>
+        <a:xfrm>
+          <a:off x="0" y="0"/>
+          <a:ext cx="0" cy="0"/>
+          <a:chOff x="0" y="0"/>
+          <a:chExt cx="0" cy="0"/>
+        </a:xfrm>
+      </p:grpSpPr>
+      <p:sp>
+        <p:nvSpPr>
+          <p:cNvPr id="2" name="Slide Image Placeholder 1"/>
+          <p:cNvSpPr>
+            <a:spLocks noGrp="1"/>
+          </p:cNvSpPr>
+          <p:nvPr>
+            <p:ph type="sldImg" idx="2"/>
+          </p:nvPr>
+        </p:nvSpPr>
+        <p:spPr/>
+      </p:sp>
+      <p:sp>
+        <p:nvSpPr>
+          <p:cNvPr id="3" name="Notes Placeholder 2"/>
+          <p:cNvSpPr>
+            <a:spLocks noGrp="1"/>
+          </p:cNvSpPr>
+          <p:nvPr>
+            <p:ph type="body" idx="3" sz="quarter"/>
+          </p:nvPr>
+        </p:nvSpPr>
+        <p:spPr/>
+        <p:txBody>
+          <a:bodyPr/>
+          <a:lstStyle/>
+          <a:p>
+            <a:r>
+              <a:t>Speaker guidance: Use this slide as the handoff for self-study. Do not read every link aloud. Point out which source is most relevant to the lab just completed and which source helps learners go deeper after class.</a:t>
+            </a:r>
+          </a:p>
+          <a:p>
+            <a:r>
+              <a:t>Suggested prompt: Ask learners to bookmark the source that best matches the skill they want to improve next.</a:t>
+            </a:r>
+          </a:p>
+          <a:p>
+            <a:r>
+              <a:t>Further learning: Power BI Projects: https://learn.microsoft.com/power-bi/developer/projects/projects-overview | TMDL overview: https://learn.microsoft.com/analysis-services/tmdl/tmdl-overview | Power BI REST APIs: https://learn.microsoft.com/rest/api/power-bi/</a:t>
+            </a:r>
+          </a:p>
+        </p:txBody>
+      </p:sp>
+      <p:sp>
+        <p:nvSpPr>
+          <p:cNvPr id="4" name="Slide Number Placeholder 3"/>
+          <p:cNvSpPr>
+            <a:spLocks noGrp="1"/>
+          </p:cNvSpPr>
+          <p:nvPr>
+            <p:ph type="sldNum" idx="5" sz="quarter"/>
+          </p:nvPr>
+        </p:nvSpPr>
+        <p:spPr/>
+      </p:sp>
+    </p:spTree>
+  </p:cSld>
+  <p:clrMapOvr>
+    <a:masterClrMapping/>
+  </p:clrMapOvr>
+</p:notes>
+</file>
+
+<file path=ppt/notesSlides/notesSlide2.xml><?xml version="1.0" encoding="utf-8"?>
+<p:notes xmlns:a="http://schemas.openxmlformats.org/drawingml/2006/main" xmlns:p="http://schemas.openxmlformats.org/presentationml/2006/main" xmlns:r="http://schemas.openxmlformats.org/officeDocument/2006/relationships">
+  <p:cSld>
+    <p:spTree>
+      <p:nvGrpSpPr>
+        <p:cNvPr id="1" name=""/>
+        <p:cNvGrpSpPr/>
+        <p:nvPr/>
+      </p:nvGrpSpPr>
+      <p:grpSpPr>
+        <a:xfrm>
+          <a:off x="0" y="0"/>
+          <a:ext cx="0" cy="0"/>
+          <a:chOff x="0" y="0"/>
+          <a:chExt cx="0" cy="0"/>
+        </a:xfrm>
+      </p:grpSpPr>
+      <p:sp>
+        <p:nvSpPr>
+          <p:cNvPr id="2" name="Slide Image Placeholder 1"/>
+          <p:cNvSpPr>
+            <a:spLocks noGrp="1"/>
+          </p:cNvSpPr>
+          <p:nvPr>
+            <p:ph type="sldImg" idx="2"/>
+          </p:nvPr>
+        </p:nvSpPr>
+        <p:spPr/>
+      </p:sp>
+      <p:sp>
+        <p:nvSpPr>
+          <p:cNvPr id="3" name="Notes Placeholder 2"/>
+          <p:cNvSpPr>
+            <a:spLocks noGrp="1"/>
+          </p:cNvSpPr>
+          <p:nvPr>
+            <p:ph type="body" idx="3" sz="quarter"/>
+          </p:nvPr>
+        </p:nvSpPr>
+        <p:spPr/>
+        <p:txBody>
+          <a:bodyPr/>
+          <a:lstStyle/>
+          <a:p>
+            <a:r>
+              <a:t>Speaker guidance: Emphasize sequence and dependency. Explain what students should already know from prior modules and what this module adds on top.</a:t>
+            </a:r>
+          </a:p>
+          <a:p>
+            <a:r>
+              <a:t>Module framing: Frame this module as lifecycle discipline. PBIP and source control make Power BI changes reviewable and repeatable.</a:t>
+            </a:r>
+          </a:p>
+          <a:p>
+            <a:r>
+              <a:t>Transition: After this slide, move from the concept map into the specific pattern or lab activity.</a:t>
+            </a:r>
+          </a:p>
+          <a:p>
+            <a:r>
+              <a:t>Further learning: Power BI Projects: https://learn.microsoft.com/power-bi/developer/projects/projects-overview | TMDL overview: https://learn.microsoft.com/analysis-services/tmdl/tmdl-overview | Power BI REST APIs: https://learn.microsoft.com/rest/api/power-bi/</a:t>
+            </a:r>
+          </a:p>
+        </p:txBody>
+      </p:sp>
+      <p:sp>
+        <p:nvSpPr>
+          <p:cNvPr id="4" name="Slide Number Placeholder 3"/>
+          <p:cNvSpPr>
+            <a:spLocks noGrp="1"/>
+          </p:cNvSpPr>
+          <p:nvPr>
+            <p:ph type="sldNum" idx="5" sz="quarter"/>
+          </p:nvPr>
+        </p:nvSpPr>
+        <p:spPr/>
+      </p:sp>
+    </p:spTree>
+  </p:cSld>
+  <p:clrMapOvr>
+    <a:masterClrMapping/>
+  </p:clrMapOvr>
+</p:notes>
+</file>
+
+<file path=ppt/notesSlides/notesSlide3.xml><?xml version="1.0" encoding="utf-8"?>
+<p:notes xmlns:a="http://schemas.openxmlformats.org/drawingml/2006/main" xmlns:p="http://schemas.openxmlformats.org/presentationml/2006/main" xmlns:r="http://schemas.openxmlformats.org/officeDocument/2006/relationships">
+  <p:cSld>
+    <p:spTree>
+      <p:nvGrpSpPr>
+        <p:cNvPr id="1" name=""/>
+        <p:cNvGrpSpPr/>
+        <p:nvPr/>
+      </p:nvGrpSpPr>
+      <p:grpSpPr>
+        <a:xfrm>
+          <a:off x="0" y="0"/>
+          <a:ext cx="0" cy="0"/>
+          <a:chOff x="0" y="0"/>
+          <a:chExt cx="0" cy="0"/>
+        </a:xfrm>
+      </p:grpSpPr>
+      <p:sp>
+        <p:nvSpPr>
+          <p:cNvPr id="2" name="Slide Image Placeholder 1"/>
+          <p:cNvSpPr>
+            <a:spLocks noGrp="1"/>
+          </p:cNvSpPr>
+          <p:nvPr>
+            <p:ph type="sldImg" idx="2"/>
+          </p:nvPr>
+        </p:nvSpPr>
+        <p:spPr/>
+      </p:sp>
+      <p:sp>
+        <p:nvSpPr>
+          <p:cNvPr id="3" name="Notes Placeholder 2"/>
+          <p:cNvSpPr>
+            <a:spLocks noGrp="1"/>
+          </p:cNvSpPr>
+          <p:nvPr>
+            <p:ph type="body" idx="3" sz="quarter"/>
+          </p:nvPr>
+        </p:nvSpPr>
+        <p:spPr/>
+        <p:txBody>
+          <a:bodyPr/>
+          <a:lstStyle/>
+          <a:p>
+            <a:r>
+              <a:t>Core message: 1. Lifecycle management goals.</a:t>
+            </a:r>
+          </a:p>
+          <a:p>
+            <a:r>
+              <a:t>Talking points to expand: Talking points, learner value, and lab connection Talking points • Repeatability • Reviewability • Environment promotion Why it helps • Governance • Rollback Lab connection Coverage: Partial. Use the lab README to demonstrate or discuss this topic. Review terms: goals, governance, promotion, repeatability, reviewability. 03</a:t>
+            </a:r>
+          </a:p>
+          <a:p>
+            <a:r>
+              <a:t>Why it matters: Frame this module as lifecycle discipline. PBIP and source control make Power BI changes reviewable and repeatable.</a:t>
+            </a:r>
+          </a:p>
+          <a:p>
+            <a:r>
+              <a:t>How it helps users: connect the technical pattern to clearer decisions, fewer confusing report interactions, better trust in results, or easier support.</a:t>
+            </a:r>
+          </a:p>
+          <a:p>
+            <a:r>
+              <a:t>How it builds on prior lessons: reference the previous layer in the workshop, such as prepared data, a clean model, tested measures, or report UX conventions.</a:t>
+            </a:r>
+          </a:p>
+          <a:p>
+            <a:r>
+              <a:t>Lab connection: Show where this concept appears in the module lab. If the lab path is conceptual or Verify for Gov, explain what learners should document instead of building hands-on.</a:t>
+            </a:r>
+          </a:p>
+          <a:p>
+            <a:r>
+              <a:t>Instructor prompt: Ask one learner to describe the risk of skipping this pattern or using it without validation.</a:t>
+            </a:r>
+          </a:p>
+          <a:p>
+            <a:r>
+              <a:t>Further learning: Power BI Projects: https://learn.microsoft.com/power-bi/developer/projects/projects-overview | TMDL overview: https://learn.microsoft.com/analysis-services/tmdl/tmdl-overview | Power BI REST APIs: https://learn.microsoft.com/rest/api/power-bi/</a:t>
+            </a:r>
+          </a:p>
+        </p:txBody>
+      </p:sp>
+      <p:sp>
+        <p:nvSpPr>
+          <p:cNvPr id="4" name="Slide Number Placeholder 3"/>
+          <p:cNvSpPr>
+            <a:spLocks noGrp="1"/>
+          </p:cNvSpPr>
+          <p:nvPr>
+            <p:ph type="sldNum" idx="5" sz="quarter"/>
+          </p:nvPr>
+        </p:nvSpPr>
+        <p:spPr/>
+      </p:sp>
+    </p:spTree>
+  </p:cSld>
+  <p:clrMapOvr>
+    <a:masterClrMapping/>
+  </p:clrMapOvr>
+</p:notes>
+</file>
+
+<file path=ppt/notesSlides/notesSlide4.xml><?xml version="1.0" encoding="utf-8"?>
+<p:notes xmlns:a="http://schemas.openxmlformats.org/drawingml/2006/main" xmlns:p="http://schemas.openxmlformats.org/presentationml/2006/main" xmlns:r="http://schemas.openxmlformats.org/officeDocument/2006/relationships">
+  <p:cSld>
+    <p:spTree>
+      <p:nvGrpSpPr>
+        <p:cNvPr id="1" name=""/>
+        <p:cNvGrpSpPr/>
+        <p:nvPr/>
+      </p:nvGrpSpPr>
+      <p:grpSpPr>
+        <a:xfrm>
+          <a:off x="0" y="0"/>
+          <a:ext cx="0" cy="0"/>
+          <a:chOff x="0" y="0"/>
+          <a:chExt cx="0" cy="0"/>
+        </a:xfrm>
+      </p:grpSpPr>
+      <p:sp>
+        <p:nvSpPr>
+          <p:cNvPr id="2" name="Slide Image Placeholder 1"/>
+          <p:cNvSpPr>
+            <a:spLocks noGrp="1"/>
+          </p:cNvSpPr>
+          <p:nvPr>
+            <p:ph type="sldImg" idx="2"/>
+          </p:nvPr>
+        </p:nvSpPr>
+        <p:spPr/>
+      </p:sp>
+      <p:sp>
+        <p:nvSpPr>
+          <p:cNvPr id="3" name="Notes Placeholder 2"/>
+          <p:cNvSpPr>
+            <a:spLocks noGrp="1"/>
+          </p:cNvSpPr>
+          <p:nvPr>
+            <p:ph type="body" idx="3" sz="quarter"/>
+          </p:nvPr>
+        </p:nvSpPr>
+        <p:spPr/>
+        <p:txBody>
+          <a:bodyPr/>
+          <a:lstStyle/>
+          <a:p>
+            <a:r>
+              <a:t>Core message: 2. PBIP as source of record.</a:t>
+            </a:r>
+          </a:p>
+          <a:p>
+            <a:r>
+              <a:t>Talking points to expand: Talking points, learner value, and lab connection Talking points • Report source files • Semantic model source files Why it helps • Git-friendly review • PBIX as generated output Lab connection Coverage: Covered. Use the lab README to demonstrate or discuss this topic. Review terms: output. 04</a:t>
+            </a:r>
+          </a:p>
+          <a:p>
+            <a:r>
+              <a:t>Why it matters: Frame this module as lifecycle discipline. PBIP and source control make Power BI changes reviewable and repeatable.</a:t>
+            </a:r>
+          </a:p>
+          <a:p>
+            <a:r>
+              <a:t>How it helps users: connect the technical pattern to clearer decisions, fewer confusing report interactions, better trust in results, or easier support.</a:t>
+            </a:r>
+          </a:p>
+          <a:p>
+            <a:r>
+              <a:t>How it builds on prior lessons: reference the previous layer in the workshop, such as prepared data, a clean model, tested measures, or report UX conventions.</a:t>
+            </a:r>
+          </a:p>
+          <a:p>
+            <a:r>
+              <a:t>Lab connection: Show where this concept appears in the module lab. If the lab path is conceptual or Verify for Gov, explain what learners should document instead of building hands-on.</a:t>
+            </a:r>
+          </a:p>
+          <a:p>
+            <a:r>
+              <a:t>Instructor prompt: Ask one learner to describe the risk of skipping this pattern or using it without validation.</a:t>
+            </a:r>
+          </a:p>
+          <a:p>
+            <a:r>
+              <a:t>Further learning: Power BI Projects: https://learn.microsoft.com/power-bi/developer/projects/projects-overview | TMDL overview: https://learn.microsoft.com/analysis-services/tmdl/tmdl-overview | Power BI REST APIs: https://learn.microsoft.com/rest/api/power-bi/</a:t>
+            </a:r>
+          </a:p>
+        </p:txBody>
+      </p:sp>
+      <p:sp>
+        <p:nvSpPr>
+          <p:cNvPr id="4" name="Slide Number Placeholder 3"/>
+          <p:cNvSpPr>
+            <a:spLocks noGrp="1"/>
+          </p:cNvSpPr>
+          <p:nvPr>
+            <p:ph type="sldNum" idx="5" sz="quarter"/>
+          </p:nvPr>
+        </p:nvSpPr>
+        <p:spPr/>
+      </p:sp>
+    </p:spTree>
+  </p:cSld>
+  <p:clrMapOvr>
+    <a:masterClrMapping/>
+  </p:clrMapOvr>
+</p:notes>
+</file>
+
+<file path=ppt/notesSlides/notesSlide5.xml><?xml version="1.0" encoding="utf-8"?>
+<p:notes xmlns:a="http://schemas.openxmlformats.org/drawingml/2006/main" xmlns:p="http://schemas.openxmlformats.org/presentationml/2006/main" xmlns:r="http://schemas.openxmlformats.org/officeDocument/2006/relationships">
+  <p:cSld>
+    <p:spTree>
+      <p:nvGrpSpPr>
+        <p:cNvPr id="1" name=""/>
+        <p:cNvGrpSpPr/>
+        <p:nvPr/>
+      </p:nvGrpSpPr>
+      <p:grpSpPr>
+        <a:xfrm>
+          <a:off x="0" y="0"/>
+          <a:ext cx="0" cy="0"/>
+          <a:chOff x="0" y="0"/>
+          <a:chExt cx="0" cy="0"/>
+        </a:xfrm>
+      </p:grpSpPr>
+      <p:sp>
+        <p:nvSpPr>
+          <p:cNvPr id="2" name="Slide Image Placeholder 1"/>
+          <p:cNvSpPr>
+            <a:spLocks noGrp="1"/>
+          </p:cNvSpPr>
+          <p:nvPr>
+            <p:ph type="sldImg" idx="2"/>
+          </p:nvPr>
+        </p:nvSpPr>
+        <p:spPr/>
+      </p:sp>
+      <p:sp>
+        <p:nvSpPr>
+          <p:cNvPr id="3" name="Notes Placeholder 2"/>
+          <p:cNvSpPr>
+            <a:spLocks noGrp="1"/>
+          </p:cNvSpPr>
+          <p:nvPr>
+            <p:ph type="body" idx="3" sz="quarter"/>
+          </p:nvPr>
+        </p:nvSpPr>
+        <p:spPr/>
+        <p:txBody>
+          <a:bodyPr/>
+          <a:lstStyle/>
+          <a:p>
+            <a:r>
+              <a:t>Speaker guidance: Emphasize sequence and dependency. Explain what students should already know from prior modules and what this module adds on top.</a:t>
+            </a:r>
+          </a:p>
+          <a:p>
+            <a:r>
+              <a:t>Module framing: Frame this module as lifecycle discipline. PBIP and source control make Power BI changes reviewable and repeatable.</a:t>
+            </a:r>
+          </a:p>
+          <a:p>
+            <a:r>
+              <a:t>Transition: After this slide, move from the concept map into the specific pattern or lab activity.</a:t>
+            </a:r>
+          </a:p>
+          <a:p>
+            <a:r>
+              <a:t>Further learning: Power BI Projects: https://learn.microsoft.com/power-bi/developer/projects/projects-overview | TMDL overview: https://learn.microsoft.com/analysis-services/tmdl/tmdl-overview | Power BI REST APIs: https://learn.microsoft.com/rest/api/power-bi/</a:t>
+            </a:r>
+          </a:p>
+        </p:txBody>
+      </p:sp>
+      <p:sp>
+        <p:nvSpPr>
+          <p:cNvPr id="4" name="Slide Number Placeholder 3"/>
+          <p:cNvSpPr>
+            <a:spLocks noGrp="1"/>
+          </p:cNvSpPr>
+          <p:nvPr>
+            <p:ph type="sldNum" idx="5" sz="quarter"/>
+          </p:nvPr>
+        </p:nvSpPr>
+        <p:spPr/>
+      </p:sp>
+    </p:spTree>
+  </p:cSld>
+  <p:clrMapOvr>
+    <a:masterClrMapping/>
+  </p:clrMapOvr>
+</p:notes>
+</file>
+
+<file path=ppt/notesSlides/notesSlide6.xml><?xml version="1.0" encoding="utf-8"?>
+<p:notes xmlns:a="http://schemas.openxmlformats.org/drawingml/2006/main" xmlns:p="http://schemas.openxmlformats.org/presentationml/2006/main" xmlns:r="http://schemas.openxmlformats.org/officeDocument/2006/relationships">
+  <p:cSld>
+    <p:spTree>
+      <p:nvGrpSpPr>
+        <p:cNvPr id="1" name=""/>
+        <p:cNvGrpSpPr/>
+        <p:nvPr/>
+      </p:nvGrpSpPr>
+      <p:grpSpPr>
+        <a:xfrm>
+          <a:off x="0" y="0"/>
+          <a:ext cx="0" cy="0"/>
+          <a:chOff x="0" y="0"/>
+          <a:chExt cx="0" cy="0"/>
+        </a:xfrm>
+      </p:grpSpPr>
+      <p:sp>
+        <p:nvSpPr>
+          <p:cNvPr id="2" name="Slide Image Placeholder 1"/>
+          <p:cNvSpPr>
+            <a:spLocks noGrp="1"/>
+          </p:cNvSpPr>
+          <p:nvPr>
+            <p:ph type="sldImg" idx="2"/>
+          </p:nvPr>
+        </p:nvSpPr>
+        <p:spPr/>
+      </p:sp>
+      <p:sp>
+        <p:nvSpPr>
+          <p:cNvPr id="3" name="Notes Placeholder 2"/>
+          <p:cNvSpPr>
+            <a:spLocks noGrp="1"/>
+          </p:cNvSpPr>
+          <p:nvPr>
+            <p:ph type="body" idx="3" sz="quarter"/>
+          </p:nvPr>
+        </p:nvSpPr>
+        <p:spPr/>
+        <p:txBody>
+          <a:bodyPr/>
+          <a:lstStyle/>
+          <a:p>
+            <a:r>
+              <a:t>Core message: 4. PBIP file structure.</a:t>
+            </a:r>
+          </a:p>
+          <a:p>
+            <a:r>
+              <a:t>Talking points to expand: Talking points, learner value, and lab connection Talking points • Report folder • Semantic model folder Why it helps • Definition files • What to review Lab connection Coverage: Covered. Use the lab README to demonstrate or discuss this topic. Review terms: none. 06</a:t>
+            </a:r>
+          </a:p>
+          <a:p>
+            <a:r>
+              <a:t>Why it matters: Frame this module as lifecycle discipline. PBIP and source control make Power BI changes reviewable and repeatable.</a:t>
+            </a:r>
+          </a:p>
+          <a:p>
+            <a:r>
+              <a:t>How it helps users: connect the technical pattern to clearer decisions, fewer confusing report interactions, better trust in results, or easier support.</a:t>
+            </a:r>
+          </a:p>
+          <a:p>
+            <a:r>
+              <a:t>How it builds on prior lessons: reference the previous layer in the workshop, such as prepared data, a clean model, tested measures, or report UX conventions.</a:t>
+            </a:r>
+          </a:p>
+          <a:p>
+            <a:r>
+              <a:t>Lab connection: Show where this concept appears in the module lab. If the lab path is conceptual or Verify for Gov, explain what learners should document instead of building hands-on.</a:t>
+            </a:r>
+          </a:p>
+          <a:p>
+            <a:r>
+              <a:t>Instructor prompt: Ask one learner to describe the risk of skipping this pattern or using it without validation.</a:t>
+            </a:r>
+          </a:p>
+          <a:p>
+            <a:r>
+              <a:t>Further learning: Power BI Projects: https://learn.microsoft.com/power-bi/developer/projects/projects-overview | TMDL overview: https://learn.microsoft.com/analysis-services/tmdl/tmdl-overview | Power BI REST APIs: https://learn.microsoft.com/rest/api/power-bi/</a:t>
+            </a:r>
+          </a:p>
+        </p:txBody>
+      </p:sp>
+      <p:sp>
+        <p:nvSpPr>
+          <p:cNvPr id="4" name="Slide Number Placeholder 3"/>
+          <p:cNvSpPr>
+            <a:spLocks noGrp="1"/>
+          </p:cNvSpPr>
+          <p:nvPr>
+            <p:ph type="sldNum" idx="5" sz="quarter"/>
+          </p:nvPr>
+        </p:nvSpPr>
+        <p:spPr/>
+      </p:sp>
+    </p:spTree>
+  </p:cSld>
+  <p:clrMapOvr>
+    <a:masterClrMapping/>
+  </p:clrMapOvr>
+</p:notes>
+</file>
+
+<file path=ppt/notesSlides/notesSlide7.xml><?xml version="1.0" encoding="utf-8"?>
+<p:notes xmlns:a="http://schemas.openxmlformats.org/drawingml/2006/main" xmlns:p="http://schemas.openxmlformats.org/presentationml/2006/main" xmlns:r="http://schemas.openxmlformats.org/officeDocument/2006/relationships">
+  <p:cSld>
+    <p:spTree>
+      <p:nvGrpSpPr>
+        <p:cNvPr id="1" name=""/>
+        <p:cNvGrpSpPr/>
+        <p:nvPr/>
+      </p:nvGrpSpPr>
+      <p:grpSpPr>
+        <a:xfrm>
+          <a:off x="0" y="0"/>
+          <a:ext cx="0" cy="0"/>
+          <a:chOff x="0" y="0"/>
+          <a:chExt cx="0" cy="0"/>
+        </a:xfrm>
+      </p:grpSpPr>
+      <p:sp>
+        <p:nvSpPr>
+          <p:cNvPr id="2" name="Slide Image Placeholder 1"/>
+          <p:cNvSpPr>
+            <a:spLocks noGrp="1"/>
+          </p:cNvSpPr>
+          <p:nvPr>
+            <p:ph type="sldImg" idx="2"/>
+          </p:nvPr>
+        </p:nvSpPr>
+        <p:spPr/>
+      </p:sp>
+      <p:sp>
+        <p:nvSpPr>
+          <p:cNvPr id="3" name="Notes Placeholder 2"/>
+          <p:cNvSpPr>
+            <a:spLocks noGrp="1"/>
+          </p:cNvSpPr>
+          <p:nvPr>
+            <p:ph type="body" idx="3" sz="quarter"/>
+          </p:nvPr>
+        </p:nvSpPr>
+        <p:spPr/>
+        <p:txBody>
+          <a:bodyPr/>
+          <a:lstStyle/>
+          <a:p>
+            <a:r>
+              <a:t>Core message: 5. External tools.</a:t>
+            </a:r>
+          </a:p>
+          <a:p>
+            <a:r>
+              <a:t>Talking points to expand: Talking points, learner value, and lab connection Talking points • Tabular Editor • ALM Toolkit Why it helps • XMLA dependency • Customer policy validation Lab connection Coverage: Covered. Use the lab README to demonstrate or discuss this topic. Review terms: dependency. 07</a:t>
+            </a:r>
+          </a:p>
+          <a:p>
+            <a:r>
+              <a:t>Why it matters: Frame this module as lifecycle discipline. PBIP and source control make Power BI changes reviewable and repeatable.</a:t>
+            </a:r>
+          </a:p>
+          <a:p>
+            <a:r>
+              <a:t>How it helps users: connect the technical pattern to clearer decisions, fewer confusing report interactions, better trust in results, or easier support.</a:t>
+            </a:r>
+          </a:p>
+          <a:p>
+            <a:r>
+              <a:t>How it builds on prior lessons: reference the previous layer in the workshop, such as prepared data, a clean model, tested measures, or report UX conventions.</a:t>
+            </a:r>
+          </a:p>
+          <a:p>
+            <a:r>
+              <a:t>Lab connection: Show where this concept appears in the module lab. If the lab path is conceptual or Verify for Gov, explain what learners should document instead of building hands-on.</a:t>
+            </a:r>
+          </a:p>
+          <a:p>
+            <a:r>
+              <a:t>Instructor prompt: Ask one learner to describe the risk of skipping this pattern or using it without validation.</a:t>
+            </a:r>
+          </a:p>
+          <a:p>
+            <a:r>
+              <a:t>Further learning: Power BI Projects: https://learn.microsoft.com/power-bi/developer/projects/projects-overview | TMDL overview: https://learn.microsoft.com/analysis-services/tmdl/tmdl-overview | Power BI REST APIs: https://learn.microsoft.com/rest/api/power-bi/</a:t>
+            </a:r>
+          </a:p>
+        </p:txBody>
+      </p:sp>
+      <p:sp>
+        <p:nvSpPr>
+          <p:cNvPr id="4" name="Slide Number Placeholder 3"/>
+          <p:cNvSpPr>
+            <a:spLocks noGrp="1"/>
+          </p:cNvSpPr>
+          <p:nvPr>
+            <p:ph type="sldNum" idx="5" sz="quarter"/>
+          </p:nvPr>
+        </p:nvSpPr>
+        <p:spPr/>
+      </p:sp>
+    </p:spTree>
+  </p:cSld>
+  <p:clrMapOvr>
+    <a:masterClrMapping/>
+  </p:clrMapOvr>
+</p:notes>
+</file>
+
+<file path=ppt/notesSlides/notesSlide8.xml><?xml version="1.0" encoding="utf-8"?>
+<p:notes xmlns:a="http://schemas.openxmlformats.org/drawingml/2006/main" xmlns:p="http://schemas.openxmlformats.org/presentationml/2006/main" xmlns:r="http://schemas.openxmlformats.org/officeDocument/2006/relationships">
+  <p:cSld>
+    <p:spTree>
+      <p:nvGrpSpPr>
+        <p:cNvPr id="1" name=""/>
+        <p:cNvGrpSpPr/>
+        <p:nvPr/>
+      </p:nvGrpSpPr>
+      <p:grpSpPr>
+        <a:xfrm>
+          <a:off x="0" y="0"/>
+          <a:ext cx="0" cy="0"/>
+          <a:chOff x="0" y="0"/>
+          <a:chExt cx="0" cy="0"/>
+        </a:xfrm>
+      </p:grpSpPr>
+      <p:sp>
+        <p:nvSpPr>
+          <p:cNvPr id="2" name="Slide Image Placeholder 1"/>
+          <p:cNvSpPr>
+            <a:spLocks noGrp="1"/>
+          </p:cNvSpPr>
+          <p:nvPr>
+            <p:ph type="sldImg" idx="2"/>
+          </p:nvPr>
+        </p:nvSpPr>
+        <p:spPr/>
+      </p:sp>
+      <p:sp>
+        <p:nvSpPr>
+          <p:cNvPr id="3" name="Notes Placeholder 2"/>
+          <p:cNvSpPr>
+            <a:spLocks noGrp="1"/>
+          </p:cNvSpPr>
+          <p:nvPr>
+            <p:ph type="body" idx="3" sz="quarter"/>
+          </p:nvPr>
+        </p:nvSpPr>
+        <p:spPr/>
+        <p:txBody>
+          <a:bodyPr/>
+          <a:lstStyle/>
+          <a:p>
+            <a:r>
+              <a:t>Core message: 6. REST APIs and PowerShell.</a:t>
+            </a:r>
+          </a:p>
+          <a:p>
+            <a:r>
+              <a:t>Talking points to expand: Talking points, learner value, and lab connection Talking points • Workspace operations • Import/export • Refresh Why it helps • Permissions • Endpoint and cloud validation Lab connection Coverage: Covered. Use the lab README to demonstrate or discuss this topic. Review terms: export, import, refresh. 08</a:t>
+            </a:r>
+          </a:p>
+          <a:p>
+            <a:r>
+              <a:t>Why it matters: Frame this module as lifecycle discipline. PBIP and source control make Power BI changes reviewable and repeatable.</a:t>
+            </a:r>
+          </a:p>
+          <a:p>
+            <a:r>
+              <a:t>How it helps users: connect the technical pattern to clearer decisions, fewer confusing report interactions, better trust in results, or easier support.</a:t>
+            </a:r>
+          </a:p>
+          <a:p>
+            <a:r>
+              <a:t>How it builds on prior lessons: reference the previous layer in the workshop, such as prepared data, a clean model, tested measures, or report UX conventions.</a:t>
+            </a:r>
+          </a:p>
+          <a:p>
+            <a:r>
+              <a:t>Lab connection: Show where this concept appears in the module lab. If the lab path is conceptual or Verify for Gov, explain what learners should document instead of building hands-on.</a:t>
+            </a:r>
+          </a:p>
+          <a:p>
+            <a:r>
+              <a:t>Instructor prompt: Ask one learner to describe the risk of skipping this pattern or using it without validation.</a:t>
+            </a:r>
+          </a:p>
+          <a:p>
+            <a:r>
+              <a:t>Further learning: Power BI Projects: https://learn.microsoft.com/power-bi/developer/projects/projects-overview | TMDL overview: https://learn.microsoft.com/analysis-services/tmdl/tmdl-overview | Power BI REST APIs: https://learn.microsoft.com/rest/api/power-bi/</a:t>
+            </a:r>
+          </a:p>
+        </p:txBody>
+      </p:sp>
+      <p:sp>
+        <p:nvSpPr>
+          <p:cNvPr id="4" name="Slide Number Placeholder 3"/>
+          <p:cNvSpPr>
+            <a:spLocks noGrp="1"/>
+          </p:cNvSpPr>
+          <p:nvPr>
+            <p:ph type="sldNum" idx="5" sz="quarter"/>
+          </p:nvPr>
+        </p:nvSpPr>
+        <p:spPr/>
+      </p:sp>
+    </p:spTree>
+  </p:cSld>
+  <p:clrMapOvr>
+    <a:masterClrMapping/>
+  </p:clrMapOvr>
+</p:notes>
+</file>
+
+<file path=ppt/notesSlides/notesSlide9.xml><?xml version="1.0" encoding="utf-8"?>
+<p:notes xmlns:a="http://schemas.openxmlformats.org/drawingml/2006/main" xmlns:p="http://schemas.openxmlformats.org/presentationml/2006/main" xmlns:r="http://schemas.openxmlformats.org/officeDocument/2006/relationships">
+  <p:cSld>
+    <p:spTree>
+      <p:nvGrpSpPr>
+        <p:cNvPr id="1" name=""/>
+        <p:cNvGrpSpPr/>
+        <p:nvPr/>
+      </p:nvGrpSpPr>
+      <p:grpSpPr>
+        <a:xfrm>
+          <a:off x="0" y="0"/>
+          <a:ext cx="0" cy="0"/>
+          <a:chOff x="0" y="0"/>
+          <a:chExt cx="0" cy="0"/>
+        </a:xfrm>
+      </p:grpSpPr>
+      <p:sp>
+        <p:nvSpPr>
+          <p:cNvPr id="2" name="Slide Image Placeholder 1"/>
+          <p:cNvSpPr>
+            <a:spLocks noGrp="1"/>
+          </p:cNvSpPr>
+          <p:nvPr>
+            <p:ph type="sldImg" idx="2"/>
+          </p:nvPr>
+        </p:nvSpPr>
+        <p:spPr/>
+      </p:sp>
+      <p:sp>
+        <p:nvSpPr>
+          <p:cNvPr id="3" name="Notes Placeholder 2"/>
+          <p:cNvSpPr>
+            <a:spLocks noGrp="1"/>
+          </p:cNvSpPr>
+          <p:nvPr>
+            <p:ph type="body" idx="3" sz="quarter"/>
+          </p:nvPr>
+        </p:nvSpPr>
+        <p:spPr/>
+        <p:txBody>
+          <a:bodyPr/>
+          <a:lstStyle/>
+          <a:p>
+            <a:r>
+              <a:t>Core message: 7. Service principals.</a:t>
+            </a:r>
+          </a:p>
+          <a:p>
+            <a:r>
+              <a:t>Talking points to expand: Talking points, learner value, and lab connection Talking points • Entra ID app registration • Tenant settings • Security groups Why it helps • Workspace access • Secret/certificate handling Lab connection Coverage: Covered. Use the lab README to demonstrate or discuss this topic. Review terms: groups. 09</a:t>
+            </a:r>
+          </a:p>
+          <a:p>
+            <a:r>
+              <a:t>Why it matters: Frame this module as lifecycle discipline. PBIP and source control make Power BI changes reviewable and repeatable.</a:t>
+            </a:r>
+          </a:p>
+          <a:p>
+            <a:r>
+              <a:t>How it helps users: connect the technical pattern to clearer decisions, fewer confusing report interactions, better trust in results, or easier support.</a:t>
+            </a:r>
+          </a:p>
+          <a:p>
+            <a:r>
+              <a:t>How it builds on prior lessons: reference the previous layer in the workshop, such as prepared data, a clean model, tested measures, or report UX conventions.</a:t>
+            </a:r>
+          </a:p>
+          <a:p>
+            <a:r>
+              <a:t>Lab connection: Show where this concept appears in the module lab. If the lab path is conceptual or Verify for Gov, explain what learners should document instead of building hands-on.</a:t>
+            </a:r>
+          </a:p>
+          <a:p>
+            <a:r>
+              <a:t>Instructor prompt: Ask one learner to describe the risk of skipping this pattern or using it without validation.</a:t>
+            </a:r>
+          </a:p>
+          <a:p>
+            <a:r>
+              <a:t>Further learning: Power BI Projects: https://learn.microsoft.com/power-bi/developer/projects/projects-overview | TMDL overview: https://learn.microsoft.com/analysis-services/tmdl/tmdl-overview | Power BI REST APIs: https://learn.microsoft.com/rest/api/power-bi/</a:t>
+            </a:r>
+          </a:p>
+        </p:txBody>
+      </p:sp>
+      <p:sp>
+        <p:nvSpPr>
+          <p:cNvPr id="4" name="Slide Number Placeholder 3"/>
+          <p:cNvSpPr>
+            <a:spLocks noGrp="1"/>
+          </p:cNvSpPr>
+          <p:nvPr>
+            <p:ph type="sldNum" idx="5" sz="quarter"/>
+          </p:nvPr>
+        </p:nvSpPr>
+        <p:spPr/>
+      </p:sp>
+    </p:spTree>
+  </p:cSld>
+  <p:clrMapOvr>
+    <a:masterClrMapping/>
+  </p:clrMapOvr>
+</p:notes>
 </file>
 
 <file path=ppt/slideLayouts/slideLayout1.xml><?xml version="1.0" encoding="utf-8"?>
@@ -13303,4 +15143,324 @@
   </a:objectDefaults>
   <a:extraClrSchemeLst/>
 </a:theme>
+</file>
+
+<file path=ppt/theme/theme2.xml><?xml version="1.0" encoding="utf-8"?>
+<a:theme xmlns:a="http://schemas.openxmlformats.org/drawingml/2006/main" name="Office Theme">
+  <a:themeElements>
+    <a:clrScheme name="Office">
+      <a:dk1>
+        <a:sysClr val="windowText" lastClr="000000"/>
+      </a:dk1>
+      <a:lt1>
+        <a:sysClr val="window" lastClr="FFFFFF"/>
+      </a:lt1>
+      <a:dk2>
+        <a:srgbClr val="1F497D"/>
+      </a:dk2>
+      <a:lt2>
+        <a:srgbClr val="EEECE1"/>
+      </a:lt2>
+      <a:accent1>
+        <a:srgbClr val="4F81BD"/>
+      </a:accent1>
+      <a:accent2>
+        <a:srgbClr val="C0504D"/>
+      </a:accent2>
+      <a:accent3>
+        <a:srgbClr val="9BBB59"/>
+      </a:accent3>
+      <a:accent4>
+        <a:srgbClr val="8064A2"/>
+      </a:accent4>
+      <a:accent5>
+        <a:srgbClr val="4BACC6"/>
+      </a:accent5>
+      <a:accent6>
+        <a:srgbClr val="F79646"/>
+      </a:accent6>
+      <a:hlink>
+        <a:srgbClr val="0000FF"/>
+      </a:hlink>
+      <a:folHlink>
+        <a:srgbClr val="800080"/>
+      </a:folHlink>
+    </a:clrScheme>
+    <a:fontScheme name="Office">
+      <a:majorFont>
+        <a:latin typeface="Calibri"/>
+        <a:ea typeface=""/>
+        <a:cs typeface=""/>
+        <a:font script="Jpan" typeface="ＭＳ Ｐゴシック"/>
+        <a:font script="Hang" typeface="맑은 고딕"/>
+        <a:font script="Hans" typeface="宋体"/>
+        <a:font script="Hant" typeface="新細明體"/>
+        <a:font script="Arab" typeface="Times New Roman"/>
+        <a:font script="Hebr" typeface="Times New Roman"/>
+        <a:font script="Thai" typeface="Angsana New"/>
+        <a:font script="Ethi" typeface="Nyala"/>
+        <a:font script="Beng" typeface="Vrinda"/>
+        <a:font script="Gujr" typeface="Shruti"/>
+        <a:font script="Khmr" typeface="MoolBoran"/>
+        <a:font script="Knda" typeface="Tunga"/>
+        <a:font script="Guru" typeface="Raavi"/>
+        <a:font script="Cans" typeface="Euphemia"/>
+        <a:font script="Cher" typeface="Plantagenet Cherokee"/>
+        <a:font script="Yiii" typeface="Microsoft Yi Baiti"/>
+        <a:font script="Tibt" typeface="Microsoft Himalaya"/>
+        <a:font script="Thaa" typeface="MV Boli"/>
+        <a:font script="Deva" typeface="Mangal"/>
+        <a:font script="Telu" typeface="Gautami"/>
+        <a:font script="Taml" typeface="Latha"/>
+        <a:font script="Syrc" typeface="Estrangelo Edessa"/>
+        <a:font script="Orya" typeface="Kalinga"/>
+        <a:font script="Mlym" typeface="Kartika"/>
+        <a:font script="Laoo" typeface="DokChampa"/>
+        <a:font script="Sinh" typeface="Iskoola Pota"/>
+        <a:font script="Mong" typeface="Mongolian Baiti"/>
+        <a:font script="Viet" typeface="Times New Roman"/>
+        <a:font script="Uigh" typeface="Microsoft Uighur"/>
+        <a:font script="Geor" typeface="Sylfaen"/>
+      </a:majorFont>
+      <a:minorFont>
+        <a:latin typeface="Calibri"/>
+        <a:ea typeface=""/>
+        <a:cs typeface=""/>
+        <a:font script="Jpan" typeface="ＭＳ Ｐゴシック"/>
+        <a:font script="Hang" typeface="맑은 고딕"/>
+        <a:font script="Hans" typeface="宋体"/>
+        <a:font script="Hant" typeface="新細明體"/>
+        <a:font script="Arab" typeface="Arial"/>
+        <a:font script="Hebr" typeface="Arial"/>
+        <a:font script="Thai" typeface="Cordia New"/>
+        <a:font script="Ethi" typeface="Nyala"/>
+        <a:font script="Beng" typeface="Vrinda"/>
+        <a:font script="Gujr" typeface="Shruti"/>
+        <a:font script="Khmr" typeface="DaunPenh"/>
+        <a:font script="Knda" typeface="Tunga"/>
+        <a:font script="Guru" typeface="Raavi"/>
+        <a:font script="Cans" typeface="Euphemia"/>
+        <a:font script="Cher" typeface="Plantagenet Cherokee"/>
+        <a:font script="Yiii" typeface="Microsoft Yi Baiti"/>
+        <a:font script="Tibt" typeface="Microsoft Himalaya"/>
+        <a:font script="Thaa" typeface="MV Boli"/>
+        <a:font script="Deva" typeface="Mangal"/>
+        <a:font script="Telu" typeface="Gautami"/>
+        <a:font script="Taml" typeface="Latha"/>
+        <a:font script="Syrc" typeface="Estrangelo Edessa"/>
+        <a:font script="Orya" typeface="Kalinga"/>
+        <a:font script="Mlym" typeface="Kartika"/>
+        <a:font script="Laoo" typeface="DokChampa"/>
+        <a:font script="Sinh" typeface="Iskoola Pota"/>
+        <a:font script="Mong" typeface="Mongolian Baiti"/>
+        <a:font script="Viet" typeface="Arial"/>
+        <a:font script="Uigh" typeface="Microsoft Uighur"/>
+        <a:font script="Geor" typeface="Sylfaen"/>
+      </a:minorFont>
+    </a:fontScheme>
+    <a:fmtScheme name="Office">
+      <a:fillStyleLst>
+        <a:solidFill>
+          <a:schemeClr val="phClr"/>
+        </a:solidFill>
+        <a:gradFill rotWithShape="1">
+          <a:gsLst>
+            <a:gs pos="0">
+              <a:schemeClr val="phClr">
+                <a:tint val="50000"/>
+                <a:satMod val="300000"/>
+              </a:schemeClr>
+            </a:gs>
+            <a:gs pos="35000">
+              <a:schemeClr val="phClr">
+                <a:tint val="37000"/>
+                <a:satMod val="300000"/>
+              </a:schemeClr>
+            </a:gs>
+            <a:gs pos="100000">
+              <a:schemeClr val="phClr">
+                <a:tint val="15000"/>
+                <a:satMod val="350000"/>
+              </a:schemeClr>
+            </a:gs>
+          </a:gsLst>
+          <a:lin ang="16200000" scaled="1"/>
+        </a:gradFill>
+        <a:gradFill rotWithShape="1">
+          <a:gsLst>
+            <a:gs pos="0">
+              <a:schemeClr val="phClr">
+                <a:tint val="100000"/>
+                <a:shade val="100000"/>
+                <a:satMod val="130000"/>
+              </a:schemeClr>
+            </a:gs>
+            <a:gs pos="100000">
+              <a:schemeClr val="phClr">
+                <a:tint val="50000"/>
+                <a:shade val="100000"/>
+                <a:satMod val="350000"/>
+              </a:schemeClr>
+            </a:gs>
+          </a:gsLst>
+          <a:lin ang="16200000" scaled="0"/>
+        </a:gradFill>
+      </a:fillStyleLst>
+      <a:lnStyleLst>
+        <a:ln w="9525" cap="flat" cmpd="sng" algn="ctr">
+          <a:solidFill>
+            <a:schemeClr val="phClr">
+              <a:shade val="95000"/>
+              <a:satMod val="105000"/>
+            </a:schemeClr>
+          </a:solidFill>
+          <a:prstDash val="solid"/>
+        </a:ln>
+        <a:ln w="25400" cap="flat" cmpd="sng" algn="ctr">
+          <a:solidFill>
+            <a:schemeClr val="phClr"/>
+          </a:solidFill>
+          <a:prstDash val="solid"/>
+        </a:ln>
+        <a:ln w="38100" cap="flat" cmpd="sng" algn="ctr">
+          <a:solidFill>
+            <a:schemeClr val="phClr"/>
+          </a:solidFill>
+          <a:prstDash val="solid"/>
+        </a:ln>
+      </a:lnStyleLst>
+      <a:effectStyleLst>
+        <a:effectStyle>
+          <a:effectLst>
+            <a:outerShdw blurRad="40000" dist="20000" dir="5400000" rotWithShape="0">
+              <a:srgbClr val="000000">
+                <a:alpha val="38000"/>
+              </a:srgbClr>
+            </a:outerShdw>
+          </a:effectLst>
+        </a:effectStyle>
+        <a:effectStyle>
+          <a:effectLst>
+            <a:outerShdw blurRad="40000" dist="23000" dir="5400000" rotWithShape="0">
+              <a:srgbClr val="000000">
+                <a:alpha val="35000"/>
+              </a:srgbClr>
+            </a:outerShdw>
+          </a:effectLst>
+        </a:effectStyle>
+        <a:effectStyle>
+          <a:effectLst>
+            <a:outerShdw blurRad="40000" dist="23000" dir="5400000" rotWithShape="0">
+              <a:srgbClr val="000000">
+                <a:alpha val="35000"/>
+              </a:srgbClr>
+            </a:outerShdw>
+          </a:effectLst>
+          <a:scene3d>
+            <a:camera prst="orthographicFront">
+              <a:rot lat="0" lon="0" rev="0"/>
+            </a:camera>
+            <a:lightRig rig="threePt" dir="t">
+              <a:rot lat="0" lon="0" rev="1200000"/>
+            </a:lightRig>
+          </a:scene3d>
+          <a:sp3d>
+            <a:bevelT w="63500" h="25400"/>
+          </a:sp3d>
+        </a:effectStyle>
+      </a:effectStyleLst>
+      <a:bgFillStyleLst>
+        <a:solidFill>
+          <a:schemeClr val="phClr"/>
+        </a:solidFill>
+        <a:gradFill rotWithShape="1">
+          <a:gsLst>
+            <a:gs pos="0">
+              <a:schemeClr val="phClr">
+                <a:tint val="40000"/>
+                <a:satMod val="350000"/>
+              </a:schemeClr>
+            </a:gs>
+            <a:gs pos="40000">
+              <a:schemeClr val="phClr">
+                <a:tint val="45000"/>
+                <a:shade val="99000"/>
+                <a:satMod val="350000"/>
+              </a:schemeClr>
+            </a:gs>
+            <a:gs pos="100000">
+              <a:schemeClr val="phClr">
+                <a:shade val="20000"/>
+                <a:satMod val="255000"/>
+              </a:schemeClr>
+            </a:gs>
+          </a:gsLst>
+          <a:path path="circle">
+            <a:fillToRect l="50000" t="-80000" r="50000" b="180000"/>
+          </a:path>
+        </a:gradFill>
+        <a:gradFill rotWithShape="1">
+          <a:gsLst>
+            <a:gs pos="0">
+              <a:schemeClr val="phClr">
+                <a:tint val="80000"/>
+                <a:satMod val="300000"/>
+              </a:schemeClr>
+            </a:gs>
+            <a:gs pos="100000">
+              <a:schemeClr val="phClr">
+                <a:shade val="30000"/>
+                <a:satMod val="200000"/>
+              </a:schemeClr>
+            </a:gs>
+          </a:gsLst>
+          <a:path path="circle">
+            <a:fillToRect l="50000" t="50000" r="50000" b="50000"/>
+          </a:path>
+        </a:gradFill>
+      </a:bgFillStyleLst>
+    </a:fmtScheme>
+  </a:themeElements>
+  <a:objectDefaults>
+    <a:spDef>
+      <a:spPr/>
+      <a:bodyPr/>
+      <a:lstStyle/>
+      <a:style>
+        <a:lnRef idx="1">
+          <a:schemeClr val="accent1"/>
+        </a:lnRef>
+        <a:fillRef idx="3">
+          <a:schemeClr val="accent1"/>
+        </a:fillRef>
+        <a:effectRef idx="2">
+          <a:schemeClr val="accent1"/>
+        </a:effectRef>
+        <a:fontRef idx="minor">
+          <a:schemeClr val="lt1"/>
+        </a:fontRef>
+      </a:style>
+    </a:spDef>
+    <a:lnDef>
+      <a:spPr/>
+      <a:bodyPr/>
+      <a:lstStyle/>
+      <a:style>
+        <a:lnRef idx="2">
+          <a:schemeClr val="accent1"/>
+        </a:lnRef>
+        <a:fillRef idx="0">
+          <a:schemeClr val="accent1"/>
+        </a:fillRef>
+        <a:effectRef idx="1">
+          <a:schemeClr val="accent1"/>
+        </a:effectRef>
+        <a:fontRef idx="minor">
+          <a:schemeClr val="tx1"/>
+        </a:fontRef>
+      </a:style>
+    </a:lnDef>
+  </a:objectDefaults>
+  <a:extraClrSchemeLst/>
+</a:theme>
 </file>
--- a/modules/11-automation-devops/assets/automation-devops.pptx
+++ b/modules/11-automation-devops/assets/automation-devops.pptx
@@ -5052,7 +5052,7 @@
               </a:defRPr>
             </a:pPr>
             <a:r>
-              <a:t>Power BI Advanced Factory teaching deck</a:t>
+              <a:t>Student module overview</a:t>
             </a:r>
           </a:p>
         </p:txBody>
@@ -5576,42 +5576,6 @@
       </p:sp>
       <p:sp>
         <p:nvSpPr>
-          <p:cNvPr id="4" name="TextBox 3"/>
-          <p:cNvSpPr txBox="1"/>
-          <p:nvPr/>
-        </p:nvSpPr>
-        <p:spPr>
-          <a:xfrm>
-            <a:off x="530352" y="914400"/>
-            <a:ext cx="10515600" cy="320040"/>
-          </a:xfrm>
-          <a:prstGeom prst="rect">
-            <a:avLst/>
-          </a:prstGeom>
-          <a:noFill/>
-        </p:spPr>
-        <p:txBody>
-          <a:bodyPr wrap="none">
-            <a:spAutoFit/>
-          </a:bodyPr>
-          <a:lstStyle/>
-          <a:p>
-            <a:pPr>
-              <a:defRPr sz="1200">
-                <a:solidFill>
-                  <a:srgbClr val="5C5C5C"/>
-                </a:solidFill>
-                <a:latin typeface="Aptos"/>
-              </a:defRPr>
-            </a:pPr>
-            <a:r>
-              <a:t>Talking points, learner value, and lab connection</a:t>
-            </a:r>
-          </a:p>
-        </p:txBody>
-      </p:sp>
-      <p:sp>
-        <p:nvSpPr>
           <p:cNvPr id="5" name="Rounded Rectangle 4"/>
           <p:cNvSpPr/>
           <p:nvPr/>
@@ -5729,7 +5693,139 @@
               </a:defRPr>
             </a:pPr>
             <a:r>
-              <a:t>Talking points</a:t>
+              <a:t>Key ideas</a:t>
+            </a:r>
+            <a:br/>
+            <a:r>
+              <a:t>• Workspace-connected git</a:t>
+            </a:r>
+            <a:br/>
+            <a:r>
+              <a:t>• Branching</a:t>
+            </a:r>
+          </a:p>
+        </p:txBody>
+      </p:sp>
+      <p:sp>
+        <p:nvSpPr>
+          <p:cNvPr id="8" name="Rounded Rectangle 7"/>
+          <p:cNvSpPr/>
+          <p:nvPr/>
+        </p:nvSpPr>
+        <p:spPr>
+          <a:xfrm>
+            <a:off x="6263640" y="1234440"/>
+            <a:ext cx="5303520" cy="1828800"/>
+          </a:xfrm>
+          <a:prstGeom prst="roundRect">
+            <a:avLst/>
+          </a:prstGeom>
+          <a:solidFill>
+            <a:srgbClr val="FFFFFF"/>
+          </a:solidFill>
+          <a:ln>
+            <a:solidFill>
+              <a:srgbClr val="DCDCDC"/>
+            </a:solidFill>
+          </a:ln>
+        </p:spPr>
+        <p:style>
+          <a:lnRef idx="1">
+            <a:schemeClr val="accent1"/>
+          </a:lnRef>
+          <a:fillRef idx="3">
+            <a:schemeClr val="accent1"/>
+          </a:fillRef>
+          <a:effectRef idx="2">
+            <a:schemeClr val="accent1"/>
+          </a:effectRef>
+          <a:fontRef idx="minor">
+            <a:schemeClr val="lt1"/>
+          </a:fontRef>
+        </p:style>
+        <p:txBody>
+          <a:bodyPr rtlCol="0" anchor="ctr"/>
+          <a:lstStyle/>
+          <a:p>
+            <a:pPr algn="ctr"/>
+          </a:p>
+        </p:txBody>
+      </p:sp>
+      <p:sp>
+        <p:nvSpPr>
+          <p:cNvPr id="9" name="Rectangle 8"/>
+          <p:cNvSpPr/>
+          <p:nvPr/>
+        </p:nvSpPr>
+        <p:spPr>
+          <a:xfrm>
+            <a:off x="6263640" y="1234440"/>
+            <a:ext cx="91440" cy="1828800"/>
+          </a:xfrm>
+          <a:prstGeom prst="rect">
+            <a:avLst/>
+          </a:prstGeom>
+          <a:solidFill>
+            <a:srgbClr val="02C39A"/>
+          </a:solidFill>
+          <a:ln>
+            <a:noFill/>
+          </a:ln>
+        </p:spPr>
+        <p:style>
+          <a:lnRef idx="1">
+            <a:schemeClr val="accent1"/>
+          </a:lnRef>
+          <a:fillRef idx="3">
+            <a:schemeClr val="accent1"/>
+          </a:fillRef>
+          <a:effectRef idx="2">
+            <a:schemeClr val="accent1"/>
+          </a:effectRef>
+          <a:fontRef idx="minor">
+            <a:schemeClr val="lt1"/>
+          </a:fontRef>
+        </p:style>
+        <p:txBody>
+          <a:bodyPr rtlCol="0" anchor="ctr"/>
+          <a:lstStyle/>
+          <a:p>
+            <a:pPr algn="ctr"/>
+          </a:p>
+        </p:txBody>
+      </p:sp>
+      <p:sp>
+        <p:nvSpPr>
+          <p:cNvPr id="10" name="TextBox 9"/>
+          <p:cNvSpPr txBox="1"/>
+          <p:nvPr/>
+        </p:nvSpPr>
+        <p:spPr>
+          <a:xfrm>
+            <a:off x="6446520" y="1344168"/>
+            <a:ext cx="4983480" cy="1664208"/>
+          </a:xfrm>
+          <a:prstGeom prst="rect">
+            <a:avLst/>
+          </a:prstGeom>
+          <a:noFill/>
+        </p:spPr>
+        <p:txBody>
+          <a:bodyPr wrap="square" lIns="0" rIns="0">
+            <a:spAutoFit/>
+          </a:bodyPr>
+          <a:lstStyle/>
+          <a:p>
+            <a:pPr>
+              <a:defRPr b="1" sz="1500">
+                <a:solidFill>
+                  <a:srgbClr val="1E2761"/>
+                </a:solidFill>
+                <a:latin typeface="Aptos Display"/>
+              </a:defRPr>
+            </a:pPr>
+            <a:r>
+              <a:t>Why it helps</a:t>
             </a:r>
           </a:p>
           <a:p>
@@ -5745,25 +5841,25 @@
               </a:defRPr>
             </a:pPr>
             <a:r>
-              <a:t>• Workspace-connected git</a:t>
+              <a:t>• Sync behavior</a:t>
             </a:r>
             <a:br/>
             <a:r>
-              <a:t>• Branching</a:t>
-            </a:r>
-          </a:p>
-        </p:txBody>
-      </p:sp>
-      <p:sp>
-        <p:nvSpPr>
-          <p:cNvPr id="8" name="Rounded Rectangle 7"/>
+              <a:t>• Commercial/Gov caveats</a:t>
+            </a:r>
+          </a:p>
+        </p:txBody>
+      </p:sp>
+      <p:sp>
+        <p:nvSpPr>
+          <p:cNvPr id="11" name="Rounded Rectangle 10"/>
           <p:cNvSpPr/>
           <p:nvPr/>
         </p:nvSpPr>
         <p:spPr>
           <a:xfrm>
-            <a:off x="6263640" y="1234440"/>
-            <a:ext cx="5303520" cy="1828800"/>
+            <a:off x="822960" y="4160520"/>
+            <a:ext cx="10424160" cy="868680"/>
           </a:xfrm>
           <a:prstGeom prst="roundRect">
             <a:avLst/>
@@ -5801,20 +5897,20 @@
       </p:sp>
       <p:sp>
         <p:nvSpPr>
-          <p:cNvPr id="9" name="Rectangle 8"/>
+          <p:cNvPr id="12" name="Rectangle 11"/>
           <p:cNvSpPr/>
           <p:nvPr/>
         </p:nvSpPr>
         <p:spPr>
           <a:xfrm>
-            <a:off x="6263640" y="1234440"/>
-            <a:ext cx="91440" cy="1828800"/>
+            <a:off x="822960" y="4160520"/>
+            <a:ext cx="91440" cy="868680"/>
           </a:xfrm>
           <a:prstGeom prst="rect">
             <a:avLst/>
           </a:prstGeom>
           <a:solidFill>
-            <a:srgbClr val="02C39A"/>
+            <a:srgbClr val="F9B700"/>
           </a:solidFill>
           <a:ln>
             <a:noFill/>
@@ -5844,14 +5940,14 @@
       </p:sp>
       <p:sp>
         <p:nvSpPr>
-          <p:cNvPr id="10" name="TextBox 9"/>
+          <p:cNvPr id="13" name="TextBox 12"/>
           <p:cNvSpPr txBox="1"/>
           <p:nvPr/>
         </p:nvSpPr>
         <p:spPr>
           <a:xfrm>
-            <a:off x="6446520" y="1344168"/>
-            <a:ext cx="4983480" cy="1664208"/>
+            <a:off x="1005840" y="4270248"/>
+            <a:ext cx="10104120" cy="704088"/>
           </a:xfrm>
           <a:prstGeom prst="rect">
             <a:avLst/>
@@ -5873,167 +5969,7 @@
               </a:defRPr>
             </a:pPr>
             <a:r>
-              <a:t>Why it helps</a:t>
-            </a:r>
-          </a:p>
-          <a:p>
-            <a:pPr>
-              <a:spcBef>
-                <a:spcPts val="400"/>
-              </a:spcBef>
-              <a:defRPr sz="1050">
-                <a:solidFill>
-                  <a:srgbClr val="242424"/>
-                </a:solidFill>
-                <a:latin typeface="Aptos"/>
-              </a:defRPr>
-            </a:pPr>
-            <a:r>
-              <a:t>• Sync behavior</a:t>
-            </a:r>
-            <a:br/>
-            <a:r>
-              <a:t>• Commercial/Gov caveats</a:t>
-            </a:r>
-          </a:p>
-        </p:txBody>
-      </p:sp>
-      <p:sp>
-        <p:nvSpPr>
-          <p:cNvPr id="11" name="Rounded Rectangle 10"/>
-          <p:cNvSpPr/>
-          <p:nvPr/>
-        </p:nvSpPr>
-        <p:spPr>
-          <a:xfrm>
-            <a:off x="822960" y="4160520"/>
-            <a:ext cx="10424160" cy="868680"/>
-          </a:xfrm>
-          <a:prstGeom prst="roundRect">
-            <a:avLst/>
-          </a:prstGeom>
-          <a:solidFill>
-            <a:srgbClr val="FFFFFF"/>
-          </a:solidFill>
-          <a:ln>
-            <a:solidFill>
-              <a:srgbClr val="DCDCDC"/>
-            </a:solidFill>
-          </a:ln>
-        </p:spPr>
-        <p:style>
-          <a:lnRef idx="1">
-            <a:schemeClr val="accent1"/>
-          </a:lnRef>
-          <a:fillRef idx="3">
-            <a:schemeClr val="accent1"/>
-          </a:fillRef>
-          <a:effectRef idx="2">
-            <a:schemeClr val="accent1"/>
-          </a:effectRef>
-          <a:fontRef idx="minor">
-            <a:schemeClr val="lt1"/>
-          </a:fontRef>
-        </p:style>
-        <p:txBody>
-          <a:bodyPr rtlCol="0" anchor="ctr"/>
-          <a:lstStyle/>
-          <a:p>
-            <a:pPr algn="ctr"/>
-          </a:p>
-        </p:txBody>
-      </p:sp>
-      <p:sp>
-        <p:nvSpPr>
-          <p:cNvPr id="12" name="Rectangle 11"/>
-          <p:cNvSpPr/>
-          <p:nvPr/>
-        </p:nvSpPr>
-        <p:spPr>
-          <a:xfrm>
-            <a:off x="822960" y="4160520"/>
-            <a:ext cx="91440" cy="868680"/>
-          </a:xfrm>
-          <a:prstGeom prst="rect">
-            <a:avLst/>
-          </a:prstGeom>
-          <a:solidFill>
-            <a:srgbClr val="F9B700"/>
-          </a:solidFill>
-          <a:ln>
-            <a:noFill/>
-          </a:ln>
-        </p:spPr>
-        <p:style>
-          <a:lnRef idx="1">
-            <a:schemeClr val="accent1"/>
-          </a:lnRef>
-          <a:fillRef idx="3">
-            <a:schemeClr val="accent1"/>
-          </a:fillRef>
-          <a:effectRef idx="2">
-            <a:schemeClr val="accent1"/>
-          </a:effectRef>
-          <a:fontRef idx="minor">
-            <a:schemeClr val="lt1"/>
-          </a:fontRef>
-        </p:style>
-        <p:txBody>
-          <a:bodyPr rtlCol="0" anchor="ctr"/>
-          <a:lstStyle/>
-          <a:p>
-            <a:pPr algn="ctr"/>
-          </a:p>
-        </p:txBody>
-      </p:sp>
-      <p:sp>
-        <p:nvSpPr>
-          <p:cNvPr id="13" name="TextBox 12"/>
-          <p:cNvSpPr txBox="1"/>
-          <p:nvPr/>
-        </p:nvSpPr>
-        <p:spPr>
-          <a:xfrm>
-            <a:off x="1005840" y="4270248"/>
-            <a:ext cx="10104120" cy="704088"/>
-          </a:xfrm>
-          <a:prstGeom prst="rect">
-            <a:avLst/>
-          </a:prstGeom>
-          <a:noFill/>
-        </p:spPr>
-        <p:txBody>
-          <a:bodyPr wrap="square" lIns="0" rIns="0">
-            <a:spAutoFit/>
-          </a:bodyPr>
-          <a:lstStyle/>
-          <a:p>
-            <a:pPr>
-              <a:defRPr b="1" sz="1500">
-                <a:solidFill>
-                  <a:srgbClr val="1E2761"/>
-                </a:solidFill>
-                <a:latin typeface="Aptos Display"/>
-              </a:defRPr>
-            </a:pPr>
-            <a:r>
-              <a:t>Lab connection</a:t>
-            </a:r>
-          </a:p>
-          <a:p>
-            <a:pPr>
-              <a:spcBef>
-                <a:spcPts val="400"/>
-              </a:spcBef>
-              <a:defRPr sz="1050">
-                <a:solidFill>
-                  <a:srgbClr val="242424"/>
-                </a:solidFill>
-                <a:latin typeface="Aptos"/>
-              </a:defRPr>
-            </a:pPr>
-            <a:r>
-              <a:t>Coverage: Partial. Use the lab README to demonstrate or discuss this topic. Review terms: behavior, branching, caveats, connected.</a:t>
+              <a:t>In the lab, you will apply this pattern, validate the expected behavior, and discuss where it fits in a real Power BI solution.</a:t>
             </a:r>
           </a:p>
         </p:txBody>
@@ -6172,42 +6108,6 @@
       </p:sp>
       <p:sp>
         <p:nvSpPr>
-          <p:cNvPr id="4" name="TextBox 3"/>
-          <p:cNvSpPr txBox="1"/>
-          <p:nvPr/>
-        </p:nvSpPr>
-        <p:spPr>
-          <a:xfrm>
-            <a:off x="530352" y="914400"/>
-            <a:ext cx="10515600" cy="320040"/>
-          </a:xfrm>
-          <a:prstGeom prst="rect">
-            <a:avLst/>
-          </a:prstGeom>
-          <a:noFill/>
-        </p:spPr>
-        <p:txBody>
-          <a:bodyPr wrap="none">
-            <a:spAutoFit/>
-          </a:bodyPr>
-          <a:lstStyle/>
-          <a:p>
-            <a:pPr>
-              <a:defRPr sz="1200">
-                <a:solidFill>
-                  <a:srgbClr val="5C5C5C"/>
-                </a:solidFill>
-                <a:latin typeface="Aptos"/>
-              </a:defRPr>
-            </a:pPr>
-            <a:r>
-              <a:t>Talking points, learner value, and lab connection</a:t>
-            </a:r>
-          </a:p>
-        </p:txBody>
-      </p:sp>
-      <p:sp>
-        <p:nvSpPr>
           <p:cNvPr id="5" name="Rounded Rectangle 4"/>
           <p:cNvSpPr/>
           <p:nvPr/>
@@ -6325,7 +6225,143 @@
               </a:defRPr>
             </a:pPr>
             <a:r>
-              <a:t>Talking points</a:t>
+              <a:t>Key ideas</a:t>
+            </a:r>
+            <a:br/>
+            <a:r>
+              <a:t>• Validate</a:t>
+            </a:r>
+            <a:br/>
+            <a:r>
+              <a:t>• Package</a:t>
+            </a:r>
+            <a:br/>
+            <a:r>
+              <a:t>• Deploy</a:t>
+            </a:r>
+          </a:p>
+        </p:txBody>
+      </p:sp>
+      <p:sp>
+        <p:nvSpPr>
+          <p:cNvPr id="8" name="Rounded Rectangle 7"/>
+          <p:cNvSpPr/>
+          <p:nvPr/>
+        </p:nvSpPr>
+        <p:spPr>
+          <a:xfrm>
+            <a:off x="6263640" y="1234440"/>
+            <a:ext cx="5303520" cy="1828800"/>
+          </a:xfrm>
+          <a:prstGeom prst="roundRect">
+            <a:avLst/>
+          </a:prstGeom>
+          <a:solidFill>
+            <a:srgbClr val="FFFFFF"/>
+          </a:solidFill>
+          <a:ln>
+            <a:solidFill>
+              <a:srgbClr val="DCDCDC"/>
+            </a:solidFill>
+          </a:ln>
+        </p:spPr>
+        <p:style>
+          <a:lnRef idx="1">
+            <a:schemeClr val="accent1"/>
+          </a:lnRef>
+          <a:fillRef idx="3">
+            <a:schemeClr val="accent1"/>
+          </a:fillRef>
+          <a:effectRef idx="2">
+            <a:schemeClr val="accent1"/>
+          </a:effectRef>
+          <a:fontRef idx="minor">
+            <a:schemeClr val="lt1"/>
+          </a:fontRef>
+        </p:style>
+        <p:txBody>
+          <a:bodyPr rtlCol="0" anchor="ctr"/>
+          <a:lstStyle/>
+          <a:p>
+            <a:pPr algn="ctr"/>
+          </a:p>
+        </p:txBody>
+      </p:sp>
+      <p:sp>
+        <p:nvSpPr>
+          <p:cNvPr id="9" name="Rectangle 8"/>
+          <p:cNvSpPr/>
+          <p:nvPr/>
+        </p:nvSpPr>
+        <p:spPr>
+          <a:xfrm>
+            <a:off x="6263640" y="1234440"/>
+            <a:ext cx="91440" cy="1828800"/>
+          </a:xfrm>
+          <a:prstGeom prst="rect">
+            <a:avLst/>
+          </a:prstGeom>
+          <a:solidFill>
+            <a:srgbClr val="02C39A"/>
+          </a:solidFill>
+          <a:ln>
+            <a:noFill/>
+          </a:ln>
+        </p:spPr>
+        <p:style>
+          <a:lnRef idx="1">
+            <a:schemeClr val="accent1"/>
+          </a:lnRef>
+          <a:fillRef idx="3">
+            <a:schemeClr val="accent1"/>
+          </a:fillRef>
+          <a:effectRef idx="2">
+            <a:schemeClr val="accent1"/>
+          </a:effectRef>
+          <a:fontRef idx="minor">
+            <a:schemeClr val="lt1"/>
+          </a:fontRef>
+        </p:style>
+        <p:txBody>
+          <a:bodyPr rtlCol="0" anchor="ctr"/>
+          <a:lstStyle/>
+          <a:p>
+            <a:pPr algn="ctr"/>
+          </a:p>
+        </p:txBody>
+      </p:sp>
+      <p:sp>
+        <p:nvSpPr>
+          <p:cNvPr id="10" name="TextBox 9"/>
+          <p:cNvSpPr txBox="1"/>
+          <p:nvPr/>
+        </p:nvSpPr>
+        <p:spPr>
+          <a:xfrm>
+            <a:off x="6446520" y="1344168"/>
+            <a:ext cx="4983480" cy="1664208"/>
+          </a:xfrm>
+          <a:prstGeom prst="rect">
+            <a:avLst/>
+          </a:prstGeom>
+          <a:noFill/>
+        </p:spPr>
+        <p:txBody>
+          <a:bodyPr wrap="square" lIns="0" rIns="0">
+            <a:spAutoFit/>
+          </a:bodyPr>
+          <a:lstStyle/>
+          <a:p>
+            <a:pPr>
+              <a:defRPr b="1" sz="1500">
+                <a:solidFill>
+                  <a:srgbClr val="1E2761"/>
+                </a:solidFill>
+                <a:latin typeface="Aptos Display"/>
+              </a:defRPr>
+            </a:pPr>
+            <a:r>
+              <a:t>Why it helps</a:t>
             </a:r>
           </a:p>
           <a:p>
@@ -6341,29 +6377,25 @@
               </a:defRPr>
             </a:pPr>
             <a:r>
-              <a:t>• Validate</a:t>
+              <a:t>• Configure</a:t>
             </a:r>
             <a:br/>
             <a:r>
-              <a:t>• Package</a:t>
-            </a:r>
-            <a:br/>
-            <a:r>
-              <a:t>• Deploy</a:t>
-            </a:r>
-          </a:p>
-        </p:txBody>
-      </p:sp>
-      <p:sp>
-        <p:nvSpPr>
-          <p:cNvPr id="8" name="Rounded Rectangle 7"/>
+              <a:t>• Smoke test</a:t>
+            </a:r>
+          </a:p>
+        </p:txBody>
+      </p:sp>
+      <p:sp>
+        <p:nvSpPr>
+          <p:cNvPr id="11" name="Rounded Rectangle 10"/>
           <p:cNvSpPr/>
           <p:nvPr/>
         </p:nvSpPr>
         <p:spPr>
           <a:xfrm>
-            <a:off x="6263640" y="1234440"/>
-            <a:ext cx="5303520" cy="1828800"/>
+            <a:off x="822960" y="4160520"/>
+            <a:ext cx="10424160" cy="868680"/>
           </a:xfrm>
           <a:prstGeom prst="roundRect">
             <a:avLst/>
@@ -6401,20 +6433,20 @@
       </p:sp>
       <p:sp>
         <p:nvSpPr>
-          <p:cNvPr id="9" name="Rectangle 8"/>
+          <p:cNvPr id="12" name="Rectangle 11"/>
           <p:cNvSpPr/>
           <p:nvPr/>
         </p:nvSpPr>
         <p:spPr>
           <a:xfrm>
-            <a:off x="6263640" y="1234440"/>
-            <a:ext cx="91440" cy="1828800"/>
+            <a:off x="822960" y="4160520"/>
+            <a:ext cx="91440" cy="868680"/>
           </a:xfrm>
           <a:prstGeom prst="rect">
             <a:avLst/>
           </a:prstGeom>
           <a:solidFill>
-            <a:srgbClr val="02C39A"/>
+            <a:srgbClr val="F9B700"/>
           </a:solidFill>
           <a:ln>
             <a:noFill/>
@@ -6444,14 +6476,14 @@
       </p:sp>
       <p:sp>
         <p:nvSpPr>
-          <p:cNvPr id="10" name="TextBox 9"/>
+          <p:cNvPr id="13" name="TextBox 12"/>
           <p:cNvSpPr txBox="1"/>
           <p:nvPr/>
         </p:nvSpPr>
         <p:spPr>
           <a:xfrm>
-            <a:off x="6446520" y="1344168"/>
-            <a:ext cx="4983480" cy="1664208"/>
+            <a:off x="1005840" y="4270248"/>
+            <a:ext cx="10104120" cy="704088"/>
           </a:xfrm>
           <a:prstGeom prst="rect">
             <a:avLst/>
@@ -6473,167 +6505,7 @@
               </a:defRPr>
             </a:pPr>
             <a:r>
-              <a:t>Why it helps</a:t>
-            </a:r>
-          </a:p>
-          <a:p>
-            <a:pPr>
-              <a:spcBef>
-                <a:spcPts val="400"/>
-              </a:spcBef>
-              <a:defRPr sz="1050">
-                <a:solidFill>
-                  <a:srgbClr val="242424"/>
-                </a:solidFill>
-                <a:latin typeface="Aptos"/>
-              </a:defRPr>
-            </a:pPr>
-            <a:r>
-              <a:t>• Configure</a:t>
-            </a:r>
-            <a:br/>
-            <a:r>
-              <a:t>• Smoke test</a:t>
-            </a:r>
-          </a:p>
-        </p:txBody>
-      </p:sp>
-      <p:sp>
-        <p:nvSpPr>
-          <p:cNvPr id="11" name="Rounded Rectangle 10"/>
-          <p:cNvSpPr/>
-          <p:nvPr/>
-        </p:nvSpPr>
-        <p:spPr>
-          <a:xfrm>
-            <a:off x="822960" y="4160520"/>
-            <a:ext cx="10424160" cy="868680"/>
-          </a:xfrm>
-          <a:prstGeom prst="roundRect">
-            <a:avLst/>
-          </a:prstGeom>
-          <a:solidFill>
-            <a:srgbClr val="FFFFFF"/>
-          </a:solidFill>
-          <a:ln>
-            <a:solidFill>
-              <a:srgbClr val="DCDCDC"/>
-            </a:solidFill>
-          </a:ln>
-        </p:spPr>
-        <p:style>
-          <a:lnRef idx="1">
-            <a:schemeClr val="accent1"/>
-          </a:lnRef>
-          <a:fillRef idx="3">
-            <a:schemeClr val="accent1"/>
-          </a:fillRef>
-          <a:effectRef idx="2">
-            <a:schemeClr val="accent1"/>
-          </a:effectRef>
-          <a:fontRef idx="minor">
-            <a:schemeClr val="lt1"/>
-          </a:fontRef>
-        </p:style>
-        <p:txBody>
-          <a:bodyPr rtlCol="0" anchor="ctr"/>
-          <a:lstStyle/>
-          <a:p>
-            <a:pPr algn="ctr"/>
-          </a:p>
-        </p:txBody>
-      </p:sp>
-      <p:sp>
-        <p:nvSpPr>
-          <p:cNvPr id="12" name="Rectangle 11"/>
-          <p:cNvSpPr/>
-          <p:nvPr/>
-        </p:nvSpPr>
-        <p:spPr>
-          <a:xfrm>
-            <a:off x="822960" y="4160520"/>
-            <a:ext cx="91440" cy="868680"/>
-          </a:xfrm>
-          <a:prstGeom prst="rect">
-            <a:avLst/>
-          </a:prstGeom>
-          <a:solidFill>
-            <a:srgbClr val="F9B700"/>
-          </a:solidFill>
-          <a:ln>
-            <a:noFill/>
-          </a:ln>
-        </p:spPr>
-        <p:style>
-          <a:lnRef idx="1">
-            <a:schemeClr val="accent1"/>
-          </a:lnRef>
-          <a:fillRef idx="3">
-            <a:schemeClr val="accent1"/>
-          </a:fillRef>
-          <a:effectRef idx="2">
-            <a:schemeClr val="accent1"/>
-          </a:effectRef>
-          <a:fontRef idx="minor">
-            <a:schemeClr val="lt1"/>
-          </a:fontRef>
-        </p:style>
-        <p:txBody>
-          <a:bodyPr rtlCol="0" anchor="ctr"/>
-          <a:lstStyle/>
-          <a:p>
-            <a:pPr algn="ctr"/>
-          </a:p>
-        </p:txBody>
-      </p:sp>
-      <p:sp>
-        <p:nvSpPr>
-          <p:cNvPr id="13" name="TextBox 12"/>
-          <p:cNvSpPr txBox="1"/>
-          <p:nvPr/>
-        </p:nvSpPr>
-        <p:spPr>
-          <a:xfrm>
-            <a:off x="1005840" y="4270248"/>
-            <a:ext cx="10104120" cy="704088"/>
-          </a:xfrm>
-          <a:prstGeom prst="rect">
-            <a:avLst/>
-          </a:prstGeom>
-          <a:noFill/>
-        </p:spPr>
-        <p:txBody>
-          <a:bodyPr wrap="square" lIns="0" rIns="0">
-            <a:spAutoFit/>
-          </a:bodyPr>
-          <a:lstStyle/>
-          <a:p>
-            <a:pPr>
-              <a:defRPr b="1" sz="1500">
-                <a:solidFill>
-                  <a:srgbClr val="1E2761"/>
-                </a:solidFill>
-                <a:latin typeface="Aptos Display"/>
-              </a:defRPr>
-            </a:pPr>
-            <a:r>
-              <a:t>Lab connection</a:t>
-            </a:r>
-          </a:p>
-          <a:p>
-            <a:pPr>
-              <a:spcBef>
-                <a:spcPts val="400"/>
-              </a:spcBef>
-              <a:defRPr sz="1050">
-                <a:solidFill>
-                  <a:srgbClr val="242424"/>
-                </a:solidFill>
-                <a:latin typeface="Aptos"/>
-              </a:defRPr>
-            </a:pPr>
-            <a:r>
-              <a:t>Coverage: Covered. Use the lab README to demonstrate or discuss this topic. Review terms: configure, package, smoke.</a:t>
+              <a:t>In the lab, you will apply this pattern, validate the expected behavior, and discuss where it fits in a real Power BI solution.</a:t>
             </a:r>
           </a:p>
         </p:txBody>
@@ -6772,42 +6644,6 @@
       </p:sp>
       <p:sp>
         <p:nvSpPr>
-          <p:cNvPr id="4" name="TextBox 3"/>
-          <p:cNvSpPr txBox="1"/>
-          <p:nvPr/>
-        </p:nvSpPr>
-        <p:spPr>
-          <a:xfrm>
-            <a:off x="530352" y="914400"/>
-            <a:ext cx="10515600" cy="320040"/>
-          </a:xfrm>
-          <a:prstGeom prst="rect">
-            <a:avLst/>
-          </a:prstGeom>
-          <a:noFill/>
-        </p:spPr>
-        <p:txBody>
-          <a:bodyPr wrap="none">
-            <a:spAutoFit/>
-          </a:bodyPr>
-          <a:lstStyle/>
-          <a:p>
-            <a:pPr>
-              <a:defRPr sz="1200">
-                <a:solidFill>
-                  <a:srgbClr val="5C5C5C"/>
-                </a:solidFill>
-                <a:latin typeface="Aptos"/>
-              </a:defRPr>
-            </a:pPr>
-            <a:r>
-              <a:t>Talking points, learner value, and lab connection</a:t>
-            </a:r>
-          </a:p>
-        </p:txBody>
-      </p:sp>
-      <p:sp>
-        <p:nvSpPr>
           <p:cNvPr id="5" name="Rounded Rectangle 4"/>
           <p:cNvSpPr/>
           <p:nvPr/>
@@ -6925,7 +6761,143 @@
               </a:defRPr>
             </a:pPr>
             <a:r>
-              <a:t>Talking points</a:t>
+              <a:t>Key ideas</a:t>
+            </a:r>
+            <a:br/>
+            <a:r>
+              <a:t>• Trigger</a:t>
+            </a:r>
+            <a:br/>
+            <a:r>
+              <a:t>• Validate</a:t>
+            </a:r>
+            <a:br/>
+            <a:r>
+              <a:t>• Authenticate</a:t>
+            </a:r>
+          </a:p>
+        </p:txBody>
+      </p:sp>
+      <p:sp>
+        <p:nvSpPr>
+          <p:cNvPr id="8" name="Rounded Rectangle 7"/>
+          <p:cNvSpPr/>
+          <p:nvPr/>
+        </p:nvSpPr>
+        <p:spPr>
+          <a:xfrm>
+            <a:off x="6263640" y="1234440"/>
+            <a:ext cx="5303520" cy="1828800"/>
+          </a:xfrm>
+          <a:prstGeom prst="roundRect">
+            <a:avLst/>
+          </a:prstGeom>
+          <a:solidFill>
+            <a:srgbClr val="FFFFFF"/>
+          </a:solidFill>
+          <a:ln>
+            <a:solidFill>
+              <a:srgbClr val="DCDCDC"/>
+            </a:solidFill>
+          </a:ln>
+        </p:spPr>
+        <p:style>
+          <a:lnRef idx="1">
+            <a:schemeClr val="accent1"/>
+          </a:lnRef>
+          <a:fillRef idx="3">
+            <a:schemeClr val="accent1"/>
+          </a:fillRef>
+          <a:effectRef idx="2">
+            <a:schemeClr val="accent1"/>
+          </a:effectRef>
+          <a:fontRef idx="minor">
+            <a:schemeClr val="lt1"/>
+          </a:fontRef>
+        </p:style>
+        <p:txBody>
+          <a:bodyPr rtlCol="0" anchor="ctr"/>
+          <a:lstStyle/>
+          <a:p>
+            <a:pPr algn="ctr"/>
+          </a:p>
+        </p:txBody>
+      </p:sp>
+      <p:sp>
+        <p:nvSpPr>
+          <p:cNvPr id="9" name="Rectangle 8"/>
+          <p:cNvSpPr/>
+          <p:nvPr/>
+        </p:nvSpPr>
+        <p:spPr>
+          <a:xfrm>
+            <a:off x="6263640" y="1234440"/>
+            <a:ext cx="91440" cy="1828800"/>
+          </a:xfrm>
+          <a:prstGeom prst="rect">
+            <a:avLst/>
+          </a:prstGeom>
+          <a:solidFill>
+            <a:srgbClr val="02C39A"/>
+          </a:solidFill>
+          <a:ln>
+            <a:noFill/>
+          </a:ln>
+        </p:spPr>
+        <p:style>
+          <a:lnRef idx="1">
+            <a:schemeClr val="accent1"/>
+          </a:lnRef>
+          <a:fillRef idx="3">
+            <a:schemeClr val="accent1"/>
+          </a:fillRef>
+          <a:effectRef idx="2">
+            <a:schemeClr val="accent1"/>
+          </a:effectRef>
+          <a:fontRef idx="minor">
+            <a:schemeClr val="lt1"/>
+          </a:fontRef>
+        </p:style>
+        <p:txBody>
+          <a:bodyPr rtlCol="0" anchor="ctr"/>
+          <a:lstStyle/>
+          <a:p>
+            <a:pPr algn="ctr"/>
+          </a:p>
+        </p:txBody>
+      </p:sp>
+      <p:sp>
+        <p:nvSpPr>
+          <p:cNvPr id="10" name="TextBox 9"/>
+          <p:cNvSpPr txBox="1"/>
+          <p:nvPr/>
+        </p:nvSpPr>
+        <p:spPr>
+          <a:xfrm>
+            <a:off x="6446520" y="1344168"/>
+            <a:ext cx="4983480" cy="1664208"/>
+          </a:xfrm>
+          <a:prstGeom prst="rect">
+            <a:avLst/>
+          </a:prstGeom>
+          <a:noFill/>
+        </p:spPr>
+        <p:txBody>
+          <a:bodyPr wrap="square" lIns="0" rIns="0">
+            <a:spAutoFit/>
+          </a:bodyPr>
+          <a:lstStyle/>
+          <a:p>
+            <a:pPr>
+              <a:defRPr b="1" sz="1500">
+                <a:solidFill>
+                  <a:srgbClr val="1E2761"/>
+                </a:solidFill>
+                <a:latin typeface="Aptos Display"/>
+              </a:defRPr>
+            </a:pPr>
+            <a:r>
+              <a:t>Why it helps</a:t>
             </a:r>
           </a:p>
           <a:p>
@@ -6941,29 +6913,25 @@
               </a:defRPr>
             </a:pPr>
             <a:r>
-              <a:t>• Trigger</a:t>
+              <a:t>• Deploy</a:t>
             </a:r>
             <a:br/>
             <a:r>
-              <a:t>• Validate</a:t>
-            </a:r>
-            <a:br/>
-            <a:r>
-              <a:t>• Authenticate</a:t>
-            </a:r>
-          </a:p>
-        </p:txBody>
-      </p:sp>
-      <p:sp>
-        <p:nvSpPr>
-          <p:cNvPr id="8" name="Rounded Rectangle 7"/>
+              <a:t>• Record evidence</a:t>
+            </a:r>
+          </a:p>
+        </p:txBody>
+      </p:sp>
+      <p:sp>
+        <p:nvSpPr>
+          <p:cNvPr id="11" name="Rounded Rectangle 10"/>
           <p:cNvSpPr/>
           <p:nvPr/>
         </p:nvSpPr>
         <p:spPr>
           <a:xfrm>
-            <a:off x="6263640" y="1234440"/>
-            <a:ext cx="5303520" cy="1828800"/>
+            <a:off x="822960" y="4160520"/>
+            <a:ext cx="10424160" cy="868680"/>
           </a:xfrm>
           <a:prstGeom prst="roundRect">
             <a:avLst/>
@@ -7001,20 +6969,20 @@
       </p:sp>
       <p:sp>
         <p:nvSpPr>
-          <p:cNvPr id="9" name="Rectangle 8"/>
+          <p:cNvPr id="12" name="Rectangle 11"/>
           <p:cNvSpPr/>
           <p:nvPr/>
         </p:nvSpPr>
         <p:spPr>
           <a:xfrm>
-            <a:off x="6263640" y="1234440"/>
-            <a:ext cx="91440" cy="1828800"/>
+            <a:off x="822960" y="4160520"/>
+            <a:ext cx="91440" cy="868680"/>
           </a:xfrm>
           <a:prstGeom prst="rect">
             <a:avLst/>
           </a:prstGeom>
           <a:solidFill>
-            <a:srgbClr val="02C39A"/>
+            <a:srgbClr val="F9B700"/>
           </a:solidFill>
           <a:ln>
             <a:noFill/>
@@ -7044,14 +7012,14 @@
       </p:sp>
       <p:sp>
         <p:nvSpPr>
-          <p:cNvPr id="10" name="TextBox 9"/>
+          <p:cNvPr id="13" name="TextBox 12"/>
           <p:cNvSpPr txBox="1"/>
           <p:nvPr/>
         </p:nvSpPr>
         <p:spPr>
           <a:xfrm>
-            <a:off x="6446520" y="1344168"/>
-            <a:ext cx="4983480" cy="1664208"/>
+            <a:off x="1005840" y="4270248"/>
+            <a:ext cx="10104120" cy="704088"/>
           </a:xfrm>
           <a:prstGeom prst="rect">
             <a:avLst/>
@@ -7073,167 +7041,7 @@
               </a:defRPr>
             </a:pPr>
             <a:r>
-              <a:t>Why it helps</a:t>
-            </a:r>
-          </a:p>
-          <a:p>
-            <a:pPr>
-              <a:spcBef>
-                <a:spcPts val="400"/>
-              </a:spcBef>
-              <a:defRPr sz="1050">
-                <a:solidFill>
-                  <a:srgbClr val="242424"/>
-                </a:solidFill>
-                <a:latin typeface="Aptos"/>
-              </a:defRPr>
-            </a:pPr>
-            <a:r>
-              <a:t>• Deploy</a:t>
-            </a:r>
-            <a:br/>
-            <a:r>
-              <a:t>• Record evidence</a:t>
-            </a:r>
-          </a:p>
-        </p:txBody>
-      </p:sp>
-      <p:sp>
-        <p:nvSpPr>
-          <p:cNvPr id="11" name="Rounded Rectangle 10"/>
-          <p:cNvSpPr/>
-          <p:nvPr/>
-        </p:nvSpPr>
-        <p:spPr>
-          <a:xfrm>
-            <a:off x="822960" y="4160520"/>
-            <a:ext cx="10424160" cy="868680"/>
-          </a:xfrm>
-          <a:prstGeom prst="roundRect">
-            <a:avLst/>
-          </a:prstGeom>
-          <a:solidFill>
-            <a:srgbClr val="FFFFFF"/>
-          </a:solidFill>
-          <a:ln>
-            <a:solidFill>
-              <a:srgbClr val="DCDCDC"/>
-            </a:solidFill>
-          </a:ln>
-        </p:spPr>
-        <p:style>
-          <a:lnRef idx="1">
-            <a:schemeClr val="accent1"/>
-          </a:lnRef>
-          <a:fillRef idx="3">
-            <a:schemeClr val="accent1"/>
-          </a:fillRef>
-          <a:effectRef idx="2">
-            <a:schemeClr val="accent1"/>
-          </a:effectRef>
-          <a:fontRef idx="minor">
-            <a:schemeClr val="lt1"/>
-          </a:fontRef>
-        </p:style>
-        <p:txBody>
-          <a:bodyPr rtlCol="0" anchor="ctr"/>
-          <a:lstStyle/>
-          <a:p>
-            <a:pPr algn="ctr"/>
-          </a:p>
-        </p:txBody>
-      </p:sp>
-      <p:sp>
-        <p:nvSpPr>
-          <p:cNvPr id="12" name="Rectangle 11"/>
-          <p:cNvSpPr/>
-          <p:nvPr/>
-        </p:nvSpPr>
-        <p:spPr>
-          <a:xfrm>
-            <a:off x="822960" y="4160520"/>
-            <a:ext cx="91440" cy="868680"/>
-          </a:xfrm>
-          <a:prstGeom prst="rect">
-            <a:avLst/>
-          </a:prstGeom>
-          <a:solidFill>
-            <a:srgbClr val="F9B700"/>
-          </a:solidFill>
-          <a:ln>
-            <a:noFill/>
-          </a:ln>
-        </p:spPr>
-        <p:style>
-          <a:lnRef idx="1">
-            <a:schemeClr val="accent1"/>
-          </a:lnRef>
-          <a:fillRef idx="3">
-            <a:schemeClr val="accent1"/>
-          </a:fillRef>
-          <a:effectRef idx="2">
-            <a:schemeClr val="accent1"/>
-          </a:effectRef>
-          <a:fontRef idx="minor">
-            <a:schemeClr val="lt1"/>
-          </a:fontRef>
-        </p:style>
-        <p:txBody>
-          <a:bodyPr rtlCol="0" anchor="ctr"/>
-          <a:lstStyle/>
-          <a:p>
-            <a:pPr algn="ctr"/>
-          </a:p>
-        </p:txBody>
-      </p:sp>
-      <p:sp>
-        <p:nvSpPr>
-          <p:cNvPr id="13" name="TextBox 12"/>
-          <p:cNvSpPr txBox="1"/>
-          <p:nvPr/>
-        </p:nvSpPr>
-        <p:spPr>
-          <a:xfrm>
-            <a:off x="1005840" y="4270248"/>
-            <a:ext cx="10104120" cy="704088"/>
-          </a:xfrm>
-          <a:prstGeom prst="rect">
-            <a:avLst/>
-          </a:prstGeom>
-          <a:noFill/>
-        </p:spPr>
-        <p:txBody>
-          <a:bodyPr wrap="square" lIns="0" rIns="0">
-            <a:spAutoFit/>
-          </a:bodyPr>
-          <a:lstStyle/>
-          <a:p>
-            <a:pPr>
-              <a:defRPr b="1" sz="1500">
-                <a:solidFill>
-                  <a:srgbClr val="1E2761"/>
-                </a:solidFill>
-                <a:latin typeface="Aptos Display"/>
-              </a:defRPr>
-            </a:pPr>
-            <a:r>
-              <a:t>Lab connection</a:t>
-            </a:r>
-          </a:p>
-          <a:p>
-            <a:pPr>
-              <a:spcBef>
-                <a:spcPts val="400"/>
-              </a:spcBef>
-              <a:defRPr sz="1050">
-                <a:solidFill>
-                  <a:srgbClr val="242424"/>
-                </a:solidFill>
-                <a:latin typeface="Aptos"/>
-              </a:defRPr>
-            </a:pPr>
-            <a:r>
-              <a:t>Coverage: Covered. Use the lab README to demonstrate or discuss this topic. Review terms: authenticate.</a:t>
+              <a:t>In the lab, you will apply this pattern, validate the expected behavior, and discuss where it fits in a real Power BI solution.</a:t>
             </a:r>
           </a:p>
         </p:txBody>
@@ -7372,42 +7180,6 @@
       </p:sp>
       <p:sp>
         <p:nvSpPr>
-          <p:cNvPr id="4" name="TextBox 3"/>
-          <p:cNvSpPr txBox="1"/>
-          <p:nvPr/>
-        </p:nvSpPr>
-        <p:spPr>
-          <a:xfrm>
-            <a:off x="530352" y="914400"/>
-            <a:ext cx="10515600" cy="320040"/>
-          </a:xfrm>
-          <a:prstGeom prst="rect">
-            <a:avLst/>
-          </a:prstGeom>
-          <a:noFill/>
-        </p:spPr>
-        <p:txBody>
-          <a:bodyPr wrap="none">
-            <a:spAutoFit/>
-          </a:bodyPr>
-          <a:lstStyle/>
-          <a:p>
-            <a:pPr>
-              <a:defRPr sz="1200">
-                <a:solidFill>
-                  <a:srgbClr val="5C5C5C"/>
-                </a:solidFill>
-                <a:latin typeface="Aptos"/>
-              </a:defRPr>
-            </a:pPr>
-            <a:r>
-              <a:t>Talking points, learner value, and lab connection</a:t>
-            </a:r>
-          </a:p>
-        </p:txBody>
-      </p:sp>
-      <p:sp>
-        <p:nvSpPr>
           <p:cNvPr id="5" name="Rounded Rectangle 4"/>
           <p:cNvSpPr/>
           <p:nvPr/>
@@ -7525,7 +7297,143 @@
               </a:defRPr>
             </a:pPr>
             <a:r>
-              <a:t>Talking points</a:t>
+              <a:t>Key ideas</a:t>
+            </a:r>
+            <a:br/>
+            <a:r>
+              <a:t>• Endpoints</a:t>
+            </a:r>
+            <a:br/>
+            <a:r>
+              <a:t>• Identity</a:t>
+            </a:r>
+            <a:br/>
+            <a:r>
+              <a:t>• Network</a:t>
+            </a:r>
+          </a:p>
+        </p:txBody>
+      </p:sp>
+      <p:sp>
+        <p:nvSpPr>
+          <p:cNvPr id="8" name="Rounded Rectangle 7"/>
+          <p:cNvSpPr/>
+          <p:nvPr/>
+        </p:nvSpPr>
+        <p:spPr>
+          <a:xfrm>
+            <a:off x="6263640" y="1234440"/>
+            <a:ext cx="5303520" cy="1828800"/>
+          </a:xfrm>
+          <a:prstGeom prst="roundRect">
+            <a:avLst/>
+          </a:prstGeom>
+          <a:solidFill>
+            <a:srgbClr val="FFFFFF"/>
+          </a:solidFill>
+          <a:ln>
+            <a:solidFill>
+              <a:srgbClr val="DCDCDC"/>
+            </a:solidFill>
+          </a:ln>
+        </p:spPr>
+        <p:style>
+          <a:lnRef idx="1">
+            <a:schemeClr val="accent1"/>
+          </a:lnRef>
+          <a:fillRef idx="3">
+            <a:schemeClr val="accent1"/>
+          </a:fillRef>
+          <a:effectRef idx="2">
+            <a:schemeClr val="accent1"/>
+          </a:effectRef>
+          <a:fontRef idx="minor">
+            <a:schemeClr val="lt1"/>
+          </a:fontRef>
+        </p:style>
+        <p:txBody>
+          <a:bodyPr rtlCol="0" anchor="ctr"/>
+          <a:lstStyle/>
+          <a:p>
+            <a:pPr algn="ctr"/>
+          </a:p>
+        </p:txBody>
+      </p:sp>
+      <p:sp>
+        <p:nvSpPr>
+          <p:cNvPr id="9" name="Rectangle 8"/>
+          <p:cNvSpPr/>
+          <p:nvPr/>
+        </p:nvSpPr>
+        <p:spPr>
+          <a:xfrm>
+            <a:off x="6263640" y="1234440"/>
+            <a:ext cx="91440" cy="1828800"/>
+          </a:xfrm>
+          <a:prstGeom prst="rect">
+            <a:avLst/>
+          </a:prstGeom>
+          <a:solidFill>
+            <a:srgbClr val="02C39A"/>
+          </a:solidFill>
+          <a:ln>
+            <a:noFill/>
+          </a:ln>
+        </p:spPr>
+        <p:style>
+          <a:lnRef idx="1">
+            <a:schemeClr val="accent1"/>
+          </a:lnRef>
+          <a:fillRef idx="3">
+            <a:schemeClr val="accent1"/>
+          </a:fillRef>
+          <a:effectRef idx="2">
+            <a:schemeClr val="accent1"/>
+          </a:effectRef>
+          <a:fontRef idx="minor">
+            <a:schemeClr val="lt1"/>
+          </a:fontRef>
+        </p:style>
+        <p:txBody>
+          <a:bodyPr rtlCol="0" anchor="ctr"/>
+          <a:lstStyle/>
+          <a:p>
+            <a:pPr algn="ctr"/>
+          </a:p>
+        </p:txBody>
+      </p:sp>
+      <p:sp>
+        <p:nvSpPr>
+          <p:cNvPr id="10" name="TextBox 9"/>
+          <p:cNvSpPr txBox="1"/>
+          <p:nvPr/>
+        </p:nvSpPr>
+        <p:spPr>
+          <a:xfrm>
+            <a:off x="6446520" y="1344168"/>
+            <a:ext cx="4983480" cy="1664208"/>
+          </a:xfrm>
+          <a:prstGeom prst="rect">
+            <a:avLst/>
+          </a:prstGeom>
+          <a:noFill/>
+        </p:spPr>
+        <p:txBody>
+          <a:bodyPr wrap="square" lIns="0" rIns="0">
+            <a:spAutoFit/>
+          </a:bodyPr>
+          <a:lstStyle/>
+          <a:p>
+            <a:pPr>
+              <a:defRPr b="1" sz="1500">
+                <a:solidFill>
+                  <a:srgbClr val="1E2761"/>
+                </a:solidFill>
+                <a:latin typeface="Aptos Display"/>
+              </a:defRPr>
+            </a:pPr>
+            <a:r>
+              <a:t>Why it helps</a:t>
             </a:r>
           </a:p>
           <a:p>
@@ -7541,29 +7449,25 @@
               </a:defRPr>
             </a:pPr>
             <a:r>
-              <a:t>• Endpoints</a:t>
+              <a:t>• Customer policy</a:t>
             </a:r>
             <a:br/>
             <a:r>
-              <a:t>• Identity</a:t>
-            </a:r>
-            <a:br/>
-            <a:r>
-              <a:t>• Network</a:t>
-            </a:r>
-          </a:p>
-        </p:txBody>
-      </p:sp>
-      <p:sp>
-        <p:nvSpPr>
-          <p:cNvPr id="8" name="Rounded Rectangle 7"/>
+              <a:t>• Feature availability</a:t>
+            </a:r>
+          </a:p>
+        </p:txBody>
+      </p:sp>
+      <p:sp>
+        <p:nvSpPr>
+          <p:cNvPr id="11" name="Rounded Rectangle 10"/>
           <p:cNvSpPr/>
           <p:nvPr/>
         </p:nvSpPr>
         <p:spPr>
           <a:xfrm>
-            <a:off x="6263640" y="1234440"/>
-            <a:ext cx="5303520" cy="1828800"/>
+            <a:off x="822960" y="4160520"/>
+            <a:ext cx="10424160" cy="868680"/>
           </a:xfrm>
           <a:prstGeom prst="roundRect">
             <a:avLst/>
@@ -7601,20 +7505,20 @@
       </p:sp>
       <p:sp>
         <p:nvSpPr>
-          <p:cNvPr id="9" name="Rectangle 8"/>
+          <p:cNvPr id="12" name="Rectangle 11"/>
           <p:cNvSpPr/>
           <p:nvPr/>
         </p:nvSpPr>
         <p:spPr>
           <a:xfrm>
-            <a:off x="6263640" y="1234440"/>
-            <a:ext cx="91440" cy="1828800"/>
+            <a:off x="822960" y="4160520"/>
+            <a:ext cx="91440" cy="868680"/>
           </a:xfrm>
           <a:prstGeom prst="rect">
             <a:avLst/>
           </a:prstGeom>
           <a:solidFill>
-            <a:srgbClr val="02C39A"/>
+            <a:srgbClr val="F9B700"/>
           </a:solidFill>
           <a:ln>
             <a:noFill/>
@@ -7644,14 +7548,14 @@
       </p:sp>
       <p:sp>
         <p:nvSpPr>
-          <p:cNvPr id="10" name="TextBox 9"/>
+          <p:cNvPr id="13" name="TextBox 12"/>
           <p:cNvSpPr txBox="1"/>
           <p:nvPr/>
         </p:nvSpPr>
         <p:spPr>
           <a:xfrm>
-            <a:off x="6446520" y="1344168"/>
-            <a:ext cx="4983480" cy="1664208"/>
+            <a:off x="1005840" y="4270248"/>
+            <a:ext cx="10104120" cy="704088"/>
           </a:xfrm>
           <a:prstGeom prst="rect">
             <a:avLst/>
@@ -7673,167 +7577,7 @@
               </a:defRPr>
             </a:pPr>
             <a:r>
-              <a:t>Why it helps</a:t>
-            </a:r>
-          </a:p>
-          <a:p>
-            <a:pPr>
-              <a:spcBef>
-                <a:spcPts val="400"/>
-              </a:spcBef>
-              <a:defRPr sz="1050">
-                <a:solidFill>
-                  <a:srgbClr val="242424"/>
-                </a:solidFill>
-                <a:latin typeface="Aptos"/>
-              </a:defRPr>
-            </a:pPr>
-            <a:r>
-              <a:t>• Customer policy</a:t>
-            </a:r>
-            <a:br/>
-            <a:r>
-              <a:t>• Feature availability</a:t>
-            </a:r>
-          </a:p>
-        </p:txBody>
-      </p:sp>
-      <p:sp>
-        <p:nvSpPr>
-          <p:cNvPr id="11" name="Rounded Rectangle 10"/>
-          <p:cNvSpPr/>
-          <p:nvPr/>
-        </p:nvSpPr>
-        <p:spPr>
-          <a:xfrm>
-            <a:off x="822960" y="4160520"/>
-            <a:ext cx="10424160" cy="868680"/>
-          </a:xfrm>
-          <a:prstGeom prst="roundRect">
-            <a:avLst/>
-          </a:prstGeom>
-          <a:solidFill>
-            <a:srgbClr val="FFFFFF"/>
-          </a:solidFill>
-          <a:ln>
-            <a:solidFill>
-              <a:srgbClr val="DCDCDC"/>
-            </a:solidFill>
-          </a:ln>
-        </p:spPr>
-        <p:style>
-          <a:lnRef idx="1">
-            <a:schemeClr val="accent1"/>
-          </a:lnRef>
-          <a:fillRef idx="3">
-            <a:schemeClr val="accent1"/>
-          </a:fillRef>
-          <a:effectRef idx="2">
-            <a:schemeClr val="accent1"/>
-          </a:effectRef>
-          <a:fontRef idx="minor">
-            <a:schemeClr val="lt1"/>
-          </a:fontRef>
-        </p:style>
-        <p:txBody>
-          <a:bodyPr rtlCol="0" anchor="ctr"/>
-          <a:lstStyle/>
-          <a:p>
-            <a:pPr algn="ctr"/>
-          </a:p>
-        </p:txBody>
-      </p:sp>
-      <p:sp>
-        <p:nvSpPr>
-          <p:cNvPr id="12" name="Rectangle 11"/>
-          <p:cNvSpPr/>
-          <p:nvPr/>
-        </p:nvSpPr>
-        <p:spPr>
-          <a:xfrm>
-            <a:off x="822960" y="4160520"/>
-            <a:ext cx="91440" cy="868680"/>
-          </a:xfrm>
-          <a:prstGeom prst="rect">
-            <a:avLst/>
-          </a:prstGeom>
-          <a:solidFill>
-            <a:srgbClr val="F9B700"/>
-          </a:solidFill>
-          <a:ln>
-            <a:noFill/>
-          </a:ln>
-        </p:spPr>
-        <p:style>
-          <a:lnRef idx="1">
-            <a:schemeClr val="accent1"/>
-          </a:lnRef>
-          <a:fillRef idx="3">
-            <a:schemeClr val="accent1"/>
-          </a:fillRef>
-          <a:effectRef idx="2">
-            <a:schemeClr val="accent1"/>
-          </a:effectRef>
-          <a:fontRef idx="minor">
-            <a:schemeClr val="lt1"/>
-          </a:fontRef>
-        </p:style>
-        <p:txBody>
-          <a:bodyPr rtlCol="0" anchor="ctr"/>
-          <a:lstStyle/>
-          <a:p>
-            <a:pPr algn="ctr"/>
-          </a:p>
-        </p:txBody>
-      </p:sp>
-      <p:sp>
-        <p:nvSpPr>
-          <p:cNvPr id="13" name="TextBox 12"/>
-          <p:cNvSpPr txBox="1"/>
-          <p:nvPr/>
-        </p:nvSpPr>
-        <p:spPr>
-          <a:xfrm>
-            <a:off x="1005840" y="4270248"/>
-            <a:ext cx="10104120" cy="704088"/>
-          </a:xfrm>
-          <a:prstGeom prst="rect">
-            <a:avLst/>
-          </a:prstGeom>
-          <a:noFill/>
-        </p:spPr>
-        <p:txBody>
-          <a:bodyPr wrap="square" lIns="0" rIns="0">
-            <a:spAutoFit/>
-          </a:bodyPr>
-          <a:lstStyle/>
-          <a:p>
-            <a:pPr>
-              <a:defRPr b="1" sz="1500">
-                <a:solidFill>
-                  <a:srgbClr val="1E2761"/>
-                </a:solidFill>
-                <a:latin typeface="Aptos Display"/>
-              </a:defRPr>
-            </a:pPr>
-            <a:r>
-              <a:t>Lab connection</a:t>
-            </a:r>
-          </a:p>
-          <a:p>
-            <a:pPr>
-              <a:spcBef>
-                <a:spcPts val="400"/>
-              </a:spcBef>
-              <a:defRPr sz="1050">
-                <a:solidFill>
-                  <a:srgbClr val="242424"/>
-                </a:solidFill>
-                <a:latin typeface="Aptos"/>
-              </a:defRPr>
-            </a:pPr>
-            <a:r>
-              <a:t>Coverage: Partial. Use the lab README to demonstrate or discuss this topic. Review terms: availability, considerations, endpoints, identity, network.</a:t>
+              <a:t>In the lab, you will apply this pattern, validate the expected behavior, and discuss where it fits in a real Power BI solution.</a:t>
             </a:r>
           </a:p>
         </p:txBody>
@@ -7972,42 +7716,6 @@
       </p:sp>
       <p:sp>
         <p:nvSpPr>
-          <p:cNvPr id="4" name="TextBox 3"/>
-          <p:cNvSpPr txBox="1"/>
-          <p:nvPr/>
-        </p:nvSpPr>
-        <p:spPr>
-          <a:xfrm>
-            <a:off x="530352" y="914400"/>
-            <a:ext cx="10515600" cy="320040"/>
-          </a:xfrm>
-          <a:prstGeom prst="rect">
-            <a:avLst/>
-          </a:prstGeom>
-          <a:noFill/>
-        </p:spPr>
-        <p:txBody>
-          <a:bodyPr wrap="none">
-            <a:spAutoFit/>
-          </a:bodyPr>
-          <a:lstStyle/>
-          <a:p>
-            <a:pPr>
-              <a:defRPr sz="1200">
-                <a:solidFill>
-                  <a:srgbClr val="5C5C5C"/>
-                </a:solidFill>
-                <a:latin typeface="Aptos"/>
-              </a:defRPr>
-            </a:pPr>
-            <a:r>
-              <a:t>Talking points, learner value, and lab connection</a:t>
-            </a:r>
-          </a:p>
-        </p:txBody>
-      </p:sp>
-      <p:sp>
-        <p:nvSpPr>
           <p:cNvPr id="5" name="Rounded Rectangle 4"/>
           <p:cNvSpPr/>
           <p:nvPr/>
@@ -8125,7 +7833,143 @@
               </a:defRPr>
             </a:pPr>
             <a:r>
-              <a:t>Talking points</a:t>
+              <a:t>Key ideas</a:t>
+            </a:r>
+            <a:br/>
+            <a:r>
+              <a:t>• Source</a:t>
+            </a:r>
+            <a:br/>
+            <a:r>
+              <a:t>• Security</a:t>
+            </a:r>
+            <a:br/>
+            <a:r>
+              <a:t>• Refresh</a:t>
+            </a:r>
+          </a:p>
+        </p:txBody>
+      </p:sp>
+      <p:sp>
+        <p:nvSpPr>
+          <p:cNvPr id="8" name="Rounded Rectangle 7"/>
+          <p:cNvSpPr/>
+          <p:nvPr/>
+        </p:nvSpPr>
+        <p:spPr>
+          <a:xfrm>
+            <a:off x="6263640" y="1234440"/>
+            <a:ext cx="5303520" cy="1828800"/>
+          </a:xfrm>
+          <a:prstGeom prst="roundRect">
+            <a:avLst/>
+          </a:prstGeom>
+          <a:solidFill>
+            <a:srgbClr val="FFFFFF"/>
+          </a:solidFill>
+          <a:ln>
+            <a:solidFill>
+              <a:srgbClr val="DCDCDC"/>
+            </a:solidFill>
+          </a:ln>
+        </p:spPr>
+        <p:style>
+          <a:lnRef idx="1">
+            <a:schemeClr val="accent1"/>
+          </a:lnRef>
+          <a:fillRef idx="3">
+            <a:schemeClr val="accent1"/>
+          </a:fillRef>
+          <a:effectRef idx="2">
+            <a:schemeClr val="accent1"/>
+          </a:effectRef>
+          <a:fontRef idx="minor">
+            <a:schemeClr val="lt1"/>
+          </a:fontRef>
+        </p:style>
+        <p:txBody>
+          <a:bodyPr rtlCol="0" anchor="ctr"/>
+          <a:lstStyle/>
+          <a:p>
+            <a:pPr algn="ctr"/>
+          </a:p>
+        </p:txBody>
+      </p:sp>
+      <p:sp>
+        <p:nvSpPr>
+          <p:cNvPr id="9" name="Rectangle 8"/>
+          <p:cNvSpPr/>
+          <p:nvPr/>
+        </p:nvSpPr>
+        <p:spPr>
+          <a:xfrm>
+            <a:off x="6263640" y="1234440"/>
+            <a:ext cx="91440" cy="1828800"/>
+          </a:xfrm>
+          <a:prstGeom prst="rect">
+            <a:avLst/>
+          </a:prstGeom>
+          <a:solidFill>
+            <a:srgbClr val="02C39A"/>
+          </a:solidFill>
+          <a:ln>
+            <a:noFill/>
+          </a:ln>
+        </p:spPr>
+        <p:style>
+          <a:lnRef idx="1">
+            <a:schemeClr val="accent1"/>
+          </a:lnRef>
+          <a:fillRef idx="3">
+            <a:schemeClr val="accent1"/>
+          </a:fillRef>
+          <a:effectRef idx="2">
+            <a:schemeClr val="accent1"/>
+          </a:effectRef>
+          <a:fontRef idx="minor">
+            <a:schemeClr val="lt1"/>
+          </a:fontRef>
+        </p:style>
+        <p:txBody>
+          <a:bodyPr rtlCol="0" anchor="ctr"/>
+          <a:lstStyle/>
+          <a:p>
+            <a:pPr algn="ctr"/>
+          </a:p>
+        </p:txBody>
+      </p:sp>
+      <p:sp>
+        <p:nvSpPr>
+          <p:cNvPr id="10" name="TextBox 9"/>
+          <p:cNvSpPr txBox="1"/>
+          <p:nvPr/>
+        </p:nvSpPr>
+        <p:spPr>
+          <a:xfrm>
+            <a:off x="6446520" y="1344168"/>
+            <a:ext cx="4983480" cy="1664208"/>
+          </a:xfrm>
+          <a:prstGeom prst="rect">
+            <a:avLst/>
+          </a:prstGeom>
+          <a:noFill/>
+        </p:spPr>
+        <p:txBody>
+          <a:bodyPr wrap="square" lIns="0" rIns="0">
+            <a:spAutoFit/>
+          </a:bodyPr>
+          <a:lstStyle/>
+          <a:p>
+            <a:pPr>
+              <a:defRPr b="1" sz="1500">
+                <a:solidFill>
+                  <a:srgbClr val="1E2761"/>
+                </a:solidFill>
+                <a:latin typeface="Aptos Display"/>
+              </a:defRPr>
+            </a:pPr>
+            <a:r>
+              <a:t>Why it helps</a:t>
             </a:r>
           </a:p>
           <a:p>
@@ -8141,29 +7985,25 @@
               </a:defRPr>
             </a:pPr>
             <a:r>
-              <a:t>• Source</a:t>
+              <a:t>• Validation</a:t>
             </a:r>
             <a:br/>
             <a:r>
-              <a:t>• Security</a:t>
-            </a:r>
-            <a:br/>
-            <a:r>
-              <a:t>• Refresh</a:t>
-            </a:r>
-          </a:p>
-        </p:txBody>
-      </p:sp>
-      <p:sp>
-        <p:nvSpPr>
-          <p:cNvPr id="8" name="Rounded Rectangle 7"/>
+              <a:t>• Rollback</a:t>
+            </a:r>
+          </a:p>
+        </p:txBody>
+      </p:sp>
+      <p:sp>
+        <p:nvSpPr>
+          <p:cNvPr id="11" name="Rounded Rectangle 10"/>
           <p:cNvSpPr/>
           <p:nvPr/>
         </p:nvSpPr>
         <p:spPr>
           <a:xfrm>
-            <a:off x="6263640" y="1234440"/>
-            <a:ext cx="5303520" cy="1828800"/>
+            <a:off x="822960" y="4160520"/>
+            <a:ext cx="10424160" cy="868680"/>
           </a:xfrm>
           <a:prstGeom prst="roundRect">
             <a:avLst/>
@@ -8201,20 +8041,20 @@
       </p:sp>
       <p:sp>
         <p:nvSpPr>
-          <p:cNvPr id="9" name="Rectangle 8"/>
+          <p:cNvPr id="12" name="Rectangle 11"/>
           <p:cNvSpPr/>
           <p:nvPr/>
         </p:nvSpPr>
         <p:spPr>
           <a:xfrm>
-            <a:off x="6263640" y="1234440"/>
-            <a:ext cx="91440" cy="1828800"/>
+            <a:off x="822960" y="4160520"/>
+            <a:ext cx="91440" cy="868680"/>
           </a:xfrm>
           <a:prstGeom prst="rect">
             <a:avLst/>
           </a:prstGeom>
           <a:solidFill>
-            <a:srgbClr val="02C39A"/>
+            <a:srgbClr val="F9B700"/>
           </a:solidFill>
           <a:ln>
             <a:noFill/>
@@ -8244,14 +8084,14 @@
       </p:sp>
       <p:sp>
         <p:nvSpPr>
-          <p:cNvPr id="10" name="TextBox 9"/>
+          <p:cNvPr id="13" name="TextBox 12"/>
           <p:cNvSpPr txBox="1"/>
           <p:nvPr/>
         </p:nvSpPr>
         <p:spPr>
           <a:xfrm>
-            <a:off x="6446520" y="1344168"/>
-            <a:ext cx="4983480" cy="1664208"/>
+            <a:off x="1005840" y="4270248"/>
+            <a:ext cx="10104120" cy="704088"/>
           </a:xfrm>
           <a:prstGeom prst="rect">
             <a:avLst/>
@@ -8273,167 +8113,7 @@
               </a:defRPr>
             </a:pPr>
             <a:r>
-              <a:t>Why it helps</a:t>
-            </a:r>
-          </a:p>
-          <a:p>
-            <a:pPr>
-              <a:spcBef>
-                <a:spcPts val="400"/>
-              </a:spcBef>
-              <a:defRPr sz="1050">
-                <a:solidFill>
-                  <a:srgbClr val="242424"/>
-                </a:solidFill>
-                <a:latin typeface="Aptos"/>
-              </a:defRPr>
-            </a:pPr>
-            <a:r>
-              <a:t>• Validation</a:t>
-            </a:r>
-            <a:br/>
-            <a:r>
-              <a:t>• Rollback</a:t>
-            </a:r>
-          </a:p>
-        </p:txBody>
-      </p:sp>
-      <p:sp>
-        <p:nvSpPr>
-          <p:cNvPr id="11" name="Rounded Rectangle 10"/>
-          <p:cNvSpPr/>
-          <p:nvPr/>
-        </p:nvSpPr>
-        <p:spPr>
-          <a:xfrm>
-            <a:off x="822960" y="4160520"/>
-            <a:ext cx="10424160" cy="868680"/>
-          </a:xfrm>
-          <a:prstGeom prst="roundRect">
-            <a:avLst/>
-          </a:prstGeom>
-          <a:solidFill>
-            <a:srgbClr val="FFFFFF"/>
-          </a:solidFill>
-          <a:ln>
-            <a:solidFill>
-              <a:srgbClr val="DCDCDC"/>
-            </a:solidFill>
-          </a:ln>
-        </p:spPr>
-        <p:style>
-          <a:lnRef idx="1">
-            <a:schemeClr val="accent1"/>
-          </a:lnRef>
-          <a:fillRef idx="3">
-            <a:schemeClr val="accent1"/>
-          </a:fillRef>
-          <a:effectRef idx="2">
-            <a:schemeClr val="accent1"/>
-          </a:effectRef>
-          <a:fontRef idx="minor">
-            <a:schemeClr val="lt1"/>
-          </a:fontRef>
-        </p:style>
-        <p:txBody>
-          <a:bodyPr rtlCol="0" anchor="ctr"/>
-          <a:lstStyle/>
-          <a:p>
-            <a:pPr algn="ctr"/>
-          </a:p>
-        </p:txBody>
-      </p:sp>
-      <p:sp>
-        <p:nvSpPr>
-          <p:cNvPr id="12" name="Rectangle 11"/>
-          <p:cNvSpPr/>
-          <p:nvPr/>
-        </p:nvSpPr>
-        <p:spPr>
-          <a:xfrm>
-            <a:off x="822960" y="4160520"/>
-            <a:ext cx="91440" cy="868680"/>
-          </a:xfrm>
-          <a:prstGeom prst="rect">
-            <a:avLst/>
-          </a:prstGeom>
-          <a:solidFill>
-            <a:srgbClr val="F9B700"/>
-          </a:solidFill>
-          <a:ln>
-            <a:noFill/>
-          </a:ln>
-        </p:spPr>
-        <p:style>
-          <a:lnRef idx="1">
-            <a:schemeClr val="accent1"/>
-          </a:lnRef>
-          <a:fillRef idx="3">
-            <a:schemeClr val="accent1"/>
-          </a:fillRef>
-          <a:effectRef idx="2">
-            <a:schemeClr val="accent1"/>
-          </a:effectRef>
-          <a:fontRef idx="minor">
-            <a:schemeClr val="lt1"/>
-          </a:fontRef>
-        </p:style>
-        <p:txBody>
-          <a:bodyPr rtlCol="0" anchor="ctr"/>
-          <a:lstStyle/>
-          <a:p>
-            <a:pPr algn="ctr"/>
-          </a:p>
-        </p:txBody>
-      </p:sp>
-      <p:sp>
-        <p:nvSpPr>
-          <p:cNvPr id="13" name="TextBox 12"/>
-          <p:cNvSpPr txBox="1"/>
-          <p:nvPr/>
-        </p:nvSpPr>
-        <p:spPr>
-          <a:xfrm>
-            <a:off x="1005840" y="4270248"/>
-            <a:ext cx="10104120" cy="704088"/>
-          </a:xfrm>
-          <a:prstGeom prst="rect">
-            <a:avLst/>
-          </a:prstGeom>
-          <a:noFill/>
-        </p:spPr>
-        <p:txBody>
-          <a:bodyPr wrap="square" lIns="0" rIns="0">
-            <a:spAutoFit/>
-          </a:bodyPr>
-          <a:lstStyle/>
-          <a:p>
-            <a:pPr>
-              <a:defRPr b="1" sz="1500">
-                <a:solidFill>
-                  <a:srgbClr val="1E2761"/>
-                </a:solidFill>
-                <a:latin typeface="Aptos Display"/>
-              </a:defRPr>
-            </a:pPr>
-            <a:r>
-              <a:t>Lab connection</a:t>
-            </a:r>
-          </a:p>
-          <a:p>
-            <a:pPr>
-              <a:spcBef>
-                <a:spcPts val="400"/>
-              </a:spcBef>
-              <a:defRPr sz="1050">
-                <a:solidFill>
-                  <a:srgbClr val="242424"/>
-                </a:solidFill>
-                <a:latin typeface="Aptos"/>
-              </a:defRPr>
-            </a:pPr>
-            <a:r>
-              <a:t>Coverage: Covered. Use the lab README to demonstrate or discuss this topic. Review terms: refresh, rollback.</a:t>
+              <a:t>In the lab, you will apply this pattern, validate the expected behavior, and discuss where it fits in a real Power BI solution.</a:t>
             </a:r>
           </a:p>
         </p:txBody>
@@ -9440,42 +9120,6 @@
       </p:sp>
       <p:sp>
         <p:nvSpPr>
-          <p:cNvPr id="4" name="TextBox 3"/>
-          <p:cNvSpPr txBox="1"/>
-          <p:nvPr/>
-        </p:nvSpPr>
-        <p:spPr>
-          <a:xfrm>
-            <a:off x="530352" y="914400"/>
-            <a:ext cx="10515600" cy="320040"/>
-          </a:xfrm>
-          <a:prstGeom prst="rect">
-            <a:avLst/>
-          </a:prstGeom>
-          <a:noFill/>
-        </p:spPr>
-        <p:txBody>
-          <a:bodyPr wrap="none">
-            <a:spAutoFit/>
-          </a:bodyPr>
-          <a:lstStyle/>
-          <a:p>
-            <a:pPr>
-              <a:defRPr sz="1200">
-                <a:solidFill>
-                  <a:srgbClr val="5C5C5C"/>
-                </a:solidFill>
-                <a:latin typeface="Aptos"/>
-              </a:defRPr>
-            </a:pPr>
-            <a:r>
-              <a:t>Use this to introduce the section before hands-on labs.</a:t>
-            </a:r>
-          </a:p>
-        </p:txBody>
-      </p:sp>
-      <p:sp>
-        <p:nvSpPr>
           <p:cNvPr id="5" name="Rounded Rectangle 4"/>
           <p:cNvSpPr/>
           <p:nvPr/>
@@ -10728,42 +10372,6 @@
       </p:sp>
       <p:sp>
         <p:nvSpPr>
-          <p:cNvPr id="4" name="TextBox 3"/>
-          <p:cNvSpPr txBox="1"/>
-          <p:nvPr/>
-        </p:nvSpPr>
-        <p:spPr>
-          <a:xfrm>
-            <a:off x="530352" y="914400"/>
-            <a:ext cx="10515600" cy="320040"/>
-          </a:xfrm>
-          <a:prstGeom prst="rect">
-            <a:avLst/>
-          </a:prstGeom>
-          <a:noFill/>
-        </p:spPr>
-        <p:txBody>
-          <a:bodyPr wrap="none">
-            <a:spAutoFit/>
-          </a:bodyPr>
-          <a:lstStyle/>
-          <a:p>
-            <a:pPr>
-              <a:defRPr sz="1200">
-                <a:solidFill>
-                  <a:srgbClr val="5C5C5C"/>
-                </a:solidFill>
-                <a:latin typeface="Aptos"/>
-              </a:defRPr>
-            </a:pPr>
-            <a:r>
-              <a:t>Talking points, learner value, and lab connection</a:t>
-            </a:r>
-          </a:p>
-        </p:txBody>
-      </p:sp>
-      <p:sp>
-        <p:nvSpPr>
           <p:cNvPr id="5" name="Rounded Rectangle 4"/>
           <p:cNvSpPr/>
           <p:nvPr/>
@@ -10881,7 +10489,143 @@
               </a:defRPr>
             </a:pPr>
             <a:r>
-              <a:t>Talking points</a:t>
+              <a:t>Key ideas</a:t>
+            </a:r>
+            <a:br/>
+            <a:r>
+              <a:t>• Repeatability</a:t>
+            </a:r>
+            <a:br/>
+            <a:r>
+              <a:t>• Reviewability</a:t>
+            </a:r>
+            <a:br/>
+            <a:r>
+              <a:t>• Environment promotion</a:t>
+            </a:r>
+          </a:p>
+        </p:txBody>
+      </p:sp>
+      <p:sp>
+        <p:nvSpPr>
+          <p:cNvPr id="8" name="Rounded Rectangle 7"/>
+          <p:cNvSpPr/>
+          <p:nvPr/>
+        </p:nvSpPr>
+        <p:spPr>
+          <a:xfrm>
+            <a:off x="6263640" y="1234440"/>
+            <a:ext cx="5303520" cy="1828800"/>
+          </a:xfrm>
+          <a:prstGeom prst="roundRect">
+            <a:avLst/>
+          </a:prstGeom>
+          <a:solidFill>
+            <a:srgbClr val="FFFFFF"/>
+          </a:solidFill>
+          <a:ln>
+            <a:solidFill>
+              <a:srgbClr val="DCDCDC"/>
+            </a:solidFill>
+          </a:ln>
+        </p:spPr>
+        <p:style>
+          <a:lnRef idx="1">
+            <a:schemeClr val="accent1"/>
+          </a:lnRef>
+          <a:fillRef idx="3">
+            <a:schemeClr val="accent1"/>
+          </a:fillRef>
+          <a:effectRef idx="2">
+            <a:schemeClr val="accent1"/>
+          </a:effectRef>
+          <a:fontRef idx="minor">
+            <a:schemeClr val="lt1"/>
+          </a:fontRef>
+        </p:style>
+        <p:txBody>
+          <a:bodyPr rtlCol="0" anchor="ctr"/>
+          <a:lstStyle/>
+          <a:p>
+            <a:pPr algn="ctr"/>
+          </a:p>
+        </p:txBody>
+      </p:sp>
+      <p:sp>
+        <p:nvSpPr>
+          <p:cNvPr id="9" name="Rectangle 8"/>
+          <p:cNvSpPr/>
+          <p:nvPr/>
+        </p:nvSpPr>
+        <p:spPr>
+          <a:xfrm>
+            <a:off x="6263640" y="1234440"/>
+            <a:ext cx="91440" cy="1828800"/>
+          </a:xfrm>
+          <a:prstGeom prst="rect">
+            <a:avLst/>
+          </a:prstGeom>
+          <a:solidFill>
+            <a:srgbClr val="02C39A"/>
+          </a:solidFill>
+          <a:ln>
+            <a:noFill/>
+          </a:ln>
+        </p:spPr>
+        <p:style>
+          <a:lnRef idx="1">
+            <a:schemeClr val="accent1"/>
+          </a:lnRef>
+          <a:fillRef idx="3">
+            <a:schemeClr val="accent1"/>
+          </a:fillRef>
+          <a:effectRef idx="2">
+            <a:schemeClr val="accent1"/>
+          </a:effectRef>
+          <a:fontRef idx="minor">
+            <a:schemeClr val="lt1"/>
+          </a:fontRef>
+        </p:style>
+        <p:txBody>
+          <a:bodyPr rtlCol="0" anchor="ctr"/>
+          <a:lstStyle/>
+          <a:p>
+            <a:pPr algn="ctr"/>
+          </a:p>
+        </p:txBody>
+      </p:sp>
+      <p:sp>
+        <p:nvSpPr>
+          <p:cNvPr id="10" name="TextBox 9"/>
+          <p:cNvSpPr txBox="1"/>
+          <p:nvPr/>
+        </p:nvSpPr>
+        <p:spPr>
+          <a:xfrm>
+            <a:off x="6446520" y="1344168"/>
+            <a:ext cx="4983480" cy="1664208"/>
+          </a:xfrm>
+          <a:prstGeom prst="rect">
+            <a:avLst/>
+          </a:prstGeom>
+          <a:noFill/>
+        </p:spPr>
+        <p:txBody>
+          <a:bodyPr wrap="square" lIns="0" rIns="0">
+            <a:spAutoFit/>
+          </a:bodyPr>
+          <a:lstStyle/>
+          <a:p>
+            <a:pPr>
+              <a:defRPr b="1" sz="1500">
+                <a:solidFill>
+                  <a:srgbClr val="1E2761"/>
+                </a:solidFill>
+                <a:latin typeface="Aptos Display"/>
+              </a:defRPr>
+            </a:pPr>
+            <a:r>
+              <a:t>Why it helps</a:t>
             </a:r>
           </a:p>
           <a:p>
@@ -10897,29 +10641,25 @@
               </a:defRPr>
             </a:pPr>
             <a:r>
-              <a:t>• Repeatability</a:t>
+              <a:t>• Governance</a:t>
             </a:r>
             <a:br/>
             <a:r>
-              <a:t>• Reviewability</a:t>
-            </a:r>
-            <a:br/>
-            <a:r>
-              <a:t>• Environment promotion</a:t>
-            </a:r>
-          </a:p>
-        </p:txBody>
-      </p:sp>
-      <p:sp>
-        <p:nvSpPr>
-          <p:cNvPr id="8" name="Rounded Rectangle 7"/>
+              <a:t>• Rollback</a:t>
+            </a:r>
+          </a:p>
+        </p:txBody>
+      </p:sp>
+      <p:sp>
+        <p:nvSpPr>
+          <p:cNvPr id="11" name="Rounded Rectangle 10"/>
           <p:cNvSpPr/>
           <p:nvPr/>
         </p:nvSpPr>
         <p:spPr>
           <a:xfrm>
-            <a:off x="6263640" y="1234440"/>
-            <a:ext cx="5303520" cy="1828800"/>
+            <a:off x="822960" y="4160520"/>
+            <a:ext cx="10424160" cy="868680"/>
           </a:xfrm>
           <a:prstGeom prst="roundRect">
             <a:avLst/>
@@ -10957,20 +10697,20 @@
       </p:sp>
       <p:sp>
         <p:nvSpPr>
-          <p:cNvPr id="9" name="Rectangle 8"/>
+          <p:cNvPr id="12" name="Rectangle 11"/>
           <p:cNvSpPr/>
           <p:nvPr/>
         </p:nvSpPr>
         <p:spPr>
           <a:xfrm>
-            <a:off x="6263640" y="1234440"/>
-            <a:ext cx="91440" cy="1828800"/>
+            <a:off x="822960" y="4160520"/>
+            <a:ext cx="91440" cy="868680"/>
           </a:xfrm>
           <a:prstGeom prst="rect">
             <a:avLst/>
           </a:prstGeom>
           <a:solidFill>
-            <a:srgbClr val="02C39A"/>
+            <a:srgbClr val="F9B700"/>
           </a:solidFill>
           <a:ln>
             <a:noFill/>
@@ -11000,14 +10740,14 @@
       </p:sp>
       <p:sp>
         <p:nvSpPr>
-          <p:cNvPr id="10" name="TextBox 9"/>
+          <p:cNvPr id="13" name="TextBox 12"/>
           <p:cNvSpPr txBox="1"/>
           <p:nvPr/>
         </p:nvSpPr>
         <p:spPr>
           <a:xfrm>
-            <a:off x="6446520" y="1344168"/>
-            <a:ext cx="4983480" cy="1664208"/>
+            <a:off x="1005840" y="4270248"/>
+            <a:ext cx="10104120" cy="704088"/>
           </a:xfrm>
           <a:prstGeom prst="rect">
             <a:avLst/>
@@ -11029,167 +10769,7 @@
               </a:defRPr>
             </a:pPr>
             <a:r>
-              <a:t>Why it helps</a:t>
-            </a:r>
-          </a:p>
-          <a:p>
-            <a:pPr>
-              <a:spcBef>
-                <a:spcPts val="400"/>
-              </a:spcBef>
-              <a:defRPr sz="1050">
-                <a:solidFill>
-                  <a:srgbClr val="242424"/>
-                </a:solidFill>
-                <a:latin typeface="Aptos"/>
-              </a:defRPr>
-            </a:pPr>
-            <a:r>
-              <a:t>• Governance</a:t>
-            </a:r>
-            <a:br/>
-            <a:r>
-              <a:t>• Rollback</a:t>
-            </a:r>
-          </a:p>
-        </p:txBody>
-      </p:sp>
-      <p:sp>
-        <p:nvSpPr>
-          <p:cNvPr id="11" name="Rounded Rectangle 10"/>
-          <p:cNvSpPr/>
-          <p:nvPr/>
-        </p:nvSpPr>
-        <p:spPr>
-          <a:xfrm>
-            <a:off x="822960" y="4160520"/>
-            <a:ext cx="10424160" cy="868680"/>
-          </a:xfrm>
-          <a:prstGeom prst="roundRect">
-            <a:avLst/>
-          </a:prstGeom>
-          <a:solidFill>
-            <a:srgbClr val="FFFFFF"/>
-          </a:solidFill>
-          <a:ln>
-            <a:solidFill>
-              <a:srgbClr val="DCDCDC"/>
-            </a:solidFill>
-          </a:ln>
-        </p:spPr>
-        <p:style>
-          <a:lnRef idx="1">
-            <a:schemeClr val="accent1"/>
-          </a:lnRef>
-          <a:fillRef idx="3">
-            <a:schemeClr val="accent1"/>
-          </a:fillRef>
-          <a:effectRef idx="2">
-            <a:schemeClr val="accent1"/>
-          </a:effectRef>
-          <a:fontRef idx="minor">
-            <a:schemeClr val="lt1"/>
-          </a:fontRef>
-        </p:style>
-        <p:txBody>
-          <a:bodyPr rtlCol="0" anchor="ctr"/>
-          <a:lstStyle/>
-          <a:p>
-            <a:pPr algn="ctr"/>
-          </a:p>
-        </p:txBody>
-      </p:sp>
-      <p:sp>
-        <p:nvSpPr>
-          <p:cNvPr id="12" name="Rectangle 11"/>
-          <p:cNvSpPr/>
-          <p:nvPr/>
-        </p:nvSpPr>
-        <p:spPr>
-          <a:xfrm>
-            <a:off x="822960" y="4160520"/>
-            <a:ext cx="91440" cy="868680"/>
-          </a:xfrm>
-          <a:prstGeom prst="rect">
-            <a:avLst/>
-          </a:prstGeom>
-          <a:solidFill>
-            <a:srgbClr val="F9B700"/>
-          </a:solidFill>
-          <a:ln>
-            <a:noFill/>
-          </a:ln>
-        </p:spPr>
-        <p:style>
-          <a:lnRef idx="1">
-            <a:schemeClr val="accent1"/>
-          </a:lnRef>
-          <a:fillRef idx="3">
-            <a:schemeClr val="accent1"/>
-          </a:fillRef>
-          <a:effectRef idx="2">
-            <a:schemeClr val="accent1"/>
-          </a:effectRef>
-          <a:fontRef idx="minor">
-            <a:schemeClr val="lt1"/>
-          </a:fontRef>
-        </p:style>
-        <p:txBody>
-          <a:bodyPr rtlCol="0" anchor="ctr"/>
-          <a:lstStyle/>
-          <a:p>
-            <a:pPr algn="ctr"/>
-          </a:p>
-        </p:txBody>
-      </p:sp>
-      <p:sp>
-        <p:nvSpPr>
-          <p:cNvPr id="13" name="TextBox 12"/>
-          <p:cNvSpPr txBox="1"/>
-          <p:nvPr/>
-        </p:nvSpPr>
-        <p:spPr>
-          <a:xfrm>
-            <a:off x="1005840" y="4270248"/>
-            <a:ext cx="10104120" cy="704088"/>
-          </a:xfrm>
-          <a:prstGeom prst="rect">
-            <a:avLst/>
-          </a:prstGeom>
-          <a:noFill/>
-        </p:spPr>
-        <p:txBody>
-          <a:bodyPr wrap="square" lIns="0" rIns="0">
-            <a:spAutoFit/>
-          </a:bodyPr>
-          <a:lstStyle/>
-          <a:p>
-            <a:pPr>
-              <a:defRPr b="1" sz="1500">
-                <a:solidFill>
-                  <a:srgbClr val="1E2761"/>
-                </a:solidFill>
-                <a:latin typeface="Aptos Display"/>
-              </a:defRPr>
-            </a:pPr>
-            <a:r>
-              <a:t>Lab connection</a:t>
-            </a:r>
-          </a:p>
-          <a:p>
-            <a:pPr>
-              <a:spcBef>
-                <a:spcPts val="400"/>
-              </a:spcBef>
-              <a:defRPr sz="1050">
-                <a:solidFill>
-                  <a:srgbClr val="242424"/>
-                </a:solidFill>
-                <a:latin typeface="Aptos"/>
-              </a:defRPr>
-            </a:pPr>
-            <a:r>
-              <a:t>Coverage: Partial. Use the lab README to demonstrate or discuss this topic. Review terms: goals, governance, promotion, repeatability, reviewability.</a:t>
+              <a:t>In the lab, you will apply this pattern, validate the expected behavior, and discuss where it fits in a real Power BI solution.</a:t>
             </a:r>
           </a:p>
         </p:txBody>
@@ -11328,42 +10908,6 @@
       </p:sp>
       <p:sp>
         <p:nvSpPr>
-          <p:cNvPr id="4" name="TextBox 3"/>
-          <p:cNvSpPr txBox="1"/>
-          <p:nvPr/>
-        </p:nvSpPr>
-        <p:spPr>
-          <a:xfrm>
-            <a:off x="530352" y="914400"/>
-            <a:ext cx="10515600" cy="320040"/>
-          </a:xfrm>
-          <a:prstGeom prst="rect">
-            <a:avLst/>
-          </a:prstGeom>
-          <a:noFill/>
-        </p:spPr>
-        <p:txBody>
-          <a:bodyPr wrap="none">
-            <a:spAutoFit/>
-          </a:bodyPr>
-          <a:lstStyle/>
-          <a:p>
-            <a:pPr>
-              <a:defRPr sz="1200">
-                <a:solidFill>
-                  <a:srgbClr val="5C5C5C"/>
-                </a:solidFill>
-                <a:latin typeface="Aptos"/>
-              </a:defRPr>
-            </a:pPr>
-            <a:r>
-              <a:t>Talking points, learner value, and lab connection</a:t>
-            </a:r>
-          </a:p>
-        </p:txBody>
-      </p:sp>
-      <p:sp>
-        <p:nvSpPr>
           <p:cNvPr id="5" name="Rounded Rectangle 4"/>
           <p:cNvSpPr/>
           <p:nvPr/>
@@ -11481,7 +11025,139 @@
               </a:defRPr>
             </a:pPr>
             <a:r>
-              <a:t>Talking points</a:t>
+              <a:t>Key ideas</a:t>
+            </a:r>
+            <a:br/>
+            <a:r>
+              <a:t>• Report source files</a:t>
+            </a:r>
+            <a:br/>
+            <a:r>
+              <a:t>• Semantic model source files</a:t>
+            </a:r>
+          </a:p>
+        </p:txBody>
+      </p:sp>
+      <p:sp>
+        <p:nvSpPr>
+          <p:cNvPr id="8" name="Rounded Rectangle 7"/>
+          <p:cNvSpPr/>
+          <p:nvPr/>
+        </p:nvSpPr>
+        <p:spPr>
+          <a:xfrm>
+            <a:off x="6263640" y="1234440"/>
+            <a:ext cx="5303520" cy="1828800"/>
+          </a:xfrm>
+          <a:prstGeom prst="roundRect">
+            <a:avLst/>
+          </a:prstGeom>
+          <a:solidFill>
+            <a:srgbClr val="FFFFFF"/>
+          </a:solidFill>
+          <a:ln>
+            <a:solidFill>
+              <a:srgbClr val="DCDCDC"/>
+            </a:solidFill>
+          </a:ln>
+        </p:spPr>
+        <p:style>
+          <a:lnRef idx="1">
+            <a:schemeClr val="accent1"/>
+          </a:lnRef>
+          <a:fillRef idx="3">
+            <a:schemeClr val="accent1"/>
+          </a:fillRef>
+          <a:effectRef idx="2">
+            <a:schemeClr val="accent1"/>
+          </a:effectRef>
+          <a:fontRef idx="minor">
+            <a:schemeClr val="lt1"/>
+          </a:fontRef>
+        </p:style>
+        <p:txBody>
+          <a:bodyPr rtlCol="0" anchor="ctr"/>
+          <a:lstStyle/>
+          <a:p>
+            <a:pPr algn="ctr"/>
+          </a:p>
+        </p:txBody>
+      </p:sp>
+      <p:sp>
+        <p:nvSpPr>
+          <p:cNvPr id="9" name="Rectangle 8"/>
+          <p:cNvSpPr/>
+          <p:nvPr/>
+        </p:nvSpPr>
+        <p:spPr>
+          <a:xfrm>
+            <a:off x="6263640" y="1234440"/>
+            <a:ext cx="91440" cy="1828800"/>
+          </a:xfrm>
+          <a:prstGeom prst="rect">
+            <a:avLst/>
+          </a:prstGeom>
+          <a:solidFill>
+            <a:srgbClr val="02C39A"/>
+          </a:solidFill>
+          <a:ln>
+            <a:noFill/>
+          </a:ln>
+        </p:spPr>
+        <p:style>
+          <a:lnRef idx="1">
+            <a:schemeClr val="accent1"/>
+          </a:lnRef>
+          <a:fillRef idx="3">
+            <a:schemeClr val="accent1"/>
+          </a:fillRef>
+          <a:effectRef idx="2">
+            <a:schemeClr val="accent1"/>
+          </a:effectRef>
+          <a:fontRef idx="minor">
+            <a:schemeClr val="lt1"/>
+          </a:fontRef>
+        </p:style>
+        <p:txBody>
+          <a:bodyPr rtlCol="0" anchor="ctr"/>
+          <a:lstStyle/>
+          <a:p>
+            <a:pPr algn="ctr"/>
+          </a:p>
+        </p:txBody>
+      </p:sp>
+      <p:sp>
+        <p:nvSpPr>
+          <p:cNvPr id="10" name="TextBox 9"/>
+          <p:cNvSpPr txBox="1"/>
+          <p:nvPr/>
+        </p:nvSpPr>
+        <p:spPr>
+          <a:xfrm>
+            <a:off x="6446520" y="1344168"/>
+            <a:ext cx="4983480" cy="1664208"/>
+          </a:xfrm>
+          <a:prstGeom prst="rect">
+            <a:avLst/>
+          </a:prstGeom>
+          <a:noFill/>
+        </p:spPr>
+        <p:txBody>
+          <a:bodyPr wrap="square" lIns="0" rIns="0">
+            <a:spAutoFit/>
+          </a:bodyPr>
+          <a:lstStyle/>
+          <a:p>
+            <a:pPr>
+              <a:defRPr b="1" sz="1500">
+                <a:solidFill>
+                  <a:srgbClr val="1E2761"/>
+                </a:solidFill>
+                <a:latin typeface="Aptos Display"/>
+              </a:defRPr>
+            </a:pPr>
+            <a:r>
+              <a:t>Why it helps</a:t>
             </a:r>
           </a:p>
           <a:p>
@@ -11497,25 +11173,25 @@
               </a:defRPr>
             </a:pPr>
             <a:r>
-              <a:t>• Report source files</a:t>
+              <a:t>• Git-friendly review</a:t>
             </a:r>
             <a:br/>
             <a:r>
-              <a:t>• Semantic model source files</a:t>
-            </a:r>
-          </a:p>
-        </p:txBody>
-      </p:sp>
-      <p:sp>
-        <p:nvSpPr>
-          <p:cNvPr id="8" name="Rounded Rectangle 7"/>
+              <a:t>• PBIX as generated output</a:t>
+            </a:r>
+          </a:p>
+        </p:txBody>
+      </p:sp>
+      <p:sp>
+        <p:nvSpPr>
+          <p:cNvPr id="11" name="Rounded Rectangle 10"/>
           <p:cNvSpPr/>
           <p:nvPr/>
         </p:nvSpPr>
         <p:spPr>
           <a:xfrm>
-            <a:off x="6263640" y="1234440"/>
-            <a:ext cx="5303520" cy="1828800"/>
+            <a:off x="822960" y="4160520"/>
+            <a:ext cx="10424160" cy="868680"/>
           </a:xfrm>
           <a:prstGeom prst="roundRect">
             <a:avLst/>
@@ -11553,20 +11229,20 @@
       </p:sp>
       <p:sp>
         <p:nvSpPr>
-          <p:cNvPr id="9" name="Rectangle 8"/>
+          <p:cNvPr id="12" name="Rectangle 11"/>
           <p:cNvSpPr/>
           <p:nvPr/>
         </p:nvSpPr>
         <p:spPr>
           <a:xfrm>
-            <a:off x="6263640" y="1234440"/>
-            <a:ext cx="91440" cy="1828800"/>
+            <a:off x="822960" y="4160520"/>
+            <a:ext cx="91440" cy="868680"/>
           </a:xfrm>
           <a:prstGeom prst="rect">
             <a:avLst/>
           </a:prstGeom>
           <a:solidFill>
-            <a:srgbClr val="02C39A"/>
+            <a:srgbClr val="F9B700"/>
           </a:solidFill>
           <a:ln>
             <a:noFill/>
@@ -11596,14 +11272,14 @@
       </p:sp>
       <p:sp>
         <p:nvSpPr>
-          <p:cNvPr id="10" name="TextBox 9"/>
+          <p:cNvPr id="13" name="TextBox 12"/>
           <p:cNvSpPr txBox="1"/>
           <p:nvPr/>
         </p:nvSpPr>
         <p:spPr>
           <a:xfrm>
-            <a:off x="6446520" y="1344168"/>
-            <a:ext cx="4983480" cy="1664208"/>
+            <a:off x="1005840" y="4270248"/>
+            <a:ext cx="10104120" cy="704088"/>
           </a:xfrm>
           <a:prstGeom prst="rect">
             <a:avLst/>
@@ -11625,167 +11301,7 @@
               </a:defRPr>
             </a:pPr>
             <a:r>
-              <a:t>Why it helps</a:t>
-            </a:r>
-          </a:p>
-          <a:p>
-            <a:pPr>
-              <a:spcBef>
-                <a:spcPts val="400"/>
-              </a:spcBef>
-              <a:defRPr sz="1050">
-                <a:solidFill>
-                  <a:srgbClr val="242424"/>
-                </a:solidFill>
-                <a:latin typeface="Aptos"/>
-              </a:defRPr>
-            </a:pPr>
-            <a:r>
-              <a:t>• Git-friendly review</a:t>
-            </a:r>
-            <a:br/>
-            <a:r>
-              <a:t>• PBIX as generated output</a:t>
-            </a:r>
-          </a:p>
-        </p:txBody>
-      </p:sp>
-      <p:sp>
-        <p:nvSpPr>
-          <p:cNvPr id="11" name="Rounded Rectangle 10"/>
-          <p:cNvSpPr/>
-          <p:nvPr/>
-        </p:nvSpPr>
-        <p:spPr>
-          <a:xfrm>
-            <a:off x="822960" y="4160520"/>
-            <a:ext cx="10424160" cy="868680"/>
-          </a:xfrm>
-          <a:prstGeom prst="roundRect">
-            <a:avLst/>
-          </a:prstGeom>
-          <a:solidFill>
-            <a:srgbClr val="FFFFFF"/>
-          </a:solidFill>
-          <a:ln>
-            <a:solidFill>
-              <a:srgbClr val="DCDCDC"/>
-            </a:solidFill>
-          </a:ln>
-        </p:spPr>
-        <p:style>
-          <a:lnRef idx="1">
-            <a:schemeClr val="accent1"/>
-          </a:lnRef>
-          <a:fillRef idx="3">
-            <a:schemeClr val="accent1"/>
-          </a:fillRef>
-          <a:effectRef idx="2">
-            <a:schemeClr val="accent1"/>
-          </a:effectRef>
-          <a:fontRef idx="minor">
-            <a:schemeClr val="lt1"/>
-          </a:fontRef>
-        </p:style>
-        <p:txBody>
-          <a:bodyPr rtlCol="0" anchor="ctr"/>
-          <a:lstStyle/>
-          <a:p>
-            <a:pPr algn="ctr"/>
-          </a:p>
-        </p:txBody>
-      </p:sp>
-      <p:sp>
-        <p:nvSpPr>
-          <p:cNvPr id="12" name="Rectangle 11"/>
-          <p:cNvSpPr/>
-          <p:nvPr/>
-        </p:nvSpPr>
-        <p:spPr>
-          <a:xfrm>
-            <a:off x="822960" y="4160520"/>
-            <a:ext cx="91440" cy="868680"/>
-          </a:xfrm>
-          <a:prstGeom prst="rect">
-            <a:avLst/>
-          </a:prstGeom>
-          <a:solidFill>
-            <a:srgbClr val="F9B700"/>
-          </a:solidFill>
-          <a:ln>
-            <a:noFill/>
-          </a:ln>
-        </p:spPr>
-        <p:style>
-          <a:lnRef idx="1">
-            <a:schemeClr val="accent1"/>
-          </a:lnRef>
-          <a:fillRef idx="3">
-            <a:schemeClr val="accent1"/>
-          </a:fillRef>
-          <a:effectRef idx="2">
-            <a:schemeClr val="accent1"/>
-          </a:effectRef>
-          <a:fontRef idx="minor">
-            <a:schemeClr val="lt1"/>
-          </a:fontRef>
-        </p:style>
-        <p:txBody>
-          <a:bodyPr rtlCol="0" anchor="ctr"/>
-          <a:lstStyle/>
-          <a:p>
-            <a:pPr algn="ctr"/>
-          </a:p>
-        </p:txBody>
-      </p:sp>
-      <p:sp>
-        <p:nvSpPr>
-          <p:cNvPr id="13" name="TextBox 12"/>
-          <p:cNvSpPr txBox="1"/>
-          <p:nvPr/>
-        </p:nvSpPr>
-        <p:spPr>
-          <a:xfrm>
-            <a:off x="1005840" y="4270248"/>
-            <a:ext cx="10104120" cy="704088"/>
-          </a:xfrm>
-          <a:prstGeom prst="rect">
-            <a:avLst/>
-          </a:prstGeom>
-          <a:noFill/>
-        </p:spPr>
-        <p:txBody>
-          <a:bodyPr wrap="square" lIns="0" rIns="0">
-            <a:spAutoFit/>
-          </a:bodyPr>
-          <a:lstStyle/>
-          <a:p>
-            <a:pPr>
-              <a:defRPr b="1" sz="1500">
-                <a:solidFill>
-                  <a:srgbClr val="1E2761"/>
-                </a:solidFill>
-                <a:latin typeface="Aptos Display"/>
-              </a:defRPr>
-            </a:pPr>
-            <a:r>
-              <a:t>Lab connection</a:t>
-            </a:r>
-          </a:p>
-          <a:p>
-            <a:pPr>
-              <a:spcBef>
-                <a:spcPts val="400"/>
-              </a:spcBef>
-              <a:defRPr sz="1050">
-                <a:solidFill>
-                  <a:srgbClr val="242424"/>
-                </a:solidFill>
-                <a:latin typeface="Aptos"/>
-              </a:defRPr>
-            </a:pPr>
-            <a:r>
-              <a:t>Coverage: Covered. Use the lab README to demonstrate or discuss this topic. Review terms: output.</a:t>
+              <a:t>In the lab, you will apply this pattern, validate the expected behavior, and discuss where it fits in a real Power BI solution.</a:t>
             </a:r>
           </a:p>
         </p:txBody>
@@ -11924,42 +11440,6 @@
       </p:sp>
       <p:sp>
         <p:nvSpPr>
-          <p:cNvPr id="4" name="TextBox 3"/>
-          <p:cNvSpPr txBox="1"/>
-          <p:nvPr/>
-        </p:nvSpPr>
-        <p:spPr>
-          <a:xfrm>
-            <a:off x="530352" y="914400"/>
-            <a:ext cx="10515600" cy="320040"/>
-          </a:xfrm>
-          <a:prstGeom prst="rect">
-            <a:avLst/>
-          </a:prstGeom>
-          <a:noFill/>
-        </p:spPr>
-        <p:txBody>
-          <a:bodyPr wrap="none">
-            <a:spAutoFit/>
-          </a:bodyPr>
-          <a:lstStyle/>
-          <a:p>
-            <a:pPr>
-              <a:defRPr sz="1200">
-                <a:solidFill>
-                  <a:srgbClr val="5C5C5C"/>
-                </a:solidFill>
-                <a:latin typeface="Aptos"/>
-              </a:defRPr>
-            </a:pPr>
-            <a:r>
-              <a:t>Talking points, learner value, and lab connection</a:t>
-            </a:r>
-          </a:p>
-        </p:txBody>
-      </p:sp>
-      <p:sp>
-        <p:nvSpPr>
           <p:cNvPr id="5" name="Rounded Rectangle 4"/>
           <p:cNvSpPr/>
           <p:nvPr/>
@@ -12077,7 +11557,143 @@
               </a:defRPr>
             </a:pPr>
             <a:r>
-              <a:t>Talking points</a:t>
+              <a:t>Key ideas</a:t>
+            </a:r>
+            <a:br/>
+            <a:r>
+              <a:t>• Branches</a:t>
+            </a:r>
+            <a:br/>
+            <a:r>
+              <a:t>• Commits</a:t>
+            </a:r>
+            <a:br/>
+            <a:r>
+              <a:t>• Pull requests</a:t>
+            </a:r>
+          </a:p>
+        </p:txBody>
+      </p:sp>
+      <p:sp>
+        <p:nvSpPr>
+          <p:cNvPr id="8" name="Rounded Rectangle 7"/>
+          <p:cNvSpPr/>
+          <p:nvPr/>
+        </p:nvSpPr>
+        <p:spPr>
+          <a:xfrm>
+            <a:off x="6263640" y="1234440"/>
+            <a:ext cx="5303520" cy="1828800"/>
+          </a:xfrm>
+          <a:prstGeom prst="roundRect">
+            <a:avLst/>
+          </a:prstGeom>
+          <a:solidFill>
+            <a:srgbClr val="FFFFFF"/>
+          </a:solidFill>
+          <a:ln>
+            <a:solidFill>
+              <a:srgbClr val="DCDCDC"/>
+            </a:solidFill>
+          </a:ln>
+        </p:spPr>
+        <p:style>
+          <a:lnRef idx="1">
+            <a:schemeClr val="accent1"/>
+          </a:lnRef>
+          <a:fillRef idx="3">
+            <a:schemeClr val="accent1"/>
+          </a:fillRef>
+          <a:effectRef idx="2">
+            <a:schemeClr val="accent1"/>
+          </a:effectRef>
+          <a:fontRef idx="minor">
+            <a:schemeClr val="lt1"/>
+          </a:fontRef>
+        </p:style>
+        <p:txBody>
+          <a:bodyPr rtlCol="0" anchor="ctr"/>
+          <a:lstStyle/>
+          <a:p>
+            <a:pPr algn="ctr"/>
+          </a:p>
+        </p:txBody>
+      </p:sp>
+      <p:sp>
+        <p:nvSpPr>
+          <p:cNvPr id="9" name="Rectangle 8"/>
+          <p:cNvSpPr/>
+          <p:nvPr/>
+        </p:nvSpPr>
+        <p:spPr>
+          <a:xfrm>
+            <a:off x="6263640" y="1234440"/>
+            <a:ext cx="91440" cy="1828800"/>
+          </a:xfrm>
+          <a:prstGeom prst="rect">
+            <a:avLst/>
+          </a:prstGeom>
+          <a:solidFill>
+            <a:srgbClr val="02C39A"/>
+          </a:solidFill>
+          <a:ln>
+            <a:noFill/>
+          </a:ln>
+        </p:spPr>
+        <p:style>
+          <a:lnRef idx="1">
+            <a:schemeClr val="accent1"/>
+          </a:lnRef>
+          <a:fillRef idx="3">
+            <a:schemeClr val="accent1"/>
+          </a:fillRef>
+          <a:effectRef idx="2">
+            <a:schemeClr val="accent1"/>
+          </a:effectRef>
+          <a:fontRef idx="minor">
+            <a:schemeClr val="lt1"/>
+          </a:fontRef>
+        </p:style>
+        <p:txBody>
+          <a:bodyPr rtlCol="0" anchor="ctr"/>
+          <a:lstStyle/>
+          <a:p>
+            <a:pPr algn="ctr"/>
+          </a:p>
+        </p:txBody>
+      </p:sp>
+      <p:sp>
+        <p:nvSpPr>
+          <p:cNvPr id="10" name="TextBox 9"/>
+          <p:cNvSpPr txBox="1"/>
+          <p:nvPr/>
+        </p:nvSpPr>
+        <p:spPr>
+          <a:xfrm>
+            <a:off x="6446520" y="1344168"/>
+            <a:ext cx="4983480" cy="1664208"/>
+          </a:xfrm>
+          <a:prstGeom prst="rect">
+            <a:avLst/>
+          </a:prstGeom>
+          <a:noFill/>
+        </p:spPr>
+        <p:txBody>
+          <a:bodyPr wrap="square" lIns="0" rIns="0">
+            <a:spAutoFit/>
+          </a:bodyPr>
+          <a:lstStyle/>
+          <a:p>
+            <a:pPr>
+              <a:defRPr b="1" sz="1500">
+                <a:solidFill>
+                  <a:srgbClr val="1E2761"/>
+                </a:solidFill>
+                <a:latin typeface="Aptos Display"/>
+              </a:defRPr>
+            </a:pPr>
+            <a:r>
+              <a:t>Why it helps</a:t>
             </a:r>
           </a:p>
           <a:p>
@@ -12093,29 +11709,25 @@
               </a:defRPr>
             </a:pPr>
             <a:r>
-              <a:t>• Branches</a:t>
+              <a:t>• Review practices</a:t>
             </a:r>
             <a:br/>
             <a:r>
-              <a:t>• Commits</a:t>
-            </a:r>
-            <a:br/>
-            <a:r>
-              <a:t>• Pull requests</a:t>
-            </a:r>
-          </a:p>
-        </p:txBody>
-      </p:sp>
-      <p:sp>
-        <p:nvSpPr>
-          <p:cNvPr id="8" name="Rounded Rectangle 7"/>
+              <a:t>• Tags and releases</a:t>
+            </a:r>
+          </a:p>
+        </p:txBody>
+      </p:sp>
+      <p:sp>
+        <p:nvSpPr>
+          <p:cNvPr id="11" name="Rounded Rectangle 10"/>
           <p:cNvSpPr/>
           <p:nvPr/>
         </p:nvSpPr>
         <p:spPr>
           <a:xfrm>
-            <a:off x="6263640" y="1234440"/>
-            <a:ext cx="5303520" cy="1828800"/>
+            <a:off x="822960" y="4160520"/>
+            <a:ext cx="10424160" cy="868680"/>
           </a:xfrm>
           <a:prstGeom prst="roundRect">
             <a:avLst/>
@@ -12153,20 +11765,20 @@
       </p:sp>
       <p:sp>
         <p:nvSpPr>
-          <p:cNvPr id="9" name="Rectangle 8"/>
+          <p:cNvPr id="12" name="Rectangle 11"/>
           <p:cNvSpPr/>
           <p:nvPr/>
         </p:nvSpPr>
         <p:spPr>
           <a:xfrm>
-            <a:off x="6263640" y="1234440"/>
-            <a:ext cx="91440" cy="1828800"/>
+            <a:off x="822960" y="4160520"/>
+            <a:ext cx="91440" cy="868680"/>
           </a:xfrm>
           <a:prstGeom prst="rect">
             <a:avLst/>
           </a:prstGeom>
           <a:solidFill>
-            <a:srgbClr val="02C39A"/>
+            <a:srgbClr val="F9B700"/>
           </a:solidFill>
           <a:ln>
             <a:noFill/>
@@ -12196,14 +11808,14 @@
       </p:sp>
       <p:sp>
         <p:nvSpPr>
-          <p:cNvPr id="10" name="TextBox 9"/>
+          <p:cNvPr id="13" name="TextBox 12"/>
           <p:cNvSpPr txBox="1"/>
           <p:nvPr/>
         </p:nvSpPr>
         <p:spPr>
           <a:xfrm>
-            <a:off x="6446520" y="1344168"/>
-            <a:ext cx="4983480" cy="1664208"/>
+            <a:off x="1005840" y="4270248"/>
+            <a:ext cx="10104120" cy="704088"/>
           </a:xfrm>
           <a:prstGeom prst="rect">
             <a:avLst/>
@@ -12225,167 +11837,7 @@
               </a:defRPr>
             </a:pPr>
             <a:r>
-              <a:t>Why it helps</a:t>
-            </a:r>
-          </a:p>
-          <a:p>
-            <a:pPr>
-              <a:spcBef>
-                <a:spcPts val="400"/>
-              </a:spcBef>
-              <a:defRPr sz="1050">
-                <a:solidFill>
-                  <a:srgbClr val="242424"/>
-                </a:solidFill>
-                <a:latin typeface="Aptos"/>
-              </a:defRPr>
-            </a:pPr>
-            <a:r>
-              <a:t>• Review practices</a:t>
-            </a:r>
-            <a:br/>
-            <a:r>
-              <a:t>• Tags and releases</a:t>
-            </a:r>
-          </a:p>
-        </p:txBody>
-      </p:sp>
-      <p:sp>
-        <p:nvSpPr>
-          <p:cNvPr id="11" name="Rounded Rectangle 10"/>
-          <p:cNvSpPr/>
-          <p:nvPr/>
-        </p:nvSpPr>
-        <p:spPr>
-          <a:xfrm>
-            <a:off x="822960" y="4160520"/>
-            <a:ext cx="10424160" cy="868680"/>
-          </a:xfrm>
-          <a:prstGeom prst="roundRect">
-            <a:avLst/>
-          </a:prstGeom>
-          <a:solidFill>
-            <a:srgbClr val="FFFFFF"/>
-          </a:solidFill>
-          <a:ln>
-            <a:solidFill>
-              <a:srgbClr val="DCDCDC"/>
-            </a:solidFill>
-          </a:ln>
-        </p:spPr>
-        <p:style>
-          <a:lnRef idx="1">
-            <a:schemeClr val="accent1"/>
-          </a:lnRef>
-          <a:fillRef idx="3">
-            <a:schemeClr val="accent1"/>
-          </a:fillRef>
-          <a:effectRef idx="2">
-            <a:schemeClr val="accent1"/>
-          </a:effectRef>
-          <a:fontRef idx="minor">
-            <a:schemeClr val="lt1"/>
-          </a:fontRef>
-        </p:style>
-        <p:txBody>
-          <a:bodyPr rtlCol="0" anchor="ctr"/>
-          <a:lstStyle/>
-          <a:p>
-            <a:pPr algn="ctr"/>
-          </a:p>
-        </p:txBody>
-      </p:sp>
-      <p:sp>
-        <p:nvSpPr>
-          <p:cNvPr id="12" name="Rectangle 11"/>
-          <p:cNvSpPr/>
-          <p:nvPr/>
-        </p:nvSpPr>
-        <p:spPr>
-          <a:xfrm>
-            <a:off x="822960" y="4160520"/>
-            <a:ext cx="91440" cy="868680"/>
-          </a:xfrm>
-          <a:prstGeom prst="rect">
-            <a:avLst/>
-          </a:prstGeom>
-          <a:solidFill>
-            <a:srgbClr val="F9B700"/>
-          </a:solidFill>
-          <a:ln>
-            <a:noFill/>
-          </a:ln>
-        </p:spPr>
-        <p:style>
-          <a:lnRef idx="1">
-            <a:schemeClr val="accent1"/>
-          </a:lnRef>
-          <a:fillRef idx="3">
-            <a:schemeClr val="accent1"/>
-          </a:fillRef>
-          <a:effectRef idx="2">
-            <a:schemeClr val="accent1"/>
-          </a:effectRef>
-          <a:fontRef idx="minor">
-            <a:schemeClr val="lt1"/>
-          </a:fontRef>
-        </p:style>
-        <p:txBody>
-          <a:bodyPr rtlCol="0" anchor="ctr"/>
-          <a:lstStyle/>
-          <a:p>
-            <a:pPr algn="ctr"/>
-          </a:p>
-        </p:txBody>
-      </p:sp>
-      <p:sp>
-        <p:nvSpPr>
-          <p:cNvPr id="13" name="TextBox 12"/>
-          <p:cNvSpPr txBox="1"/>
-          <p:nvPr/>
-        </p:nvSpPr>
-        <p:spPr>
-          <a:xfrm>
-            <a:off x="1005840" y="4270248"/>
-            <a:ext cx="10104120" cy="704088"/>
-          </a:xfrm>
-          <a:prstGeom prst="rect">
-            <a:avLst/>
-          </a:prstGeom>
-          <a:noFill/>
-        </p:spPr>
-        <p:txBody>
-          <a:bodyPr wrap="square" lIns="0" rIns="0">
-            <a:spAutoFit/>
-          </a:bodyPr>
-          <a:lstStyle/>
-          <a:p>
-            <a:pPr>
-              <a:defRPr b="1" sz="1500">
-                <a:solidFill>
-                  <a:srgbClr val="1E2761"/>
-                </a:solidFill>
-                <a:latin typeface="Aptos Display"/>
-              </a:defRPr>
-            </a:pPr>
-            <a:r>
-              <a:t>Lab connection</a:t>
-            </a:r>
-          </a:p>
-          <a:p>
-            <a:pPr>
-              <a:spcBef>
-                <a:spcPts val="400"/>
-              </a:spcBef>
-              <a:defRPr sz="1050">
-                <a:solidFill>
-                  <a:srgbClr val="242424"/>
-                </a:solidFill>
-                <a:latin typeface="Aptos"/>
-              </a:defRPr>
-            </a:pPr>
-            <a:r>
-              <a:t>Coverage: Partial. Use the lab README to demonstrate or discuss this topic. Review terms: branches, commits, practices, releases, requests.</a:t>
+              <a:t>In the lab, you will apply this pattern, validate the expected behavior, and discuss where it fits in a real Power BI solution.</a:t>
             </a:r>
           </a:p>
         </p:txBody>
@@ -12524,42 +11976,6 @@
       </p:sp>
       <p:sp>
         <p:nvSpPr>
-          <p:cNvPr id="4" name="TextBox 3"/>
-          <p:cNvSpPr txBox="1"/>
-          <p:nvPr/>
-        </p:nvSpPr>
-        <p:spPr>
-          <a:xfrm>
-            <a:off x="530352" y="914400"/>
-            <a:ext cx="10515600" cy="320040"/>
-          </a:xfrm>
-          <a:prstGeom prst="rect">
-            <a:avLst/>
-          </a:prstGeom>
-          <a:noFill/>
-        </p:spPr>
-        <p:txBody>
-          <a:bodyPr wrap="none">
-            <a:spAutoFit/>
-          </a:bodyPr>
-          <a:lstStyle/>
-          <a:p>
-            <a:pPr>
-              <a:defRPr sz="1200">
-                <a:solidFill>
-                  <a:srgbClr val="5C5C5C"/>
-                </a:solidFill>
-                <a:latin typeface="Aptos"/>
-              </a:defRPr>
-            </a:pPr>
-            <a:r>
-              <a:t>Talking points, learner value, and lab connection</a:t>
-            </a:r>
-          </a:p>
-        </p:txBody>
-      </p:sp>
-      <p:sp>
-        <p:nvSpPr>
           <p:cNvPr id="5" name="Rounded Rectangle 4"/>
           <p:cNvSpPr/>
           <p:nvPr/>
@@ -12677,7 +12093,139 @@
               </a:defRPr>
             </a:pPr>
             <a:r>
-              <a:t>Talking points</a:t>
+              <a:t>Key ideas</a:t>
+            </a:r>
+            <a:br/>
+            <a:r>
+              <a:t>• Report folder</a:t>
+            </a:r>
+            <a:br/>
+            <a:r>
+              <a:t>• Semantic model folder</a:t>
+            </a:r>
+          </a:p>
+        </p:txBody>
+      </p:sp>
+      <p:sp>
+        <p:nvSpPr>
+          <p:cNvPr id="8" name="Rounded Rectangle 7"/>
+          <p:cNvSpPr/>
+          <p:nvPr/>
+        </p:nvSpPr>
+        <p:spPr>
+          <a:xfrm>
+            <a:off x="6263640" y="1234440"/>
+            <a:ext cx="5303520" cy="1828800"/>
+          </a:xfrm>
+          <a:prstGeom prst="roundRect">
+            <a:avLst/>
+          </a:prstGeom>
+          <a:solidFill>
+            <a:srgbClr val="FFFFFF"/>
+          </a:solidFill>
+          <a:ln>
+            <a:solidFill>
+              <a:srgbClr val="DCDCDC"/>
+            </a:solidFill>
+          </a:ln>
+        </p:spPr>
+        <p:style>
+          <a:lnRef idx="1">
+            <a:schemeClr val="accent1"/>
+          </a:lnRef>
+          <a:fillRef idx="3">
+            <a:schemeClr val="accent1"/>
+          </a:fillRef>
+          <a:effectRef idx="2">
+            <a:schemeClr val="accent1"/>
+          </a:effectRef>
+          <a:fontRef idx="minor">
+            <a:schemeClr val="lt1"/>
+          </a:fontRef>
+        </p:style>
+        <p:txBody>
+          <a:bodyPr rtlCol="0" anchor="ctr"/>
+          <a:lstStyle/>
+          <a:p>
+            <a:pPr algn="ctr"/>
+          </a:p>
+        </p:txBody>
+      </p:sp>
+      <p:sp>
+        <p:nvSpPr>
+          <p:cNvPr id="9" name="Rectangle 8"/>
+          <p:cNvSpPr/>
+          <p:nvPr/>
+        </p:nvSpPr>
+        <p:spPr>
+          <a:xfrm>
+            <a:off x="6263640" y="1234440"/>
+            <a:ext cx="91440" cy="1828800"/>
+          </a:xfrm>
+          <a:prstGeom prst="rect">
+            <a:avLst/>
+          </a:prstGeom>
+          <a:solidFill>
+            <a:srgbClr val="02C39A"/>
+          </a:solidFill>
+          <a:ln>
+            <a:noFill/>
+          </a:ln>
+        </p:spPr>
+        <p:style>
+          <a:lnRef idx="1">
+            <a:schemeClr val="accent1"/>
+          </a:lnRef>
+          <a:fillRef idx="3">
+            <a:schemeClr val="accent1"/>
+          </a:fillRef>
+          <a:effectRef idx="2">
+            <a:schemeClr val="accent1"/>
+          </a:effectRef>
+          <a:fontRef idx="minor">
+            <a:schemeClr val="lt1"/>
+          </a:fontRef>
+        </p:style>
+        <p:txBody>
+          <a:bodyPr rtlCol="0" anchor="ctr"/>
+          <a:lstStyle/>
+          <a:p>
+            <a:pPr algn="ctr"/>
+          </a:p>
+        </p:txBody>
+      </p:sp>
+      <p:sp>
+        <p:nvSpPr>
+          <p:cNvPr id="10" name="TextBox 9"/>
+          <p:cNvSpPr txBox="1"/>
+          <p:nvPr/>
+        </p:nvSpPr>
+        <p:spPr>
+          <a:xfrm>
+            <a:off x="6446520" y="1344168"/>
+            <a:ext cx="4983480" cy="1664208"/>
+          </a:xfrm>
+          <a:prstGeom prst="rect">
+            <a:avLst/>
+          </a:prstGeom>
+          <a:noFill/>
+        </p:spPr>
+        <p:txBody>
+          <a:bodyPr wrap="square" lIns="0" rIns="0">
+            <a:spAutoFit/>
+          </a:bodyPr>
+          <a:lstStyle/>
+          <a:p>
+            <a:pPr>
+              <a:defRPr b="1" sz="1500">
+                <a:solidFill>
+                  <a:srgbClr val="1E2761"/>
+                </a:solidFill>
+                <a:latin typeface="Aptos Display"/>
+              </a:defRPr>
+            </a:pPr>
+            <a:r>
+              <a:t>Why it helps</a:t>
             </a:r>
           </a:p>
           <a:p>
@@ -12693,25 +12241,25 @@
               </a:defRPr>
             </a:pPr>
             <a:r>
-              <a:t>• Report folder</a:t>
+              <a:t>• Definition files</a:t>
             </a:r>
             <a:br/>
             <a:r>
-              <a:t>• Semantic model folder</a:t>
-            </a:r>
-          </a:p>
-        </p:txBody>
-      </p:sp>
-      <p:sp>
-        <p:nvSpPr>
-          <p:cNvPr id="8" name="Rounded Rectangle 7"/>
+              <a:t>• What to review</a:t>
+            </a:r>
+          </a:p>
+        </p:txBody>
+      </p:sp>
+      <p:sp>
+        <p:nvSpPr>
+          <p:cNvPr id="11" name="Rounded Rectangle 10"/>
           <p:cNvSpPr/>
           <p:nvPr/>
         </p:nvSpPr>
         <p:spPr>
           <a:xfrm>
-            <a:off x="6263640" y="1234440"/>
-            <a:ext cx="5303520" cy="1828800"/>
+            <a:off x="822960" y="4160520"/>
+            <a:ext cx="10424160" cy="868680"/>
           </a:xfrm>
           <a:prstGeom prst="roundRect">
             <a:avLst/>
@@ -12749,20 +12297,20 @@
       </p:sp>
       <p:sp>
         <p:nvSpPr>
-          <p:cNvPr id="9" name="Rectangle 8"/>
+          <p:cNvPr id="12" name="Rectangle 11"/>
           <p:cNvSpPr/>
           <p:nvPr/>
         </p:nvSpPr>
         <p:spPr>
           <a:xfrm>
-            <a:off x="6263640" y="1234440"/>
-            <a:ext cx="91440" cy="1828800"/>
+            <a:off x="822960" y="4160520"/>
+            <a:ext cx="91440" cy="868680"/>
           </a:xfrm>
           <a:prstGeom prst="rect">
             <a:avLst/>
           </a:prstGeom>
           <a:solidFill>
-            <a:srgbClr val="02C39A"/>
+            <a:srgbClr val="F9B700"/>
           </a:solidFill>
           <a:ln>
             <a:noFill/>
@@ -12792,14 +12340,14 @@
       </p:sp>
       <p:sp>
         <p:nvSpPr>
-          <p:cNvPr id="10" name="TextBox 9"/>
+          <p:cNvPr id="13" name="TextBox 12"/>
           <p:cNvSpPr txBox="1"/>
           <p:nvPr/>
         </p:nvSpPr>
         <p:spPr>
           <a:xfrm>
-            <a:off x="6446520" y="1344168"/>
-            <a:ext cx="4983480" cy="1664208"/>
+            <a:off x="1005840" y="4270248"/>
+            <a:ext cx="10104120" cy="704088"/>
           </a:xfrm>
           <a:prstGeom prst="rect">
             <a:avLst/>
@@ -12821,167 +12369,7 @@
               </a:defRPr>
             </a:pPr>
             <a:r>
-              <a:t>Why it helps</a:t>
-            </a:r>
-          </a:p>
-          <a:p>
-            <a:pPr>
-              <a:spcBef>
-                <a:spcPts val="400"/>
-              </a:spcBef>
-              <a:defRPr sz="1050">
-                <a:solidFill>
-                  <a:srgbClr val="242424"/>
-                </a:solidFill>
-                <a:latin typeface="Aptos"/>
-              </a:defRPr>
-            </a:pPr>
-            <a:r>
-              <a:t>• Definition files</a:t>
-            </a:r>
-            <a:br/>
-            <a:r>
-              <a:t>• What to review</a:t>
-            </a:r>
-          </a:p>
-        </p:txBody>
-      </p:sp>
-      <p:sp>
-        <p:nvSpPr>
-          <p:cNvPr id="11" name="Rounded Rectangle 10"/>
-          <p:cNvSpPr/>
-          <p:nvPr/>
-        </p:nvSpPr>
-        <p:spPr>
-          <a:xfrm>
-            <a:off x="822960" y="4160520"/>
-            <a:ext cx="10424160" cy="868680"/>
-          </a:xfrm>
-          <a:prstGeom prst="roundRect">
-            <a:avLst/>
-          </a:prstGeom>
-          <a:solidFill>
-            <a:srgbClr val="FFFFFF"/>
-          </a:solidFill>
-          <a:ln>
-            <a:solidFill>
-              <a:srgbClr val="DCDCDC"/>
-            </a:solidFill>
-          </a:ln>
-        </p:spPr>
-        <p:style>
-          <a:lnRef idx="1">
-            <a:schemeClr val="accent1"/>
-          </a:lnRef>
-          <a:fillRef idx="3">
-            <a:schemeClr val="accent1"/>
-          </a:fillRef>
-          <a:effectRef idx="2">
-            <a:schemeClr val="accent1"/>
-          </a:effectRef>
-          <a:fontRef idx="minor">
-            <a:schemeClr val="lt1"/>
-          </a:fontRef>
-        </p:style>
-        <p:txBody>
-          <a:bodyPr rtlCol="0" anchor="ctr"/>
-          <a:lstStyle/>
-          <a:p>
-            <a:pPr algn="ctr"/>
-          </a:p>
-        </p:txBody>
-      </p:sp>
-      <p:sp>
-        <p:nvSpPr>
-          <p:cNvPr id="12" name="Rectangle 11"/>
-          <p:cNvSpPr/>
-          <p:nvPr/>
-        </p:nvSpPr>
-        <p:spPr>
-          <a:xfrm>
-            <a:off x="822960" y="4160520"/>
-            <a:ext cx="91440" cy="868680"/>
-          </a:xfrm>
-          <a:prstGeom prst="rect">
-            <a:avLst/>
-          </a:prstGeom>
-          <a:solidFill>
-            <a:srgbClr val="F9B700"/>
-          </a:solidFill>
-          <a:ln>
-            <a:noFill/>
-          </a:ln>
-        </p:spPr>
-        <p:style>
-          <a:lnRef idx="1">
-            <a:schemeClr val="accent1"/>
-          </a:lnRef>
-          <a:fillRef idx="3">
-            <a:schemeClr val="accent1"/>
-          </a:fillRef>
-          <a:effectRef idx="2">
-            <a:schemeClr val="accent1"/>
-          </a:effectRef>
-          <a:fontRef idx="minor">
-            <a:schemeClr val="lt1"/>
-          </a:fontRef>
-        </p:style>
-        <p:txBody>
-          <a:bodyPr rtlCol="0" anchor="ctr"/>
-          <a:lstStyle/>
-          <a:p>
-            <a:pPr algn="ctr"/>
-          </a:p>
-        </p:txBody>
-      </p:sp>
-      <p:sp>
-        <p:nvSpPr>
-          <p:cNvPr id="13" name="TextBox 12"/>
-          <p:cNvSpPr txBox="1"/>
-          <p:nvPr/>
-        </p:nvSpPr>
-        <p:spPr>
-          <a:xfrm>
-            <a:off x="1005840" y="4270248"/>
-            <a:ext cx="10104120" cy="704088"/>
-          </a:xfrm>
-          <a:prstGeom prst="rect">
-            <a:avLst/>
-          </a:prstGeom>
-          <a:noFill/>
-        </p:spPr>
-        <p:txBody>
-          <a:bodyPr wrap="square" lIns="0" rIns="0">
-            <a:spAutoFit/>
-          </a:bodyPr>
-          <a:lstStyle/>
-          <a:p>
-            <a:pPr>
-              <a:defRPr b="1" sz="1500">
-                <a:solidFill>
-                  <a:srgbClr val="1E2761"/>
-                </a:solidFill>
-                <a:latin typeface="Aptos Display"/>
-              </a:defRPr>
-            </a:pPr>
-            <a:r>
-              <a:t>Lab connection</a:t>
-            </a:r>
-          </a:p>
-          <a:p>
-            <a:pPr>
-              <a:spcBef>
-                <a:spcPts val="400"/>
-              </a:spcBef>
-              <a:defRPr sz="1050">
-                <a:solidFill>
-                  <a:srgbClr val="242424"/>
-                </a:solidFill>
-                <a:latin typeface="Aptos"/>
-              </a:defRPr>
-            </a:pPr>
-            <a:r>
-              <a:t>Coverage: Covered. Use the lab README to demonstrate or discuss this topic. Review terms: none.</a:t>
+              <a:t>In the lab, you will apply this pattern, validate the expected behavior, and discuss where it fits in a real Power BI solution.</a:t>
             </a:r>
           </a:p>
         </p:txBody>
@@ -13120,42 +12508,6 @@
       </p:sp>
       <p:sp>
         <p:nvSpPr>
-          <p:cNvPr id="4" name="TextBox 3"/>
-          <p:cNvSpPr txBox="1"/>
-          <p:nvPr/>
-        </p:nvSpPr>
-        <p:spPr>
-          <a:xfrm>
-            <a:off x="530352" y="914400"/>
-            <a:ext cx="10515600" cy="320040"/>
-          </a:xfrm>
-          <a:prstGeom prst="rect">
-            <a:avLst/>
-          </a:prstGeom>
-          <a:noFill/>
-        </p:spPr>
-        <p:txBody>
-          <a:bodyPr wrap="none">
-            <a:spAutoFit/>
-          </a:bodyPr>
-          <a:lstStyle/>
-          <a:p>
-            <a:pPr>
-              <a:defRPr sz="1200">
-                <a:solidFill>
-                  <a:srgbClr val="5C5C5C"/>
-                </a:solidFill>
-                <a:latin typeface="Aptos"/>
-              </a:defRPr>
-            </a:pPr>
-            <a:r>
-              <a:t>Talking points, learner value, and lab connection</a:t>
-            </a:r>
-          </a:p>
-        </p:txBody>
-      </p:sp>
-      <p:sp>
-        <p:nvSpPr>
           <p:cNvPr id="5" name="Rounded Rectangle 4"/>
           <p:cNvSpPr/>
           <p:nvPr/>
@@ -13273,7 +12625,139 @@
               </a:defRPr>
             </a:pPr>
             <a:r>
-              <a:t>Talking points</a:t>
+              <a:t>Key ideas</a:t>
+            </a:r>
+            <a:br/>
+            <a:r>
+              <a:t>• Tabular Editor</a:t>
+            </a:r>
+            <a:br/>
+            <a:r>
+              <a:t>• ALM Toolkit</a:t>
+            </a:r>
+          </a:p>
+        </p:txBody>
+      </p:sp>
+      <p:sp>
+        <p:nvSpPr>
+          <p:cNvPr id="8" name="Rounded Rectangle 7"/>
+          <p:cNvSpPr/>
+          <p:nvPr/>
+        </p:nvSpPr>
+        <p:spPr>
+          <a:xfrm>
+            <a:off x="6263640" y="1234440"/>
+            <a:ext cx="5303520" cy="1828800"/>
+          </a:xfrm>
+          <a:prstGeom prst="roundRect">
+            <a:avLst/>
+          </a:prstGeom>
+          <a:solidFill>
+            <a:srgbClr val="FFFFFF"/>
+          </a:solidFill>
+          <a:ln>
+            <a:solidFill>
+              <a:srgbClr val="DCDCDC"/>
+            </a:solidFill>
+          </a:ln>
+        </p:spPr>
+        <p:style>
+          <a:lnRef idx="1">
+            <a:schemeClr val="accent1"/>
+          </a:lnRef>
+          <a:fillRef idx="3">
+            <a:schemeClr val="accent1"/>
+          </a:fillRef>
+          <a:effectRef idx="2">
+            <a:schemeClr val="accent1"/>
+          </a:effectRef>
+          <a:fontRef idx="minor">
+            <a:schemeClr val="lt1"/>
+          </a:fontRef>
+        </p:style>
+        <p:txBody>
+          <a:bodyPr rtlCol="0" anchor="ctr"/>
+          <a:lstStyle/>
+          <a:p>
+            <a:pPr algn="ctr"/>
+          </a:p>
+        </p:txBody>
+      </p:sp>
+      <p:sp>
+        <p:nvSpPr>
+          <p:cNvPr id="9" name="Rectangle 8"/>
+          <p:cNvSpPr/>
+          <p:nvPr/>
+        </p:nvSpPr>
+        <p:spPr>
+          <a:xfrm>
+            <a:off x="6263640" y="1234440"/>
+            <a:ext cx="91440" cy="1828800"/>
+          </a:xfrm>
+          <a:prstGeom prst="rect">
+            <a:avLst/>
+          </a:prstGeom>
+          <a:solidFill>
+            <a:srgbClr val="02C39A"/>
+          </a:solidFill>
+          <a:ln>
+            <a:noFill/>
+          </a:ln>
+        </p:spPr>
+        <p:style>
+          <a:lnRef idx="1">
+            <a:schemeClr val="accent1"/>
+          </a:lnRef>
+          <a:fillRef idx="3">
+            <a:schemeClr val="accent1"/>
+          </a:fillRef>
+          <a:effectRef idx="2">
+            <a:schemeClr val="accent1"/>
+          </a:effectRef>
+          <a:fontRef idx="minor">
+            <a:schemeClr val="lt1"/>
+          </a:fontRef>
+        </p:style>
+        <p:txBody>
+          <a:bodyPr rtlCol="0" anchor="ctr"/>
+          <a:lstStyle/>
+          <a:p>
+            <a:pPr algn="ctr"/>
+          </a:p>
+        </p:txBody>
+      </p:sp>
+      <p:sp>
+        <p:nvSpPr>
+          <p:cNvPr id="10" name="TextBox 9"/>
+          <p:cNvSpPr txBox="1"/>
+          <p:nvPr/>
+        </p:nvSpPr>
+        <p:spPr>
+          <a:xfrm>
+            <a:off x="6446520" y="1344168"/>
+            <a:ext cx="4983480" cy="1664208"/>
+          </a:xfrm>
+          <a:prstGeom prst="rect">
+            <a:avLst/>
+          </a:prstGeom>
+          <a:noFill/>
+        </p:spPr>
+        <p:txBody>
+          <a:bodyPr wrap="square" lIns="0" rIns="0">
+            <a:spAutoFit/>
+          </a:bodyPr>
+          <a:lstStyle/>
+          <a:p>
+            <a:pPr>
+              <a:defRPr b="1" sz="1500">
+                <a:solidFill>
+                  <a:srgbClr val="1E2761"/>
+                </a:solidFill>
+                <a:latin typeface="Aptos Display"/>
+              </a:defRPr>
+            </a:pPr>
+            <a:r>
+              <a:t>Why it helps</a:t>
             </a:r>
           </a:p>
           <a:p>
@@ -13289,25 +12773,25 @@
               </a:defRPr>
             </a:pPr>
             <a:r>
-              <a:t>• Tabular Editor</a:t>
+              <a:t>• XMLA dependency</a:t>
             </a:r>
             <a:br/>
             <a:r>
-              <a:t>• ALM Toolkit</a:t>
-            </a:r>
-          </a:p>
-        </p:txBody>
-      </p:sp>
-      <p:sp>
-        <p:nvSpPr>
-          <p:cNvPr id="8" name="Rounded Rectangle 7"/>
+              <a:t>• Customer policy validation</a:t>
+            </a:r>
+          </a:p>
+        </p:txBody>
+      </p:sp>
+      <p:sp>
+        <p:nvSpPr>
+          <p:cNvPr id="11" name="Rounded Rectangle 10"/>
           <p:cNvSpPr/>
           <p:nvPr/>
         </p:nvSpPr>
         <p:spPr>
           <a:xfrm>
-            <a:off x="6263640" y="1234440"/>
-            <a:ext cx="5303520" cy="1828800"/>
+            <a:off x="822960" y="4160520"/>
+            <a:ext cx="10424160" cy="868680"/>
           </a:xfrm>
           <a:prstGeom prst="roundRect">
             <a:avLst/>
@@ -13345,20 +12829,20 @@
       </p:sp>
       <p:sp>
         <p:nvSpPr>
-          <p:cNvPr id="9" name="Rectangle 8"/>
+          <p:cNvPr id="12" name="Rectangle 11"/>
           <p:cNvSpPr/>
           <p:nvPr/>
         </p:nvSpPr>
         <p:spPr>
           <a:xfrm>
-            <a:off x="6263640" y="1234440"/>
-            <a:ext cx="91440" cy="1828800"/>
+            <a:off x="822960" y="4160520"/>
+            <a:ext cx="91440" cy="868680"/>
           </a:xfrm>
           <a:prstGeom prst="rect">
             <a:avLst/>
           </a:prstGeom>
           <a:solidFill>
-            <a:srgbClr val="02C39A"/>
+            <a:srgbClr val="F9B700"/>
           </a:solidFill>
           <a:ln>
             <a:noFill/>
@@ -13388,14 +12872,14 @@
       </p:sp>
       <p:sp>
         <p:nvSpPr>
-          <p:cNvPr id="10" name="TextBox 9"/>
+          <p:cNvPr id="13" name="TextBox 12"/>
           <p:cNvSpPr txBox="1"/>
           <p:nvPr/>
         </p:nvSpPr>
         <p:spPr>
           <a:xfrm>
-            <a:off x="6446520" y="1344168"/>
-            <a:ext cx="4983480" cy="1664208"/>
+            <a:off x="1005840" y="4270248"/>
+            <a:ext cx="10104120" cy="704088"/>
           </a:xfrm>
           <a:prstGeom prst="rect">
             <a:avLst/>
@@ -13417,167 +12901,7 @@
               </a:defRPr>
             </a:pPr>
             <a:r>
-              <a:t>Why it helps</a:t>
-            </a:r>
-          </a:p>
-          <a:p>
-            <a:pPr>
-              <a:spcBef>
-                <a:spcPts val="400"/>
-              </a:spcBef>
-              <a:defRPr sz="1050">
-                <a:solidFill>
-                  <a:srgbClr val="242424"/>
-                </a:solidFill>
-                <a:latin typeface="Aptos"/>
-              </a:defRPr>
-            </a:pPr>
-            <a:r>
-              <a:t>• XMLA dependency</a:t>
-            </a:r>
-            <a:br/>
-            <a:r>
-              <a:t>• Customer policy validation</a:t>
-            </a:r>
-          </a:p>
-        </p:txBody>
-      </p:sp>
-      <p:sp>
-        <p:nvSpPr>
-          <p:cNvPr id="11" name="Rounded Rectangle 10"/>
-          <p:cNvSpPr/>
-          <p:nvPr/>
-        </p:nvSpPr>
-        <p:spPr>
-          <a:xfrm>
-            <a:off x="822960" y="4160520"/>
-            <a:ext cx="10424160" cy="868680"/>
-          </a:xfrm>
-          <a:prstGeom prst="roundRect">
-            <a:avLst/>
-          </a:prstGeom>
-          <a:solidFill>
-            <a:srgbClr val="FFFFFF"/>
-          </a:solidFill>
-          <a:ln>
-            <a:solidFill>
-              <a:srgbClr val="DCDCDC"/>
-            </a:solidFill>
-          </a:ln>
-        </p:spPr>
-        <p:style>
-          <a:lnRef idx="1">
-            <a:schemeClr val="accent1"/>
-          </a:lnRef>
-          <a:fillRef idx="3">
-            <a:schemeClr val="accent1"/>
-          </a:fillRef>
-          <a:effectRef idx="2">
-            <a:schemeClr val="accent1"/>
-          </a:effectRef>
-          <a:fontRef idx="minor">
-            <a:schemeClr val="lt1"/>
-          </a:fontRef>
-        </p:style>
-        <p:txBody>
-          <a:bodyPr rtlCol="0" anchor="ctr"/>
-          <a:lstStyle/>
-          <a:p>
-            <a:pPr algn="ctr"/>
-          </a:p>
-        </p:txBody>
-      </p:sp>
-      <p:sp>
-        <p:nvSpPr>
-          <p:cNvPr id="12" name="Rectangle 11"/>
-          <p:cNvSpPr/>
-          <p:nvPr/>
-        </p:nvSpPr>
-        <p:spPr>
-          <a:xfrm>
-            <a:off x="822960" y="4160520"/>
-            <a:ext cx="91440" cy="868680"/>
-          </a:xfrm>
-          <a:prstGeom prst="rect">
-            <a:avLst/>
-          </a:prstGeom>
-          <a:solidFill>
-            <a:srgbClr val="F9B700"/>
-          </a:solidFill>
-          <a:ln>
-            <a:noFill/>
-          </a:ln>
-        </p:spPr>
-        <p:style>
-          <a:lnRef idx="1">
-            <a:schemeClr val="accent1"/>
-          </a:lnRef>
-          <a:fillRef idx="3">
-            <a:schemeClr val="accent1"/>
-          </a:fillRef>
-          <a:effectRef idx="2">
-            <a:schemeClr val="accent1"/>
-          </a:effectRef>
-          <a:fontRef idx="minor">
-            <a:schemeClr val="lt1"/>
-          </a:fontRef>
-        </p:style>
-        <p:txBody>
-          <a:bodyPr rtlCol="0" anchor="ctr"/>
-          <a:lstStyle/>
-          <a:p>
-            <a:pPr algn="ctr"/>
-          </a:p>
-        </p:txBody>
-      </p:sp>
-      <p:sp>
-        <p:nvSpPr>
-          <p:cNvPr id="13" name="TextBox 12"/>
-          <p:cNvSpPr txBox="1"/>
-          <p:nvPr/>
-        </p:nvSpPr>
-        <p:spPr>
-          <a:xfrm>
-            <a:off x="1005840" y="4270248"/>
-            <a:ext cx="10104120" cy="704088"/>
-          </a:xfrm>
-          <a:prstGeom prst="rect">
-            <a:avLst/>
-          </a:prstGeom>
-          <a:noFill/>
-        </p:spPr>
-        <p:txBody>
-          <a:bodyPr wrap="square" lIns="0" rIns="0">
-            <a:spAutoFit/>
-          </a:bodyPr>
-          <a:lstStyle/>
-          <a:p>
-            <a:pPr>
-              <a:defRPr b="1" sz="1500">
-                <a:solidFill>
-                  <a:srgbClr val="1E2761"/>
-                </a:solidFill>
-                <a:latin typeface="Aptos Display"/>
-              </a:defRPr>
-            </a:pPr>
-            <a:r>
-              <a:t>Lab connection</a:t>
-            </a:r>
-          </a:p>
-          <a:p>
-            <a:pPr>
-              <a:spcBef>
-                <a:spcPts val="400"/>
-              </a:spcBef>
-              <a:defRPr sz="1050">
-                <a:solidFill>
-                  <a:srgbClr val="242424"/>
-                </a:solidFill>
-                <a:latin typeface="Aptos"/>
-              </a:defRPr>
-            </a:pPr>
-            <a:r>
-              <a:t>Coverage: Covered. Use the lab README to demonstrate or discuss this topic. Review terms: dependency.</a:t>
+              <a:t>In the lab, you will apply this pattern, validate the expected behavior, and discuss where it fits in a real Power BI solution.</a:t>
             </a:r>
           </a:p>
         </p:txBody>
@@ -13716,42 +13040,6 @@
       </p:sp>
       <p:sp>
         <p:nvSpPr>
-          <p:cNvPr id="4" name="TextBox 3"/>
-          <p:cNvSpPr txBox="1"/>
-          <p:nvPr/>
-        </p:nvSpPr>
-        <p:spPr>
-          <a:xfrm>
-            <a:off x="530352" y="914400"/>
-            <a:ext cx="10515600" cy="320040"/>
-          </a:xfrm>
-          <a:prstGeom prst="rect">
-            <a:avLst/>
-          </a:prstGeom>
-          <a:noFill/>
-        </p:spPr>
-        <p:txBody>
-          <a:bodyPr wrap="none">
-            <a:spAutoFit/>
-          </a:bodyPr>
-          <a:lstStyle/>
-          <a:p>
-            <a:pPr>
-              <a:defRPr sz="1200">
-                <a:solidFill>
-                  <a:srgbClr val="5C5C5C"/>
-                </a:solidFill>
-                <a:latin typeface="Aptos"/>
-              </a:defRPr>
-            </a:pPr>
-            <a:r>
-              <a:t>Talking points, learner value, and lab connection</a:t>
-            </a:r>
-          </a:p>
-        </p:txBody>
-      </p:sp>
-      <p:sp>
-        <p:nvSpPr>
           <p:cNvPr id="5" name="Rounded Rectangle 4"/>
           <p:cNvSpPr/>
           <p:nvPr/>
@@ -13869,7 +13157,143 @@
               </a:defRPr>
             </a:pPr>
             <a:r>
-              <a:t>Talking points</a:t>
+              <a:t>Key ideas</a:t>
+            </a:r>
+            <a:br/>
+            <a:r>
+              <a:t>• Workspace operations</a:t>
+            </a:r>
+            <a:br/>
+            <a:r>
+              <a:t>• Import/export</a:t>
+            </a:r>
+            <a:br/>
+            <a:r>
+              <a:t>• Refresh</a:t>
+            </a:r>
+          </a:p>
+        </p:txBody>
+      </p:sp>
+      <p:sp>
+        <p:nvSpPr>
+          <p:cNvPr id="8" name="Rounded Rectangle 7"/>
+          <p:cNvSpPr/>
+          <p:nvPr/>
+        </p:nvSpPr>
+        <p:spPr>
+          <a:xfrm>
+            <a:off x="6263640" y="1234440"/>
+            <a:ext cx="5303520" cy="1828800"/>
+          </a:xfrm>
+          <a:prstGeom prst="roundRect">
+            <a:avLst/>
+          </a:prstGeom>
+          <a:solidFill>
+            <a:srgbClr val="FFFFFF"/>
+          </a:solidFill>
+          <a:ln>
+            <a:solidFill>
+              <a:srgbClr val="DCDCDC"/>
+            </a:solidFill>
+          </a:ln>
+        </p:spPr>
+        <p:style>
+          <a:lnRef idx="1">
+            <a:schemeClr val="accent1"/>
+          </a:lnRef>
+          <a:fillRef idx="3">
+            <a:schemeClr val="accent1"/>
+          </a:fillRef>
+          <a:effectRef idx="2">
+            <a:schemeClr val="accent1"/>
+          </a:effectRef>
+          <a:fontRef idx="minor">
+            <a:schemeClr val="lt1"/>
+          </a:fontRef>
+        </p:style>
+        <p:txBody>
+          <a:bodyPr rtlCol="0" anchor="ctr"/>
+          <a:lstStyle/>
+          <a:p>
+            <a:pPr algn="ctr"/>
+          </a:p>
+        </p:txBody>
+      </p:sp>
+      <p:sp>
+        <p:nvSpPr>
+          <p:cNvPr id="9" name="Rectangle 8"/>
+          <p:cNvSpPr/>
+          <p:nvPr/>
+        </p:nvSpPr>
+        <p:spPr>
+          <a:xfrm>
+            <a:off x="6263640" y="1234440"/>
+            <a:ext cx="91440" cy="1828800"/>
+          </a:xfrm>
+          <a:prstGeom prst="rect">
+            <a:avLst/>
+          </a:prstGeom>
+          <a:solidFill>
+            <a:srgbClr val="02C39A"/>
+          </a:solidFill>
+          <a:ln>
+            <a:noFill/>
+          </a:ln>
+        </p:spPr>
+        <p:style>
+          <a:lnRef idx="1">
+            <a:schemeClr val="accent1"/>
+          </a:lnRef>
+          <a:fillRef idx="3">
+            <a:schemeClr val="accent1"/>
+          </a:fillRef>
+          <a:effectRef idx="2">
+            <a:schemeClr val="accent1"/>
+          </a:effectRef>
+          <a:fontRef idx="minor">
+            <a:schemeClr val="lt1"/>
+          </a:fontRef>
+        </p:style>
+        <p:txBody>
+          <a:bodyPr rtlCol="0" anchor="ctr"/>
+          <a:lstStyle/>
+          <a:p>
+            <a:pPr algn="ctr"/>
+          </a:p>
+        </p:txBody>
+      </p:sp>
+      <p:sp>
+        <p:nvSpPr>
+          <p:cNvPr id="10" name="TextBox 9"/>
+          <p:cNvSpPr txBox="1"/>
+          <p:nvPr/>
+        </p:nvSpPr>
+        <p:spPr>
+          <a:xfrm>
+            <a:off x="6446520" y="1344168"/>
+            <a:ext cx="4983480" cy="1664208"/>
+          </a:xfrm>
+          <a:prstGeom prst="rect">
+            <a:avLst/>
+          </a:prstGeom>
+          <a:noFill/>
+        </p:spPr>
+        <p:txBody>
+          <a:bodyPr wrap="square" lIns="0" rIns="0">
+            <a:spAutoFit/>
+          </a:bodyPr>
+          <a:lstStyle/>
+          <a:p>
+            <a:pPr>
+              <a:defRPr b="1" sz="1500">
+                <a:solidFill>
+                  <a:srgbClr val="1E2761"/>
+                </a:solidFill>
+                <a:latin typeface="Aptos Display"/>
+              </a:defRPr>
+            </a:pPr>
+            <a:r>
+              <a:t>Why it helps</a:t>
             </a:r>
           </a:p>
           <a:p>
@@ -13885,29 +13309,25 @@
               </a:defRPr>
             </a:pPr>
             <a:r>
-              <a:t>• Workspace operations</a:t>
+              <a:t>• Permissions</a:t>
             </a:r>
             <a:br/>
             <a:r>
-              <a:t>• Import/export</a:t>
-            </a:r>
-            <a:br/>
-            <a:r>
-              <a:t>• Refresh</a:t>
-            </a:r>
-          </a:p>
-        </p:txBody>
-      </p:sp>
-      <p:sp>
-        <p:nvSpPr>
-          <p:cNvPr id="8" name="Rounded Rectangle 7"/>
+              <a:t>• Endpoint and cloud validation</a:t>
+            </a:r>
+          </a:p>
+        </p:txBody>
+      </p:sp>
+      <p:sp>
+        <p:nvSpPr>
+          <p:cNvPr id="11" name="Rounded Rectangle 10"/>
           <p:cNvSpPr/>
           <p:nvPr/>
         </p:nvSpPr>
         <p:spPr>
           <a:xfrm>
-            <a:off x="6263640" y="1234440"/>
-            <a:ext cx="5303520" cy="1828800"/>
+            <a:off x="822960" y="4160520"/>
+            <a:ext cx="10424160" cy="868680"/>
           </a:xfrm>
           <a:prstGeom prst="roundRect">
             <a:avLst/>
@@ -13945,20 +13365,20 @@
       </p:sp>
       <p:sp>
         <p:nvSpPr>
-          <p:cNvPr id="9" name="Rectangle 8"/>
+          <p:cNvPr id="12" name="Rectangle 11"/>
           <p:cNvSpPr/>
           <p:nvPr/>
         </p:nvSpPr>
         <p:spPr>
           <a:xfrm>
-            <a:off x="6263640" y="1234440"/>
-            <a:ext cx="91440" cy="1828800"/>
+            <a:off x="822960" y="4160520"/>
+            <a:ext cx="91440" cy="868680"/>
           </a:xfrm>
           <a:prstGeom prst="rect">
             <a:avLst/>
           </a:prstGeom>
           <a:solidFill>
-            <a:srgbClr val="02C39A"/>
+            <a:srgbClr val="F9B700"/>
           </a:solidFill>
           <a:ln>
             <a:noFill/>
@@ -13988,14 +13408,14 @@
       </p:sp>
       <p:sp>
         <p:nvSpPr>
-          <p:cNvPr id="10" name="TextBox 9"/>
+          <p:cNvPr id="13" name="TextBox 12"/>
           <p:cNvSpPr txBox="1"/>
           <p:nvPr/>
         </p:nvSpPr>
         <p:spPr>
           <a:xfrm>
-            <a:off x="6446520" y="1344168"/>
-            <a:ext cx="4983480" cy="1664208"/>
+            <a:off x="1005840" y="4270248"/>
+            <a:ext cx="10104120" cy="704088"/>
           </a:xfrm>
           <a:prstGeom prst="rect">
             <a:avLst/>
@@ -14017,167 +13437,7 @@
               </a:defRPr>
             </a:pPr>
             <a:r>
-              <a:t>Why it helps</a:t>
-            </a:r>
-          </a:p>
-          <a:p>
-            <a:pPr>
-              <a:spcBef>
-                <a:spcPts val="400"/>
-              </a:spcBef>
-              <a:defRPr sz="1050">
-                <a:solidFill>
-                  <a:srgbClr val="242424"/>
-                </a:solidFill>
-                <a:latin typeface="Aptos"/>
-              </a:defRPr>
-            </a:pPr>
-            <a:r>
-              <a:t>• Permissions</a:t>
-            </a:r>
-            <a:br/>
-            <a:r>
-              <a:t>• Endpoint and cloud validation</a:t>
-            </a:r>
-          </a:p>
-        </p:txBody>
-      </p:sp>
-      <p:sp>
-        <p:nvSpPr>
-          <p:cNvPr id="11" name="Rounded Rectangle 10"/>
-          <p:cNvSpPr/>
-          <p:nvPr/>
-        </p:nvSpPr>
-        <p:spPr>
-          <a:xfrm>
-            <a:off x="822960" y="4160520"/>
-            <a:ext cx="10424160" cy="868680"/>
-          </a:xfrm>
-          <a:prstGeom prst="roundRect">
-            <a:avLst/>
-          </a:prstGeom>
-          <a:solidFill>
-            <a:srgbClr val="FFFFFF"/>
-          </a:solidFill>
-          <a:ln>
-            <a:solidFill>
-              <a:srgbClr val="DCDCDC"/>
-            </a:solidFill>
-          </a:ln>
-        </p:spPr>
-        <p:style>
-          <a:lnRef idx="1">
-            <a:schemeClr val="accent1"/>
-          </a:lnRef>
-          <a:fillRef idx="3">
-            <a:schemeClr val="accent1"/>
-          </a:fillRef>
-          <a:effectRef idx="2">
-            <a:schemeClr val="accent1"/>
-          </a:effectRef>
-          <a:fontRef idx="minor">
-            <a:schemeClr val="lt1"/>
-          </a:fontRef>
-        </p:style>
-        <p:txBody>
-          <a:bodyPr rtlCol="0" anchor="ctr"/>
-          <a:lstStyle/>
-          <a:p>
-            <a:pPr algn="ctr"/>
-          </a:p>
-        </p:txBody>
-      </p:sp>
-      <p:sp>
-        <p:nvSpPr>
-          <p:cNvPr id="12" name="Rectangle 11"/>
-          <p:cNvSpPr/>
-          <p:nvPr/>
-        </p:nvSpPr>
-        <p:spPr>
-          <a:xfrm>
-            <a:off x="822960" y="4160520"/>
-            <a:ext cx="91440" cy="868680"/>
-          </a:xfrm>
-          <a:prstGeom prst="rect">
-            <a:avLst/>
-          </a:prstGeom>
-          <a:solidFill>
-            <a:srgbClr val="F9B700"/>
-          </a:solidFill>
-          <a:ln>
-            <a:noFill/>
-          </a:ln>
-        </p:spPr>
-        <p:style>
-          <a:lnRef idx="1">
-            <a:schemeClr val="accent1"/>
-          </a:lnRef>
-          <a:fillRef idx="3">
-            <a:schemeClr val="accent1"/>
-          </a:fillRef>
-          <a:effectRef idx="2">
-            <a:schemeClr val="accent1"/>
-          </a:effectRef>
-          <a:fontRef idx="minor">
-            <a:schemeClr val="lt1"/>
-          </a:fontRef>
-        </p:style>
-        <p:txBody>
-          <a:bodyPr rtlCol="0" anchor="ctr"/>
-          <a:lstStyle/>
-          <a:p>
-            <a:pPr algn="ctr"/>
-          </a:p>
-        </p:txBody>
-      </p:sp>
-      <p:sp>
-        <p:nvSpPr>
-          <p:cNvPr id="13" name="TextBox 12"/>
-          <p:cNvSpPr txBox="1"/>
-          <p:nvPr/>
-        </p:nvSpPr>
-        <p:spPr>
-          <a:xfrm>
-            <a:off x="1005840" y="4270248"/>
-            <a:ext cx="10104120" cy="704088"/>
-          </a:xfrm>
-          <a:prstGeom prst="rect">
-            <a:avLst/>
-          </a:prstGeom>
-          <a:noFill/>
-        </p:spPr>
-        <p:txBody>
-          <a:bodyPr wrap="square" lIns="0" rIns="0">
-            <a:spAutoFit/>
-          </a:bodyPr>
-          <a:lstStyle/>
-          <a:p>
-            <a:pPr>
-              <a:defRPr b="1" sz="1500">
-                <a:solidFill>
-                  <a:srgbClr val="1E2761"/>
-                </a:solidFill>
-                <a:latin typeface="Aptos Display"/>
-              </a:defRPr>
-            </a:pPr>
-            <a:r>
-              <a:t>Lab connection</a:t>
-            </a:r>
-          </a:p>
-          <a:p>
-            <a:pPr>
-              <a:spcBef>
-                <a:spcPts val="400"/>
-              </a:spcBef>
-              <a:defRPr sz="1050">
-                <a:solidFill>
-                  <a:srgbClr val="242424"/>
-                </a:solidFill>
-                <a:latin typeface="Aptos"/>
-              </a:defRPr>
-            </a:pPr>
-            <a:r>
-              <a:t>Coverage: Covered. Use the lab README to demonstrate or discuss this topic. Review terms: export, import, refresh.</a:t>
+              <a:t>In the lab, you will apply this pattern, validate the expected behavior, and discuss where it fits in a real Power BI solution.</a:t>
             </a:r>
           </a:p>
         </p:txBody>
@@ -14316,42 +13576,6 @@
       </p:sp>
       <p:sp>
         <p:nvSpPr>
-          <p:cNvPr id="4" name="TextBox 3"/>
-          <p:cNvSpPr txBox="1"/>
-          <p:nvPr/>
-        </p:nvSpPr>
-        <p:spPr>
-          <a:xfrm>
-            <a:off x="530352" y="914400"/>
-            <a:ext cx="10515600" cy="320040"/>
-          </a:xfrm>
-          <a:prstGeom prst="rect">
-            <a:avLst/>
-          </a:prstGeom>
-          <a:noFill/>
-        </p:spPr>
-        <p:txBody>
-          <a:bodyPr wrap="none">
-            <a:spAutoFit/>
-          </a:bodyPr>
-          <a:lstStyle/>
-          <a:p>
-            <a:pPr>
-              <a:defRPr sz="1200">
-                <a:solidFill>
-                  <a:srgbClr val="5C5C5C"/>
-                </a:solidFill>
-                <a:latin typeface="Aptos"/>
-              </a:defRPr>
-            </a:pPr>
-            <a:r>
-              <a:t>Talking points, learner value, and lab connection</a:t>
-            </a:r>
-          </a:p>
-        </p:txBody>
-      </p:sp>
-      <p:sp>
-        <p:nvSpPr>
           <p:cNvPr id="5" name="Rounded Rectangle 4"/>
           <p:cNvSpPr/>
           <p:nvPr/>
@@ -14469,7 +13693,143 @@
               </a:defRPr>
             </a:pPr>
             <a:r>
-              <a:t>Talking points</a:t>
+              <a:t>Key ideas</a:t>
+            </a:r>
+            <a:br/>
+            <a:r>
+              <a:t>• Entra ID app registration</a:t>
+            </a:r>
+            <a:br/>
+            <a:r>
+              <a:t>• Tenant settings</a:t>
+            </a:r>
+            <a:br/>
+            <a:r>
+              <a:t>• Security groups</a:t>
+            </a:r>
+          </a:p>
+        </p:txBody>
+      </p:sp>
+      <p:sp>
+        <p:nvSpPr>
+          <p:cNvPr id="8" name="Rounded Rectangle 7"/>
+          <p:cNvSpPr/>
+          <p:nvPr/>
+        </p:nvSpPr>
+        <p:spPr>
+          <a:xfrm>
+            <a:off x="6263640" y="1234440"/>
+            <a:ext cx="5303520" cy="1828800"/>
+          </a:xfrm>
+          <a:prstGeom prst="roundRect">
+            <a:avLst/>
+          </a:prstGeom>
+          <a:solidFill>
+            <a:srgbClr val="FFFFFF"/>
+          </a:solidFill>
+          <a:ln>
+            <a:solidFill>
+              <a:srgbClr val="DCDCDC"/>
+            </a:solidFill>
+          </a:ln>
+        </p:spPr>
+        <p:style>
+          <a:lnRef idx="1">
+            <a:schemeClr val="accent1"/>
+          </a:lnRef>
+          <a:fillRef idx="3">
+            <a:schemeClr val="accent1"/>
+          </a:fillRef>
+          <a:effectRef idx="2">
+            <a:schemeClr val="accent1"/>
+          </a:effectRef>
+          <a:fontRef idx="minor">
+            <a:schemeClr val="lt1"/>
+          </a:fontRef>
+        </p:style>
+        <p:txBody>
+          <a:bodyPr rtlCol="0" anchor="ctr"/>
+          <a:lstStyle/>
+          <a:p>
+            <a:pPr algn="ctr"/>
+          </a:p>
+        </p:txBody>
+      </p:sp>
+      <p:sp>
+        <p:nvSpPr>
+          <p:cNvPr id="9" name="Rectangle 8"/>
+          <p:cNvSpPr/>
+          <p:nvPr/>
+        </p:nvSpPr>
+        <p:spPr>
+          <a:xfrm>
+            <a:off x="6263640" y="1234440"/>
+            <a:ext cx="91440" cy="1828800"/>
+          </a:xfrm>
+          <a:prstGeom prst="rect">
+            <a:avLst/>
+          </a:prstGeom>
+          <a:solidFill>
+            <a:srgbClr val="02C39A"/>
+          </a:solidFill>
+          <a:ln>
+            <a:noFill/>
+          </a:ln>
+        </p:spPr>
+        <p:style>
+          <a:lnRef idx="1">
+            <a:schemeClr val="accent1"/>
+          </a:lnRef>
+          <a:fillRef idx="3">
+            <a:schemeClr val="accent1"/>
+          </a:fillRef>
+          <a:effectRef idx="2">
+            <a:schemeClr val="accent1"/>
+          </a:effectRef>
+          <a:fontRef idx="minor">
+            <a:schemeClr val="lt1"/>
+          </a:fontRef>
+        </p:style>
+        <p:txBody>
+          <a:bodyPr rtlCol="0" anchor="ctr"/>
+          <a:lstStyle/>
+          <a:p>
+            <a:pPr algn="ctr"/>
+          </a:p>
+        </p:txBody>
+      </p:sp>
+      <p:sp>
+        <p:nvSpPr>
+          <p:cNvPr id="10" name="TextBox 9"/>
+          <p:cNvSpPr txBox="1"/>
+          <p:nvPr/>
+        </p:nvSpPr>
+        <p:spPr>
+          <a:xfrm>
+            <a:off x="6446520" y="1344168"/>
+            <a:ext cx="4983480" cy="1664208"/>
+          </a:xfrm>
+          <a:prstGeom prst="rect">
+            <a:avLst/>
+          </a:prstGeom>
+          <a:noFill/>
+        </p:spPr>
+        <p:txBody>
+          <a:bodyPr wrap="square" lIns="0" rIns="0">
+            <a:spAutoFit/>
+          </a:bodyPr>
+          <a:lstStyle/>
+          <a:p>
+            <a:pPr>
+              <a:defRPr b="1" sz="1500">
+                <a:solidFill>
+                  <a:srgbClr val="1E2761"/>
+                </a:solidFill>
+                <a:latin typeface="Aptos Display"/>
+              </a:defRPr>
+            </a:pPr>
+            <a:r>
+              <a:t>Why it helps</a:t>
             </a:r>
           </a:p>
           <a:p>
@@ -14485,29 +13845,25 @@
               </a:defRPr>
             </a:pPr>
             <a:r>
-              <a:t>• Entra ID app registration</a:t>
+              <a:t>• Workspace access</a:t>
             </a:r>
             <a:br/>
             <a:r>
-              <a:t>• Tenant settings</a:t>
-            </a:r>
-            <a:br/>
-            <a:r>
-              <a:t>• Security groups</a:t>
-            </a:r>
-          </a:p>
-        </p:txBody>
-      </p:sp>
-      <p:sp>
-        <p:nvSpPr>
-          <p:cNvPr id="8" name="Rounded Rectangle 7"/>
+              <a:t>• Secret/certificate handling</a:t>
+            </a:r>
+          </a:p>
+        </p:txBody>
+      </p:sp>
+      <p:sp>
+        <p:nvSpPr>
+          <p:cNvPr id="11" name="Rounded Rectangle 10"/>
           <p:cNvSpPr/>
           <p:nvPr/>
         </p:nvSpPr>
         <p:spPr>
           <a:xfrm>
-            <a:off x="6263640" y="1234440"/>
-            <a:ext cx="5303520" cy="1828800"/>
+            <a:off x="822960" y="4160520"/>
+            <a:ext cx="10424160" cy="868680"/>
           </a:xfrm>
           <a:prstGeom prst="roundRect">
             <a:avLst/>
@@ -14545,20 +13901,20 @@
       </p:sp>
       <p:sp>
         <p:nvSpPr>
-          <p:cNvPr id="9" name="Rectangle 8"/>
+          <p:cNvPr id="12" name="Rectangle 11"/>
           <p:cNvSpPr/>
           <p:nvPr/>
         </p:nvSpPr>
         <p:spPr>
           <a:xfrm>
-            <a:off x="6263640" y="1234440"/>
-            <a:ext cx="91440" cy="1828800"/>
+            <a:off x="822960" y="4160520"/>
+            <a:ext cx="91440" cy="868680"/>
           </a:xfrm>
           <a:prstGeom prst="rect">
             <a:avLst/>
           </a:prstGeom>
           <a:solidFill>
-            <a:srgbClr val="02C39A"/>
+            <a:srgbClr val="F9B700"/>
           </a:solidFill>
           <a:ln>
             <a:noFill/>
@@ -14588,14 +13944,14 @@
       </p:sp>
       <p:sp>
         <p:nvSpPr>
-          <p:cNvPr id="10" name="TextBox 9"/>
+          <p:cNvPr id="13" name="TextBox 12"/>
           <p:cNvSpPr txBox="1"/>
           <p:nvPr/>
         </p:nvSpPr>
         <p:spPr>
           <a:xfrm>
-            <a:off x="6446520" y="1344168"/>
-            <a:ext cx="4983480" cy="1664208"/>
+            <a:off x="1005840" y="4270248"/>
+            <a:ext cx="10104120" cy="704088"/>
           </a:xfrm>
           <a:prstGeom prst="rect">
             <a:avLst/>
@@ -14617,167 +13973,7 @@
               </a:defRPr>
             </a:pPr>
             <a:r>
-              <a:t>Why it helps</a:t>
-            </a:r>
-          </a:p>
-          <a:p>
-            <a:pPr>
-              <a:spcBef>
-                <a:spcPts val="400"/>
-              </a:spcBef>
-              <a:defRPr sz="1050">
-                <a:solidFill>
-                  <a:srgbClr val="242424"/>
-                </a:solidFill>
-                <a:latin typeface="Aptos"/>
-              </a:defRPr>
-            </a:pPr>
-            <a:r>
-              <a:t>• Workspace access</a:t>
-            </a:r>
-            <a:br/>
-            <a:r>
-              <a:t>• Secret/certificate handling</a:t>
-            </a:r>
-          </a:p>
-        </p:txBody>
-      </p:sp>
-      <p:sp>
-        <p:nvSpPr>
-          <p:cNvPr id="11" name="Rounded Rectangle 10"/>
-          <p:cNvSpPr/>
-          <p:nvPr/>
-        </p:nvSpPr>
-        <p:spPr>
-          <a:xfrm>
-            <a:off x="822960" y="4160520"/>
-            <a:ext cx="10424160" cy="868680"/>
-          </a:xfrm>
-          <a:prstGeom prst="roundRect">
-            <a:avLst/>
-          </a:prstGeom>
-          <a:solidFill>
-            <a:srgbClr val="FFFFFF"/>
-          </a:solidFill>
-          <a:ln>
-            <a:solidFill>
-              <a:srgbClr val="DCDCDC"/>
-            </a:solidFill>
-          </a:ln>
-        </p:spPr>
-        <p:style>
-          <a:lnRef idx="1">
-            <a:schemeClr val="accent1"/>
-          </a:lnRef>
-          <a:fillRef idx="3">
-            <a:schemeClr val="accent1"/>
-          </a:fillRef>
-          <a:effectRef idx="2">
-            <a:schemeClr val="accent1"/>
-          </a:effectRef>
-          <a:fontRef idx="minor">
-            <a:schemeClr val="lt1"/>
-          </a:fontRef>
-        </p:style>
-        <p:txBody>
-          <a:bodyPr rtlCol="0" anchor="ctr"/>
-          <a:lstStyle/>
-          <a:p>
-            <a:pPr algn="ctr"/>
-          </a:p>
-        </p:txBody>
-      </p:sp>
-      <p:sp>
-        <p:nvSpPr>
-          <p:cNvPr id="12" name="Rectangle 11"/>
-          <p:cNvSpPr/>
-          <p:nvPr/>
-        </p:nvSpPr>
-        <p:spPr>
-          <a:xfrm>
-            <a:off x="822960" y="4160520"/>
-            <a:ext cx="91440" cy="868680"/>
-          </a:xfrm>
-          <a:prstGeom prst="rect">
-            <a:avLst/>
-          </a:prstGeom>
-          <a:solidFill>
-            <a:srgbClr val="F9B700"/>
-          </a:solidFill>
-          <a:ln>
-            <a:noFill/>
-          </a:ln>
-        </p:spPr>
-        <p:style>
-          <a:lnRef idx="1">
-            <a:schemeClr val="accent1"/>
-          </a:lnRef>
-          <a:fillRef idx="3">
-            <a:schemeClr val="accent1"/>
-          </a:fillRef>
-          <a:effectRef idx="2">
-            <a:schemeClr val="accent1"/>
-          </a:effectRef>
-          <a:fontRef idx="minor">
-            <a:schemeClr val="lt1"/>
-          </a:fontRef>
-        </p:style>
-        <p:txBody>
-          <a:bodyPr rtlCol="0" anchor="ctr"/>
-          <a:lstStyle/>
-          <a:p>
-            <a:pPr algn="ctr"/>
-          </a:p>
-        </p:txBody>
-      </p:sp>
-      <p:sp>
-        <p:nvSpPr>
-          <p:cNvPr id="13" name="TextBox 12"/>
-          <p:cNvSpPr txBox="1"/>
-          <p:nvPr/>
-        </p:nvSpPr>
-        <p:spPr>
-          <a:xfrm>
-            <a:off x="1005840" y="4270248"/>
-            <a:ext cx="10104120" cy="704088"/>
-          </a:xfrm>
-          <a:prstGeom prst="rect">
-            <a:avLst/>
-          </a:prstGeom>
-          <a:noFill/>
-        </p:spPr>
-        <p:txBody>
-          <a:bodyPr wrap="square" lIns="0" rIns="0">
-            <a:spAutoFit/>
-          </a:bodyPr>
-          <a:lstStyle/>
-          <a:p>
-            <a:pPr>
-              <a:defRPr b="1" sz="1500">
-                <a:solidFill>
-                  <a:srgbClr val="1E2761"/>
-                </a:solidFill>
-                <a:latin typeface="Aptos Display"/>
-              </a:defRPr>
-            </a:pPr>
-            <a:r>
-              <a:t>Lab connection</a:t>
-            </a:r>
-          </a:p>
-          <a:p>
-            <a:pPr>
-              <a:spcBef>
-                <a:spcPts val="400"/>
-              </a:spcBef>
-              <a:defRPr sz="1050">
-                <a:solidFill>
-                  <a:srgbClr val="242424"/>
-                </a:solidFill>
-                <a:latin typeface="Aptos"/>
-              </a:defRPr>
-            </a:pPr>
-            <a:r>
-              <a:t>Coverage: Covered. Use the lab README to demonstrate or discuss this topic. Review terms: groups.</a:t>
+              <a:t>In the lab, you will apply this pattern, validate the expected behavior, and discuss where it fits in a real Power BI solution.</a:t>
             </a:r>
           </a:p>
         </p:txBody>
